--- a/Tracey-Scott-Portfolio.pptx
+++ b/Tracey-Scott-Portfolio.pptx
@@ -128,7 +128,7 @@
             <a:pPr>
               <a:defRPr sz="1400" b="0" i="0" u="none" strike="noStrike">
                 <a:solidFill>
-                  <a:srgbClr val="2C5F2D"/>
+                  <a:srgbClr val="1E2761"/>
                 </a:solidFill>
                 <a:latin typeface="Arial"/>
               </a:defRPr>
@@ -136,7 +136,7 @@
             <a:r>
               <a:rPr sz="1400" b="0" i="0" u="none" strike="noStrike">
                 <a:solidFill>
-                  <a:srgbClr val="2C5F2D"/>
+                  <a:srgbClr val="1E2761"/>
                 </a:solidFill>
                 <a:latin typeface="Arial"/>
               </a:rPr>
@@ -169,11 +169,11 @@
           </c:tx>
           <c:spPr>
             <a:solidFill>
-              <a:srgbClr val="D4A017"/>
+              <a:srgbClr val="F59E0B"/>
             </a:solidFill>
             <a:ln w="38100" cap="flat">
               <a:solidFill>
-                <a:srgbClr val="D4A017"/>
+                <a:srgbClr val="F59E0B"/>
               </a:solidFill>
               <a:prstDash val="solid"/>
               <a:round/>
@@ -190,7 +190,7 @@
                 <a:pPr>
                   <a:defRPr b="0" i="0" strike="noStrike" sz="1200" u="none">
                     <a:solidFill>
-                      <a:srgbClr val="1A2E1A"/>
+                      <a:srgbClr val="0F172A"/>
                     </a:solidFill>
                     <a:latin typeface="Arial"/>
                   </a:defRPr>
@@ -210,11 +210,11 @@
             <c:size val="6"/>
             <c:spPr>
               <a:solidFill>
-                <a:srgbClr val="D4A017"/>
+                <a:srgbClr val="F59E0B"/>
               </a:solidFill>
               <a:ln w="9525" cap="flat">
                 <a:solidFill>
-                  <a:srgbClr val="D4A017"/>
+                  <a:srgbClr val="F59E0B"/>
                 </a:solidFill>
                 <a:prstDash val="solid"/>
                 <a:round/>
@@ -288,7 +288,7 @@
               <a:pPr>
                 <a:defRPr b="0" i="0" strike="noStrike" sz="1200" u="none">
                   <a:solidFill>
-                    <a:srgbClr val="1A2E1A"/>
+                    <a:srgbClr val="0F172A"/>
                   </a:solidFill>
                   <a:latin typeface="Arial"/>
                 </a:defRPr>
@@ -335,7 +335,7 @@
             <a:pPr>
               <a:defRPr sz="1200" b="0" i="0" u="none" strike="noStrike">
                 <a:solidFill>
-                  <a:srgbClr val="6B7C5C"/>
+                  <a:srgbClr val="64748B"/>
                 </a:solidFill>
                 <a:latin typeface="Arial"/>
               </a:defRPr>
@@ -387,7 +387,7 @@
             <a:pPr>
               <a:defRPr sz="1200" b="0" i="0" u="none" strike="noStrike">
                 <a:solidFill>
-                  <a:srgbClr val="6B7C5C"/>
+                  <a:srgbClr val="64748B"/>
                 </a:solidFill>
                 <a:latin typeface="Arial"/>
               </a:defRPr>
@@ -439,7 +439,7 @@
             <a:pPr>
               <a:defRPr sz="1400" b="0" i="0" u="none" strike="noStrike">
                 <a:solidFill>
-                  <a:srgbClr val="2C5F2D"/>
+                  <a:srgbClr val="1E2761"/>
                 </a:solidFill>
                 <a:latin typeface="Arial"/>
               </a:defRPr>
@@ -447,7 +447,7 @@
             <a:r>
               <a:rPr sz="1400" b="0" i="0" u="none" strike="noStrike">
                 <a:solidFill>
-                  <a:srgbClr val="2C5F2D"/>
+                  <a:srgbClr val="1E2761"/>
                 </a:solidFill>
                 <a:latin typeface="Arial"/>
               </a:rPr>
@@ -496,7 +496,7 @@
             <c:bubble3D val="0"/>
             <c:spPr>
               <a:solidFill>
-                <a:srgbClr val="2C5F2D"/>
+                <a:srgbClr val="1E2761"/>
               </a:solidFill>
               <a:effectLst/>
             </c:spPr>
@@ -506,7 +506,7 @@
             <c:bubble3D val="0"/>
             <c:spPr>
               <a:solidFill>
-                <a:srgbClr val="97BC62"/>
+                <a:srgbClr val="CADCFC"/>
               </a:solidFill>
               <a:effectLst/>
             </c:spPr>
@@ -523,7 +523,7 @@
                   <a:pPr>
                     <a:defRPr sz="1200" b="0" i="0" u="none" strike="noStrike">
                       <a:solidFill>
-                        <a:srgbClr val="F5F5F5"/>
+                        <a:srgbClr val="FFFFFF"/>
                       </a:solidFill>
                       <a:latin typeface="Arial"/>
                     </a:defRPr>
@@ -548,7 +548,7 @@
                   <a:pPr>
                     <a:defRPr sz="1200" b="0" i="0" u="none" strike="noStrike">
                       <a:solidFill>
-                        <a:srgbClr val="F5F5F5"/>
+                        <a:srgbClr val="FFFFFF"/>
                       </a:solidFill>
                       <a:latin typeface="Arial"/>
                     </a:defRPr>
@@ -669,7 +669,7 @@
           </c:tx>
           <c:spPr>
             <a:solidFill>
-              <a:srgbClr val="2C5F2D"/>
+              <a:srgbClr val="1E2761"/>
             </a:solidFill>
             <a:effectLst/>
           </c:spPr>
@@ -683,7 +683,7 @@
                 <a:pPr>
                   <a:defRPr b="0" i="0" strike="noStrike" sz="1200" u="none">
                     <a:solidFill>
-                      <a:srgbClr val="1A2E1A"/>
+                      <a:srgbClr val="0F172A"/>
                     </a:solidFill>
                     <a:latin typeface="Arial"/>
                   </a:defRPr>
@@ -775,7 +775,7 @@
               <a:pPr>
                 <a:defRPr b="0" i="0" strike="noStrike" sz="1200" u="none">
                   <a:solidFill>
-                    <a:srgbClr val="1A2E1A"/>
+                    <a:srgbClr val="0F172A"/>
                   </a:solidFill>
                   <a:latin typeface="Arial"/>
                 </a:defRPr>
@@ -823,7 +823,7 @@
             <a:pPr>
               <a:defRPr sz="1300" b="0" i="0" u="none" strike="noStrike">
                 <a:solidFill>
-                  <a:srgbClr val="1A2E1A"/>
+                  <a:srgbClr val="0F172A"/>
                 </a:solidFill>
                 <a:latin typeface="Arial"/>
               </a:defRPr>
@@ -877,7 +877,7 @@
             <a:pPr>
               <a:defRPr sz="1200" b="0" i="0" u="none" strike="noStrike">
                 <a:solidFill>
-                  <a:srgbClr val="6B7C5C"/>
+                  <a:srgbClr val="64748B"/>
                 </a:solidFill>
                 <a:latin typeface="Arial"/>
               </a:defRPr>
@@ -2281,7 +2281,7 @@
     <p:bg>
       <p:bgPr>
         <a:solidFill>
-          <a:srgbClr val="2C5F2D"/>
+          <a:srgbClr val="1E2761"/>
         </a:solidFill>
       </p:bgPr>
     </p:bg>
@@ -2314,7 +2314,7 @@
             <a:avLst/>
           </a:prstGeom>
           <a:solidFill>
-            <a:srgbClr val="D4A017"/>
+            <a:srgbClr val="F59E0B"/>
           </a:solidFill>
           <a:ln/>
         </p:spPr>
@@ -2346,7 +2346,7 @@
             <a:r>
               <a:rPr lang="en-US" sz="6000" b="1" spc="200" kern="0" dirty="0">
                 <a:solidFill>
-                  <a:srgbClr val="F5F5F5"/>
+                  <a:srgbClr val="FFFFFF"/>
                 </a:solidFill>
                 <a:latin typeface="Georgia" pitchFamily="34" charset="0"/>
                 <a:ea typeface="Georgia" pitchFamily="34" charset="-122"/>
@@ -2385,7 +2385,7 @@
             <a:r>
               <a:rPr lang="en-US" sz="2200" dirty="0">
                 <a:solidFill>
-                  <a:srgbClr val="97BC62"/>
+                  <a:srgbClr val="CADCFC"/>
                 </a:solidFill>
                 <a:latin typeface="Calibri" pitchFamily="34" charset="0"/>
                 <a:ea typeface="Calibri" pitchFamily="34" charset="-122"/>
@@ -2412,7 +2412,7 @@
             <a:avLst/>
           </a:prstGeom>
           <a:solidFill>
-            <a:srgbClr val="D4A017"/>
+            <a:srgbClr val="F59E0B"/>
           </a:solidFill>
           <a:ln/>
         </p:spPr>
@@ -2444,7 +2444,7 @@
             <a:r>
               <a:rPr lang="en-US" sz="1600" dirty="0">
                 <a:solidFill>
-                  <a:srgbClr val="F5F5F5"/>
+                  <a:srgbClr val="FFFFFF"/>
                 </a:solidFill>
               </a:rPr>
               <a:t>IT Operations Manager &amp; Business Analyst  |  Greenville, SC</a:t>
@@ -2480,7 +2480,7 @@
             <a:r>
               <a:rPr lang="en-US" sz="1400" i="1" dirty="0">
                 <a:solidFill>
-                  <a:srgbClr val="D4A017"/>
+                  <a:srgbClr val="F59E0B"/>
                 </a:solidFill>
               </a:rPr>
               <a:t>Portfolio Deck  •  2026</a:t>
@@ -2503,7 +2503,7 @@
     <p:bg>
       <p:bgPr>
         <a:solidFill>
-          <a:srgbClr val="F5F5F5"/>
+          <a:srgbClr val="FFFFFF"/>
         </a:solidFill>
       </p:bgPr>
     </p:bg>
@@ -2548,7 +2548,7 @@
             <a:r>
               <a:rPr lang="en-US" sz="4000" b="1" dirty="0">
                 <a:solidFill>
-                  <a:srgbClr val="2C5F2D"/>
+                  <a:srgbClr val="1E2761"/>
                 </a:solidFill>
                 <a:latin typeface="Georgia" pitchFamily="34" charset="0"/>
                 <a:ea typeface="Georgia" pitchFamily="34" charset="-122"/>
@@ -2575,7 +2575,7 @@
             <a:avLst/>
           </a:prstGeom>
           <a:solidFill>
-            <a:srgbClr val="97BC62"/>
+            <a:srgbClr val="CADCFC"/>
           </a:solidFill>
           <a:ln/>
         </p:spPr>
@@ -2610,7 +2610,7 @@
             <a:r>
               <a:rPr lang="en-US" sz="1500" dirty="0">
                 <a:solidFill>
-                  <a:srgbClr val="1A2E1A"/>
+                  <a:srgbClr val="0F172A"/>
                 </a:solidFill>
                 <a:latin typeface="Calibri" pitchFamily="34" charset="0"/>
                 <a:ea typeface="Calibri" pitchFamily="34" charset="-122"/>
@@ -2630,7 +2630,7 @@
             <a:r>
               <a:rPr lang="en-US" sz="1500" dirty="0">
                 <a:solidFill>
-                  <a:srgbClr val="1A2E1A"/>
+                  <a:srgbClr val="0F172A"/>
                 </a:solidFill>
                 <a:latin typeface="Calibri" pitchFamily="34" charset="0"/>
                 <a:ea typeface="Calibri" pitchFamily="34" charset="-122"/>
@@ -2647,7 +2647,7 @@
             <a:r>
               <a:rPr lang="en-US" sz="1500" dirty="0">
                 <a:solidFill>
-                  <a:srgbClr val="1A2E1A"/>
+                  <a:srgbClr val="0F172A"/>
                 </a:solidFill>
                 <a:latin typeface="Calibri" pitchFamily="34" charset="0"/>
                 <a:ea typeface="Calibri" pitchFamily="34" charset="-122"/>
@@ -2674,7 +2674,7 @@
             <a:avLst/>
           </a:prstGeom>
           <a:solidFill>
-            <a:srgbClr val="2C5F2D"/>
+            <a:srgbClr val="1E2761"/>
           </a:solidFill>
           <a:ln/>
         </p:spPr>
@@ -2694,7 +2694,7 @@
             <a:avLst/>
           </a:prstGeom>
           <a:solidFill>
-            <a:srgbClr val="D4A017"/>
+            <a:srgbClr val="F59E0B"/>
           </a:solidFill>
           <a:ln/>
         </p:spPr>
@@ -2726,7 +2726,7 @@
             <a:r>
               <a:rPr lang="en-US" sz="4800" b="1" dirty="0">
                 <a:solidFill>
-                  <a:srgbClr val="F5F5F5"/>
+                  <a:srgbClr val="FFFFFF"/>
                 </a:solidFill>
                 <a:latin typeface="Georgia" pitchFamily="34" charset="0"/>
                 <a:ea typeface="Georgia" pitchFamily="34" charset="-122"/>
@@ -2765,7 +2765,7 @@
             <a:r>
               <a:rPr lang="en-US" sz="1300" dirty="0">
                 <a:solidFill>
-                  <a:srgbClr val="97BC62"/>
+                  <a:srgbClr val="CADCFC"/>
                 </a:solidFill>
               </a:rPr>
               <a:t>Years Experience</a:t>
@@ -2789,7 +2789,7 @@
             <a:avLst/>
           </a:prstGeom>
           <a:solidFill>
-            <a:srgbClr val="2C5F2D"/>
+            <a:srgbClr val="1E2761"/>
           </a:solidFill>
           <a:ln/>
         </p:spPr>
@@ -2809,7 +2809,7 @@
             <a:avLst/>
           </a:prstGeom>
           <a:solidFill>
-            <a:srgbClr val="D4A017"/>
+            <a:srgbClr val="F59E0B"/>
           </a:solidFill>
           <a:ln/>
         </p:spPr>
@@ -2841,7 +2841,7 @@
             <a:r>
               <a:rPr lang="en-US" sz="4800" b="1" dirty="0">
                 <a:solidFill>
-                  <a:srgbClr val="F5F5F5"/>
+                  <a:srgbClr val="FFFFFF"/>
                 </a:solidFill>
                 <a:latin typeface="Georgia" pitchFamily="34" charset="0"/>
                 <a:ea typeface="Georgia" pitchFamily="34" charset="-122"/>
@@ -2880,7 +2880,7 @@
             <a:r>
               <a:rPr lang="en-US" sz="1300" dirty="0">
                 <a:solidFill>
-                  <a:srgbClr val="97BC62"/>
+                  <a:srgbClr val="CADCFC"/>
                 </a:solidFill>
               </a:rPr>
               <a:t>Months to Full Security Framework</a:t>
@@ -2904,7 +2904,7 @@
             <a:avLst/>
           </a:prstGeom>
           <a:solidFill>
-            <a:srgbClr val="2C5F2D"/>
+            <a:srgbClr val="1E2761"/>
           </a:solidFill>
           <a:ln/>
         </p:spPr>
@@ -2924,7 +2924,7 @@
             <a:avLst/>
           </a:prstGeom>
           <a:solidFill>
-            <a:srgbClr val="D4A017"/>
+            <a:srgbClr val="F59E0B"/>
           </a:solidFill>
           <a:ln/>
         </p:spPr>
@@ -2956,7 +2956,7 @@
             <a:r>
               <a:rPr lang="en-US" sz="4800" b="1" dirty="0">
                 <a:solidFill>
-                  <a:srgbClr val="F5F5F5"/>
+                  <a:srgbClr val="FFFFFF"/>
                 </a:solidFill>
                 <a:latin typeface="Georgia" pitchFamily="34" charset="0"/>
                 <a:ea typeface="Georgia" pitchFamily="34" charset="-122"/>
@@ -2995,7 +2995,7 @@
             <a:r>
               <a:rPr lang="en-US" sz="1300" dirty="0">
                 <a:solidFill>
-                  <a:srgbClr val="97BC62"/>
+                  <a:srgbClr val="CADCFC"/>
                 </a:solidFill>
               </a:rPr>
               <a:t>Predictive Model Accuracy</a:t>
@@ -3019,7 +3019,7 @@
             <a:avLst/>
           </a:prstGeom>
           <a:solidFill>
-            <a:srgbClr val="2C5F2D"/>
+            <a:srgbClr val="1E2761"/>
           </a:solidFill>
           <a:ln/>
         </p:spPr>
@@ -3039,7 +3039,7 @@
             <a:avLst/>
           </a:prstGeom>
           <a:solidFill>
-            <a:srgbClr val="D4A017"/>
+            <a:srgbClr val="F59E0B"/>
           </a:solidFill>
           <a:ln/>
         </p:spPr>
@@ -3071,7 +3071,7 @@
             <a:r>
               <a:rPr lang="en-US" sz="4800" b="1" dirty="0">
                 <a:solidFill>
-                  <a:srgbClr val="F5F5F5"/>
+                  <a:srgbClr val="FFFFFF"/>
                 </a:solidFill>
                 <a:latin typeface="Georgia" pitchFamily="34" charset="0"/>
                 <a:ea typeface="Georgia" pitchFamily="34" charset="-122"/>
@@ -3110,7 +3110,7 @@
             <a:r>
               <a:rPr lang="en-US" sz="1300" dirty="0">
                 <a:solidFill>
-                  <a:srgbClr val="97BC62"/>
+                  <a:srgbClr val="CADCFC"/>
                 </a:solidFill>
               </a:rPr>
               <a:t>Clouds (AWS • Azure • GCP)</a:t>
@@ -3134,7 +3134,7 @@
             <a:avLst/>
           </a:prstGeom>
           <a:solidFill>
-            <a:srgbClr val="2C5F2D"/>
+            <a:srgbClr val="1E2761"/>
           </a:solidFill>
           <a:ln/>
         </p:spPr>
@@ -3166,7 +3166,7 @@
             <a:r>
               <a:rPr lang="en-US" sz="1000" dirty="0">
                 <a:solidFill>
-                  <a:srgbClr val="97BC62"/>
+                  <a:srgbClr val="CADCFC"/>
                 </a:solidFill>
               </a:rPr>
               <a:t>Tracey Scott  |  Cybersecurity • Cloud • SOC  |  traceysscott82@gmail.com</a:t>
@@ -3202,7 +3202,7 @@
             <a:r>
               <a:rPr lang="en-US" sz="1000" dirty="0">
                 <a:solidFill>
-                  <a:srgbClr val="97BC62"/>
+                  <a:srgbClr val="CADCFC"/>
                 </a:solidFill>
               </a:rPr>
               <a:t>2</a:t>
@@ -3225,7 +3225,7 @@
     <p:bg>
       <p:bgPr>
         <a:solidFill>
-          <a:srgbClr val="F5F5F5"/>
+          <a:srgbClr val="FFFFFF"/>
         </a:solidFill>
       </p:bgPr>
     </p:bg>
@@ -3270,7 +3270,7 @@
             <a:r>
               <a:rPr lang="en-US" sz="3600" b="1" dirty="0">
                 <a:solidFill>
-                  <a:srgbClr val="2C5F2D"/>
+                  <a:srgbClr val="1E2761"/>
                 </a:solidFill>
                 <a:latin typeface="Georgia" pitchFamily="34" charset="0"/>
                 <a:ea typeface="Georgia" pitchFamily="34" charset="-122"/>
@@ -3297,11 +3297,11 @@
             <a:avLst/>
           </a:prstGeom>
           <a:solidFill>
-            <a:srgbClr val="F5F5F5"/>
+            <a:srgbClr val="FFFFFF"/>
           </a:solidFill>
           <a:ln w="12700">
             <a:solidFill>
-              <a:srgbClr val="97BC62"/>
+              <a:srgbClr val="CADCFC"/>
             </a:solidFill>
             <a:prstDash val="solid"/>
           </a:ln>
@@ -3329,7 +3329,7 @@
             <a:avLst/>
           </a:prstGeom>
           <a:solidFill>
-            <a:srgbClr val="D4A017"/>
+            <a:srgbClr val="F59E0B"/>
           </a:solidFill>
           <a:ln/>
         </p:spPr>
@@ -3361,7 +3361,7 @@
             <a:r>
               <a:rPr lang="en-US" sz="1800" b="1" dirty="0">
                 <a:solidFill>
-                  <a:srgbClr val="2C5F2D"/>
+                  <a:srgbClr val="1E2761"/>
                 </a:solidFill>
                 <a:latin typeface="Georgia" pitchFamily="34" charset="0"/>
                 <a:ea typeface="Georgia" pitchFamily="34" charset="-122"/>
@@ -3401,7 +3401,7 @@
             <a:r>
               <a:rPr lang="en-US" sz="1300" dirty="0">
                 <a:solidFill>
-                  <a:srgbClr val="1A2E1A"/>
+                  <a:srgbClr val="0F172A"/>
                 </a:solidFill>
               </a:rPr>
               <a:t>IDS/IPS &amp; Firewall Admin</a:t>
@@ -3416,7 +3416,7 @@
             <a:r>
               <a:rPr lang="en-US" sz="1300" dirty="0">
                 <a:solidFill>
-                  <a:srgbClr val="1A2E1A"/>
+                  <a:srgbClr val="0F172A"/>
                 </a:solidFill>
               </a:rPr>
               <a:t>Endpoint / EDR &amp; MDM</a:t>
@@ -3431,7 +3431,7 @@
             <a:r>
               <a:rPr lang="en-US" sz="1300" dirty="0">
                 <a:solidFill>
-                  <a:srgbClr val="1A2E1A"/>
+                  <a:srgbClr val="0F172A"/>
                 </a:solidFill>
               </a:rPr>
               <a:t>Incident Response</a:t>
@@ -3446,7 +3446,7 @@
             <a:r>
               <a:rPr lang="en-US" sz="1300" dirty="0">
                 <a:solidFill>
-                  <a:srgbClr val="1A2E1A"/>
+                  <a:srgbClr val="0F172A"/>
                 </a:solidFill>
               </a:rPr>
               <a:t>Log Analysis &amp; SIEM</a:t>
@@ -3470,11 +3470,11 @@
             <a:avLst/>
           </a:prstGeom>
           <a:solidFill>
-            <a:srgbClr val="F5F5F5"/>
+            <a:srgbClr val="FFFFFF"/>
           </a:solidFill>
           <a:ln w="12700">
             <a:solidFill>
-              <a:srgbClr val="97BC62"/>
+              <a:srgbClr val="CADCFC"/>
             </a:solidFill>
             <a:prstDash val="solid"/>
           </a:ln>
@@ -3502,7 +3502,7 @@
             <a:avLst/>
           </a:prstGeom>
           <a:solidFill>
-            <a:srgbClr val="D4A017"/>
+            <a:srgbClr val="F59E0B"/>
           </a:solidFill>
           <a:ln/>
         </p:spPr>
@@ -3534,7 +3534,7 @@
             <a:r>
               <a:rPr lang="en-US" sz="1800" b="1" dirty="0">
                 <a:solidFill>
-                  <a:srgbClr val="2C5F2D"/>
+                  <a:srgbClr val="1E2761"/>
                 </a:solidFill>
                 <a:latin typeface="Georgia" pitchFamily="34" charset="0"/>
                 <a:ea typeface="Georgia" pitchFamily="34" charset="-122"/>
@@ -3574,7 +3574,7 @@
             <a:r>
               <a:rPr lang="en-US" sz="1300" dirty="0">
                 <a:solidFill>
-                  <a:srgbClr val="1A2E1A"/>
+                  <a:srgbClr val="0F172A"/>
                 </a:solidFill>
               </a:rPr>
               <a:t>AWS, Azure, GCP</a:t>
@@ -3589,7 +3589,7 @@
             <a:r>
               <a:rPr lang="en-US" sz="1300" dirty="0">
                 <a:solidFill>
-                  <a:srgbClr val="1A2E1A"/>
+                  <a:srgbClr val="0F172A"/>
                 </a:solidFill>
               </a:rPr>
               <a:t>IAM / RBAC / Azure AD</a:t>
@@ -3604,7 +3604,7 @@
             <a:r>
               <a:rPr lang="en-US" sz="1300" dirty="0">
                 <a:solidFill>
-                  <a:srgbClr val="1A2E1A"/>
+                  <a:srgbClr val="0F172A"/>
                 </a:solidFill>
               </a:rPr>
               <a:t>VMware, Hyper-V, Docker</a:t>
@@ -3619,7 +3619,7 @@
             <a:r>
               <a:rPr lang="en-US" sz="1300" dirty="0">
                 <a:solidFill>
-                  <a:srgbClr val="1A2E1A"/>
+                  <a:srgbClr val="0F172A"/>
                 </a:solidFill>
               </a:rPr>
               <a:t>M365 &amp; SaaS Admin</a:t>
@@ -3643,11 +3643,11 @@
             <a:avLst/>
           </a:prstGeom>
           <a:solidFill>
-            <a:srgbClr val="F5F5F5"/>
+            <a:srgbClr val="FFFFFF"/>
           </a:solidFill>
           <a:ln w="12700">
             <a:solidFill>
-              <a:srgbClr val="97BC62"/>
+              <a:srgbClr val="CADCFC"/>
             </a:solidFill>
             <a:prstDash val="solid"/>
           </a:ln>
@@ -3675,7 +3675,7 @@
             <a:avLst/>
           </a:prstGeom>
           <a:solidFill>
-            <a:srgbClr val="D4A017"/>
+            <a:srgbClr val="F59E0B"/>
           </a:solidFill>
           <a:ln/>
         </p:spPr>
@@ -3707,7 +3707,7 @@
             <a:r>
               <a:rPr lang="en-US" sz="1800" b="1" dirty="0">
                 <a:solidFill>
-                  <a:srgbClr val="2C5F2D"/>
+                  <a:srgbClr val="1E2761"/>
                 </a:solidFill>
                 <a:latin typeface="Georgia" pitchFamily="34" charset="0"/>
                 <a:ea typeface="Georgia" pitchFamily="34" charset="-122"/>
@@ -3747,7 +3747,7 @@
             <a:r>
               <a:rPr lang="en-US" sz="1300" dirty="0">
                 <a:solidFill>
-                  <a:srgbClr val="1A2E1A"/>
+                  <a:srgbClr val="0F172A"/>
                 </a:solidFill>
               </a:rPr>
               <a:t>GDPR, SOX, ITIL</a:t>
@@ -3762,7 +3762,7 @@
             <a:r>
               <a:rPr lang="en-US" sz="1300" dirty="0">
                 <a:solidFill>
-                  <a:srgbClr val="1A2E1A"/>
+                  <a:srgbClr val="0F172A"/>
                 </a:solidFill>
               </a:rPr>
               <a:t>Risk Assessment</a:t>
@@ -3777,7 +3777,7 @@
             <a:r>
               <a:rPr lang="en-US" sz="1300" dirty="0">
                 <a:solidFill>
-                  <a:srgbClr val="1A2E1A"/>
+                  <a:srgbClr val="0F172A"/>
                 </a:solidFill>
               </a:rPr>
               <a:t>Vulnerability Management</a:t>
@@ -3792,7 +3792,7 @@
             <a:r>
               <a:rPr lang="en-US" sz="1300" dirty="0">
                 <a:solidFill>
-                  <a:srgbClr val="1A2E1A"/>
+                  <a:srgbClr val="0F172A"/>
                 </a:solidFill>
               </a:rPr>
               <a:t>Security Policy Design</a:t>
@@ -3816,11 +3816,11 @@
             <a:avLst/>
           </a:prstGeom>
           <a:solidFill>
-            <a:srgbClr val="F5F5F5"/>
+            <a:srgbClr val="FFFFFF"/>
           </a:solidFill>
           <a:ln w="12700">
             <a:solidFill>
-              <a:srgbClr val="97BC62"/>
+              <a:srgbClr val="CADCFC"/>
             </a:solidFill>
             <a:prstDash val="solid"/>
           </a:ln>
@@ -3848,7 +3848,7 @@
             <a:avLst/>
           </a:prstGeom>
           <a:solidFill>
-            <a:srgbClr val="D4A017"/>
+            <a:srgbClr val="F59E0B"/>
           </a:solidFill>
           <a:ln/>
         </p:spPr>
@@ -3880,7 +3880,7 @@
             <a:r>
               <a:rPr lang="en-US" sz="1800" b="1" dirty="0">
                 <a:solidFill>
-                  <a:srgbClr val="2C5F2D"/>
+                  <a:srgbClr val="1E2761"/>
                 </a:solidFill>
                 <a:latin typeface="Georgia" pitchFamily="34" charset="0"/>
                 <a:ea typeface="Georgia" pitchFamily="34" charset="-122"/>
@@ -3920,7 +3920,7 @@
             <a:r>
               <a:rPr lang="en-US" sz="1300" dirty="0">
                 <a:solidFill>
-                  <a:srgbClr val="1A2E1A"/>
+                  <a:srgbClr val="0F172A"/>
                 </a:solidFill>
               </a:rPr>
               <a:t>PowerShell, Python, SQL</a:t>
@@ -3935,7 +3935,7 @@
             <a:r>
               <a:rPr lang="en-US" sz="1300" dirty="0">
                 <a:solidFill>
-                  <a:srgbClr val="1A2E1A"/>
+                  <a:srgbClr val="0F172A"/>
                 </a:solidFill>
               </a:rPr>
               <a:t>Power BI &amp; Tableau</a:t>
@@ -3950,7 +3950,7 @@
             <a:r>
               <a:rPr lang="en-US" sz="1300" dirty="0">
                 <a:solidFill>
-                  <a:srgbClr val="1A2E1A"/>
+                  <a:srgbClr val="0F172A"/>
                 </a:solidFill>
               </a:rPr>
               <a:t>Predictive Modeling</a:t>
@@ -3965,7 +3965,7 @@
             <a:r>
               <a:rPr lang="en-US" sz="1300" dirty="0">
                 <a:solidFill>
-                  <a:srgbClr val="1A2E1A"/>
+                  <a:srgbClr val="0F172A"/>
                 </a:solidFill>
               </a:rPr>
               <a:t>Workflow Automation</a:t>
@@ -3989,7 +3989,7 @@
             <a:avLst/>
           </a:prstGeom>
           <a:solidFill>
-            <a:srgbClr val="2C5F2D"/>
+            <a:srgbClr val="1E2761"/>
           </a:solidFill>
           <a:ln/>
         </p:spPr>
@@ -4021,7 +4021,7 @@
             <a:r>
               <a:rPr lang="en-US" sz="1000" dirty="0">
                 <a:solidFill>
-                  <a:srgbClr val="97BC62"/>
+                  <a:srgbClr val="CADCFC"/>
                 </a:solidFill>
               </a:rPr>
               <a:t>Tracey Scott  |  Cybersecurity • Cloud • SOC  |  traceysscott82@gmail.com</a:t>
@@ -4057,7 +4057,7 @@
             <a:r>
               <a:rPr lang="en-US" sz="1000" dirty="0">
                 <a:solidFill>
-                  <a:srgbClr val="97BC62"/>
+                  <a:srgbClr val="CADCFC"/>
                 </a:solidFill>
               </a:rPr>
               <a:t>3</a:t>
@@ -4080,7 +4080,7 @@
     <p:bg>
       <p:bgPr>
         <a:solidFill>
-          <a:srgbClr val="F5F5F5"/>
+          <a:srgbClr val="FFFFFF"/>
         </a:solidFill>
       </p:bgPr>
     </p:bg>
@@ -4125,7 +4125,7 @@
             <a:r>
               <a:rPr lang="en-US" sz="3600" b="1" dirty="0">
                 <a:solidFill>
-                  <a:srgbClr val="2C5F2D"/>
+                  <a:srgbClr val="1E2761"/>
                 </a:solidFill>
                 <a:latin typeface="Georgia" pitchFamily="34" charset="0"/>
                 <a:ea typeface="Georgia" pitchFamily="34" charset="-122"/>
@@ -4164,7 +4164,7 @@
             <a:r>
               <a:rPr lang="en-US" sz="1400" i="1" dirty="0">
                 <a:solidFill>
-                  <a:srgbClr val="6B7C5C"/>
+                  <a:srgbClr val="64748B"/>
                 </a:solidFill>
               </a:rPr>
               <a:t>Executive view I built at RightPath to monitor posture, incidents, and compliance.</a:t>
@@ -4188,7 +4188,7 @@
             <a:avLst/>
           </a:prstGeom>
           <a:solidFill>
-            <a:srgbClr val="2C5F2D"/>
+            <a:srgbClr val="1E2761"/>
           </a:solidFill>
           <a:ln/>
         </p:spPr>
@@ -4220,7 +4220,7 @@
             <a:r>
               <a:rPr lang="en-US" sz="3000" b="1" dirty="0">
                 <a:solidFill>
-                  <a:srgbClr val="D4A017"/>
+                  <a:srgbClr val="F59E0B"/>
                 </a:solidFill>
                 <a:latin typeface="Georgia" pitchFamily="34" charset="0"/>
                 <a:ea typeface="Georgia" pitchFamily="34" charset="-122"/>
@@ -4259,7 +4259,7 @@
             <a:r>
               <a:rPr lang="en-US" sz="1200" dirty="0">
                 <a:solidFill>
-                  <a:srgbClr val="97BC62"/>
+                  <a:srgbClr val="CADCFC"/>
                 </a:solidFill>
               </a:rPr>
               <a:t>Uptime</a:t>
@@ -4283,7 +4283,7 @@
             <a:avLst/>
           </a:prstGeom>
           <a:solidFill>
-            <a:srgbClr val="2C5F2D"/>
+            <a:srgbClr val="1E2761"/>
           </a:solidFill>
           <a:ln/>
         </p:spPr>
@@ -4315,7 +4315,7 @@
             <a:r>
               <a:rPr lang="en-US" sz="3000" b="1" dirty="0">
                 <a:solidFill>
-                  <a:srgbClr val="D4A017"/>
+                  <a:srgbClr val="F59E0B"/>
                 </a:solidFill>
                 <a:latin typeface="Georgia" pitchFamily="34" charset="0"/>
                 <a:ea typeface="Georgia" pitchFamily="34" charset="-122"/>
@@ -4354,7 +4354,7 @@
             <a:r>
               <a:rPr lang="en-US" sz="1200" dirty="0">
                 <a:solidFill>
-                  <a:srgbClr val="97BC62"/>
+                  <a:srgbClr val="CADCFC"/>
                 </a:solidFill>
               </a:rPr>
               <a:t>Critical Breaches</a:t>
@@ -4378,7 +4378,7 @@
             <a:avLst/>
           </a:prstGeom>
           <a:solidFill>
-            <a:srgbClr val="2C5F2D"/>
+            <a:srgbClr val="1E2761"/>
           </a:solidFill>
           <a:ln/>
         </p:spPr>
@@ -4410,7 +4410,7 @@
             <a:r>
               <a:rPr lang="en-US" sz="3000" b="1" dirty="0">
                 <a:solidFill>
-                  <a:srgbClr val="D4A017"/>
+                  <a:srgbClr val="F59E0B"/>
                 </a:solidFill>
                 <a:latin typeface="Georgia" pitchFamily="34" charset="0"/>
                 <a:ea typeface="Georgia" pitchFamily="34" charset="-122"/>
@@ -4449,7 +4449,7 @@
             <a:r>
               <a:rPr lang="en-US" sz="1200" dirty="0">
                 <a:solidFill>
-                  <a:srgbClr val="97BC62"/>
+                  <a:srgbClr val="CADCFC"/>
                 </a:solidFill>
               </a:rPr>
               <a:t>Threats Mitigated</a:t>
@@ -4473,7 +4473,7 @@
             <a:avLst/>
           </a:prstGeom>
           <a:solidFill>
-            <a:srgbClr val="2C5F2D"/>
+            <a:srgbClr val="1E2761"/>
           </a:solidFill>
           <a:ln/>
         </p:spPr>
@@ -4505,7 +4505,7 @@
             <a:r>
               <a:rPr lang="en-US" sz="3000" b="1" dirty="0">
                 <a:solidFill>
-                  <a:srgbClr val="D4A017"/>
+                  <a:srgbClr val="F59E0B"/>
                 </a:solidFill>
                 <a:latin typeface="Georgia" pitchFamily="34" charset="0"/>
                 <a:ea typeface="Georgia" pitchFamily="34" charset="-122"/>
@@ -4544,7 +4544,7 @@
             <a:r>
               <a:rPr lang="en-US" sz="1200" dirty="0">
                 <a:solidFill>
-                  <a:srgbClr val="97BC62"/>
+                  <a:srgbClr val="CADCFC"/>
                 </a:solidFill>
               </a:rPr>
               <a:t>RBAC Coverage</a:t>
@@ -4600,7 +4600,7 @@
             <a:avLst/>
           </a:prstGeom>
           <a:solidFill>
-            <a:srgbClr val="2C5F2D"/>
+            <a:srgbClr val="1E2761"/>
           </a:solidFill>
           <a:ln/>
         </p:spPr>
@@ -4632,7 +4632,7 @@
             <a:r>
               <a:rPr lang="en-US" sz="1000" dirty="0">
                 <a:solidFill>
-                  <a:srgbClr val="97BC62"/>
+                  <a:srgbClr val="CADCFC"/>
                 </a:solidFill>
               </a:rPr>
               <a:t>Tracey Scott  |  Cybersecurity • Cloud • SOC  |  traceysscott82@gmail.com</a:t>
@@ -4668,7 +4668,7 @@
             <a:r>
               <a:rPr lang="en-US" sz="1000" dirty="0">
                 <a:solidFill>
-                  <a:srgbClr val="97BC62"/>
+                  <a:srgbClr val="CADCFC"/>
                 </a:solidFill>
               </a:rPr>
               <a:t>4</a:t>
@@ -4691,7 +4691,7 @@
     <p:bg>
       <p:bgPr>
         <a:solidFill>
-          <a:srgbClr val="F5F5F5"/>
+          <a:srgbClr val="FFFFFF"/>
         </a:solidFill>
       </p:bgPr>
     </p:bg>
@@ -4736,7 +4736,7 @@
             <a:r>
               <a:rPr lang="en-US" sz="3600" b="1" dirty="0">
                 <a:solidFill>
-                  <a:srgbClr val="2C5F2D"/>
+                  <a:srgbClr val="1E2761"/>
                 </a:solidFill>
                 <a:latin typeface="Georgia" pitchFamily="34" charset="0"/>
                 <a:ea typeface="Georgia" pitchFamily="34" charset="-122"/>
@@ -4763,7 +4763,7 @@
             <a:avLst/>
           </a:prstGeom>
           <a:solidFill>
-            <a:srgbClr val="97BC62"/>
+            <a:srgbClr val="CADCFC"/>
           </a:solidFill>
           <a:ln/>
         </p:spPr>
@@ -4783,7 +4783,7 @@
             <a:avLst/>
           </a:prstGeom>
           <a:solidFill>
-            <a:srgbClr val="D4A017"/>
+            <a:srgbClr val="F59E0B"/>
           </a:solidFill>
           <a:ln/>
         </p:spPr>
@@ -4815,7 +4815,7 @@
             <a:r>
               <a:rPr lang="en-US" sz="1300" b="1" dirty="0">
                 <a:solidFill>
-                  <a:srgbClr val="D4A017"/>
+                  <a:srgbClr val="F59E0B"/>
                 </a:solidFill>
                 <a:latin typeface="Georgia" pitchFamily="34" charset="0"/>
                 <a:ea typeface="Georgia" pitchFamily="34" charset="-122"/>
@@ -4854,7 +4854,7 @@
             <a:r>
               <a:rPr lang="en-US" sz="1400" b="1" dirty="0">
                 <a:solidFill>
-                  <a:srgbClr val="2C5F2D"/>
+                  <a:srgbClr val="1E2761"/>
                 </a:solidFill>
               </a:rPr>
               <a:t>Enterprise Security Framework</a:t>
@@ -4890,7 +4890,7 @@
             <a:r>
               <a:rPr lang="en-US" sz="1100" dirty="0">
                 <a:solidFill>
-                  <a:srgbClr val="1A2E1A"/>
+                  <a:srgbClr val="0F172A"/>
                 </a:solidFill>
               </a:rPr>
               <a:t>Architected endpoint, IDS/IPS, MDM, and access governance for startup in 6 months.</a:t>
@@ -4914,7 +4914,7 @@
             <a:avLst/>
           </a:prstGeom>
           <a:solidFill>
-            <a:srgbClr val="97BC62"/>
+            <a:srgbClr val="CADCFC"/>
           </a:solidFill>
           <a:ln/>
         </p:spPr>
@@ -4934,7 +4934,7 @@
             <a:avLst/>
           </a:prstGeom>
           <a:solidFill>
-            <a:srgbClr val="D4A017"/>
+            <a:srgbClr val="F59E0B"/>
           </a:solidFill>
           <a:ln/>
         </p:spPr>
@@ -4966,7 +4966,7 @@
             <a:r>
               <a:rPr lang="en-US" sz="1300" b="1" dirty="0">
                 <a:solidFill>
-                  <a:srgbClr val="D4A017"/>
+                  <a:srgbClr val="F59E0B"/>
                 </a:solidFill>
                 <a:latin typeface="Georgia" pitchFamily="34" charset="0"/>
                 <a:ea typeface="Georgia" pitchFamily="34" charset="-122"/>
@@ -5005,7 +5005,7 @@
             <a:r>
               <a:rPr lang="en-US" sz="1400" b="1" dirty="0">
                 <a:solidFill>
-                  <a:srgbClr val="2C5F2D"/>
+                  <a:srgbClr val="1E2761"/>
                 </a:solidFill>
               </a:rPr>
               <a:t>Secure Multi-Cloud Deployment</a:t>
@@ -5041,7 +5041,7 @@
             <a:r>
               <a:rPr lang="en-US" sz="1100" dirty="0">
                 <a:solidFill>
-                  <a:srgbClr val="1A2E1A"/>
+                  <a:srgbClr val="0F172A"/>
                 </a:solidFill>
               </a:rPr>
               <a:t>AWS + Azure infrastructure with IAM, RBAC, encryption, and least-privilege controls.</a:t>
@@ -5065,7 +5065,7 @@
             <a:avLst/>
           </a:prstGeom>
           <a:solidFill>
-            <a:srgbClr val="97BC62"/>
+            <a:srgbClr val="CADCFC"/>
           </a:solidFill>
           <a:ln/>
         </p:spPr>
@@ -5085,7 +5085,7 @@
             <a:avLst/>
           </a:prstGeom>
           <a:solidFill>
-            <a:srgbClr val="D4A017"/>
+            <a:srgbClr val="F59E0B"/>
           </a:solidFill>
           <a:ln/>
         </p:spPr>
@@ -5117,7 +5117,7 @@
             <a:r>
               <a:rPr lang="en-US" sz="1300" b="1" dirty="0">
                 <a:solidFill>
-                  <a:srgbClr val="D4A017"/>
+                  <a:srgbClr val="F59E0B"/>
                 </a:solidFill>
                 <a:latin typeface="Georgia" pitchFamily="34" charset="0"/>
                 <a:ea typeface="Georgia" pitchFamily="34" charset="-122"/>
@@ -5156,7 +5156,7 @@
             <a:r>
               <a:rPr lang="en-US" sz="1400" b="1" dirty="0">
                 <a:solidFill>
-                  <a:srgbClr val="2C5F2D"/>
+                  <a:srgbClr val="1E2761"/>
                 </a:solidFill>
               </a:rPr>
               <a:t>CRM Secure Deployment</a:t>
@@ -5192,7 +5192,7 @@
             <a:r>
               <a:rPr lang="en-US" sz="1100" dirty="0">
                 <a:solidFill>
-                  <a:srgbClr val="1A2E1A"/>
+                  <a:srgbClr val="0F172A"/>
                 </a:solidFill>
               </a:rPr>
               <a:t>Led CRM configuration with secure auth, encryption, and role-based permissions.</a:t>
@@ -5216,7 +5216,7 @@
             <a:avLst/>
           </a:prstGeom>
           <a:solidFill>
-            <a:srgbClr val="97BC62"/>
+            <a:srgbClr val="CADCFC"/>
           </a:solidFill>
           <a:ln/>
         </p:spPr>
@@ -5236,7 +5236,7 @@
             <a:avLst/>
           </a:prstGeom>
           <a:solidFill>
-            <a:srgbClr val="D4A017"/>
+            <a:srgbClr val="F59E0B"/>
           </a:solidFill>
           <a:ln/>
         </p:spPr>
@@ -5268,7 +5268,7 @@
             <a:r>
               <a:rPr lang="en-US" sz="1300" b="1" dirty="0">
                 <a:solidFill>
-                  <a:srgbClr val="D4A017"/>
+                  <a:srgbClr val="F59E0B"/>
                 </a:solidFill>
                 <a:latin typeface="Georgia" pitchFamily="34" charset="0"/>
                 <a:ea typeface="Georgia" pitchFamily="34" charset="-122"/>
@@ -5307,7 +5307,7 @@
             <a:r>
               <a:rPr lang="en-US" sz="1400" b="1" dirty="0">
                 <a:solidFill>
-                  <a:srgbClr val="2C5F2D"/>
+                  <a:srgbClr val="1E2761"/>
                 </a:solidFill>
               </a:rPr>
               <a:t>Executive Dashboards</a:t>
@@ -5343,7 +5343,7 @@
             <a:r>
               <a:rPr lang="en-US" sz="1100" dirty="0">
                 <a:solidFill>
-                  <a:srgbClr val="1A2E1A"/>
+                  <a:srgbClr val="0F172A"/>
                 </a:solidFill>
               </a:rPr>
               <a:t>Built Power BI dashboards for incidents, access activity, and compliance metrics.</a:t>
@@ -5367,7 +5367,7 @@
             <a:avLst/>
           </a:prstGeom>
           <a:solidFill>
-            <a:srgbClr val="97BC62"/>
+            <a:srgbClr val="CADCFC"/>
           </a:solidFill>
           <a:ln/>
         </p:spPr>
@@ -5387,7 +5387,7 @@
             <a:avLst/>
           </a:prstGeom>
           <a:solidFill>
-            <a:srgbClr val="D4A017"/>
+            <a:srgbClr val="F59E0B"/>
           </a:solidFill>
           <a:ln/>
         </p:spPr>
@@ -5419,7 +5419,7 @@
             <a:r>
               <a:rPr lang="en-US" sz="1300" b="1" dirty="0">
                 <a:solidFill>
-                  <a:srgbClr val="D4A017"/>
+                  <a:srgbClr val="F59E0B"/>
                 </a:solidFill>
                 <a:latin typeface="Georgia" pitchFamily="34" charset="0"/>
                 <a:ea typeface="Georgia" pitchFamily="34" charset="-122"/>
@@ -5458,7 +5458,7 @@
             <a:r>
               <a:rPr lang="en-US" sz="1400" b="1" dirty="0">
                 <a:solidFill>
-                  <a:srgbClr val="2C5F2D"/>
+                  <a:srgbClr val="1E2761"/>
                 </a:solidFill>
               </a:rPr>
               <a:t>Incident Response Program</a:t>
@@ -5494,7 +5494,7 @@
             <a:r>
               <a:rPr lang="en-US" sz="1100" dirty="0">
                 <a:solidFill>
-                  <a:srgbClr val="1A2E1A"/>
+                  <a:srgbClr val="0F172A"/>
                 </a:solidFill>
               </a:rPr>
               <a:t>Developed IR documentation, escalation playbooks, and remediation workflows.</a:t>
@@ -5518,7 +5518,7 @@
             <a:avLst/>
           </a:prstGeom>
           <a:solidFill>
-            <a:srgbClr val="97BC62"/>
+            <a:srgbClr val="CADCFC"/>
           </a:solidFill>
           <a:ln/>
         </p:spPr>
@@ -5538,7 +5538,7 @@
             <a:avLst/>
           </a:prstGeom>
           <a:solidFill>
-            <a:srgbClr val="D4A017"/>
+            <a:srgbClr val="F59E0B"/>
           </a:solidFill>
           <a:ln/>
         </p:spPr>
@@ -5570,7 +5570,7 @@
             <a:r>
               <a:rPr lang="en-US" sz="1300" b="1" dirty="0">
                 <a:solidFill>
-                  <a:srgbClr val="D4A017"/>
+                  <a:srgbClr val="F59E0B"/>
                 </a:solidFill>
                 <a:latin typeface="Georgia" pitchFamily="34" charset="0"/>
                 <a:ea typeface="Georgia" pitchFamily="34" charset="-122"/>
@@ -5609,7 +5609,7 @@
             <a:r>
               <a:rPr lang="en-US" sz="1400" b="1" dirty="0">
                 <a:solidFill>
-                  <a:srgbClr val="2C5F2D"/>
+                  <a:srgbClr val="1E2761"/>
                 </a:solidFill>
               </a:rPr>
               <a:t>DR &amp; Business Continuity</a:t>
@@ -5645,7 +5645,7 @@
             <a:r>
               <a:rPr lang="en-US" sz="1100" dirty="0">
                 <a:solidFill>
-                  <a:srgbClr val="1A2E1A"/>
+                  <a:srgbClr val="0F172A"/>
                 </a:solidFill>
               </a:rPr>
               <a:t>Backup, disaster recovery, and BCP procedures for hybrid infrastructure.</a:t>
@@ -5669,7 +5669,7 @@
             <a:avLst/>
           </a:prstGeom>
           <a:solidFill>
-            <a:srgbClr val="97BC62"/>
+            <a:srgbClr val="CADCFC"/>
           </a:solidFill>
           <a:ln/>
         </p:spPr>
@@ -5689,7 +5689,7 @@
             <a:avLst/>
           </a:prstGeom>
           <a:solidFill>
-            <a:srgbClr val="D4A017"/>
+            <a:srgbClr val="F59E0B"/>
           </a:solidFill>
           <a:ln/>
         </p:spPr>
@@ -5721,7 +5721,7 @@
             <a:r>
               <a:rPr lang="en-US" sz="1300" b="1" dirty="0">
                 <a:solidFill>
-                  <a:srgbClr val="D4A017"/>
+                  <a:srgbClr val="F59E0B"/>
                 </a:solidFill>
                 <a:latin typeface="Georgia" pitchFamily="34" charset="0"/>
                 <a:ea typeface="Georgia" pitchFamily="34" charset="-122"/>
@@ -5760,7 +5760,7 @@
             <a:r>
               <a:rPr lang="en-US" sz="1400" b="1" dirty="0">
                 <a:solidFill>
-                  <a:srgbClr val="2C5F2D"/>
+                  <a:srgbClr val="1E2761"/>
                 </a:solidFill>
               </a:rPr>
               <a:t>Internal AI Chatbots</a:t>
@@ -5796,7 +5796,7 @@
             <a:r>
               <a:rPr lang="en-US" sz="1100" dirty="0">
                 <a:solidFill>
-                  <a:srgbClr val="1A2E1A"/>
+                  <a:srgbClr val="0F172A"/>
                 </a:solidFill>
               </a:rPr>
               <a:t>Built AI chatbots for multiple departments with CRM, Microsoft 365, and SharePoint connectivity.</a:t>
@@ -5820,7 +5820,7 @@
             <a:avLst/>
           </a:prstGeom>
           <a:solidFill>
-            <a:srgbClr val="2C5F2D"/>
+            <a:srgbClr val="1E2761"/>
           </a:solidFill>
           <a:ln/>
         </p:spPr>
@@ -5852,7 +5852,7 @@
             <a:r>
               <a:rPr lang="en-US" sz="1000" dirty="0">
                 <a:solidFill>
-                  <a:srgbClr val="97BC62"/>
+                  <a:srgbClr val="CADCFC"/>
                 </a:solidFill>
               </a:rPr>
               <a:t>Tracey Scott  |  Cybersecurity • Cloud • SOC  |  traceysscott82@gmail.com</a:t>
@@ -5888,7 +5888,7 @@
             <a:r>
               <a:rPr lang="en-US" sz="1000" dirty="0">
                 <a:solidFill>
-                  <a:srgbClr val="97BC62"/>
+                  <a:srgbClr val="CADCFC"/>
                 </a:solidFill>
               </a:rPr>
               <a:t>5</a:t>
@@ -5911,7 +5911,7 @@
     <p:bg>
       <p:bgPr>
         <a:solidFill>
-          <a:srgbClr val="F5F5F5"/>
+          <a:srgbClr val="FFFFFF"/>
         </a:solidFill>
       </p:bgPr>
     </p:bg>
@@ -5956,7 +5956,7 @@
             <a:r>
               <a:rPr lang="en-US" sz="3600" b="1" dirty="0">
                 <a:solidFill>
-                  <a:srgbClr val="2C5F2D"/>
+                  <a:srgbClr val="1E2761"/>
                 </a:solidFill>
                 <a:latin typeface="Georgia" pitchFamily="34" charset="0"/>
                 <a:ea typeface="Georgia" pitchFamily="34" charset="-122"/>
@@ -5995,7 +5995,7 @@
             <a:r>
               <a:rPr lang="en-US" sz="1400" i="1" dirty="0">
                 <a:solidFill>
-                  <a:srgbClr val="6B7C5C"/>
+                  <a:srgbClr val="64748B"/>
                 </a:solidFill>
               </a:rPr>
               <a:t>Self-assessed proficiency across the stack I use in production.</a:t>
@@ -6035,7 +6035,7 @@
             <a:avLst/>
           </a:prstGeom>
           <a:solidFill>
-            <a:srgbClr val="2C5F2D"/>
+            <a:srgbClr val="1E2761"/>
           </a:solidFill>
           <a:ln/>
         </p:spPr>
@@ -6067,7 +6067,7 @@
             <a:r>
               <a:rPr lang="en-US" sz="1000" dirty="0">
                 <a:solidFill>
-                  <a:srgbClr val="97BC62"/>
+                  <a:srgbClr val="CADCFC"/>
                 </a:solidFill>
               </a:rPr>
               <a:t>Tracey Scott  |  Cybersecurity • Cloud • SOC  |  traceysscott82@gmail.com</a:t>
@@ -6103,7 +6103,7 @@
             <a:r>
               <a:rPr lang="en-US" sz="1000" dirty="0">
                 <a:solidFill>
-                  <a:srgbClr val="97BC62"/>
+                  <a:srgbClr val="CADCFC"/>
                 </a:solidFill>
               </a:rPr>
               <a:t>6</a:t>
@@ -6126,7 +6126,7 @@
     <p:bg>
       <p:bgPr>
         <a:solidFill>
-          <a:srgbClr val="2C5F2D"/>
+          <a:srgbClr val="1E2761"/>
         </a:solidFill>
       </p:bgPr>
     </p:bg>
@@ -6171,7 +6171,7 @@
             <a:r>
               <a:rPr lang="en-US" sz="3600" b="1" dirty="0">
                 <a:solidFill>
-                  <a:srgbClr val="F5F5F5"/>
+                  <a:srgbClr val="FFFFFF"/>
                 </a:solidFill>
                 <a:latin typeface="Georgia" pitchFamily="34" charset="0"/>
                 <a:ea typeface="Georgia" pitchFamily="34" charset="-122"/>
@@ -6198,7 +6198,7 @@
             <a:avLst/>
           </a:prstGeom>
           <a:solidFill>
-            <a:srgbClr val="D4A017"/>
+            <a:srgbClr val="F59E0B"/>
           </a:solidFill>
           <a:ln/>
         </p:spPr>
@@ -6218,13 +6218,13 @@
             <a:avLst/>
           </a:prstGeom>
           <a:solidFill>
-            <a:srgbClr val="F5F5F5">
+            <a:srgbClr val="FFFFFF">
               <a:alpha val="10000"/>
             </a:srgbClr>
           </a:solidFill>
           <a:ln w="12700">
             <a:solidFill>
-              <a:srgbClr val="97BC62"/>
+              <a:srgbClr val="CADCFC"/>
             </a:solidFill>
             <a:prstDash val="solid"/>
           </a:ln>
@@ -6257,7 +6257,7 @@
             <a:r>
               <a:rPr lang="en-US" sz="4400" b="1" dirty="0">
                 <a:solidFill>
-                  <a:srgbClr val="D4A017"/>
+                  <a:srgbClr val="F59E0B"/>
                 </a:solidFill>
                 <a:latin typeface="Georgia" pitchFamily="34" charset="0"/>
                 <a:ea typeface="Georgia" pitchFamily="34" charset="-122"/>
@@ -6296,7 +6296,7 @@
             <a:r>
               <a:rPr lang="en-US" sz="1300" dirty="0">
                 <a:solidFill>
-                  <a:srgbClr val="F5F5F5"/>
+                  <a:srgbClr val="FFFFFF"/>
                 </a:solidFill>
               </a:rPr>
               <a:t>Full security framework stood up from zero</a:t>
@@ -6320,13 +6320,13 @@
             <a:avLst/>
           </a:prstGeom>
           <a:solidFill>
-            <a:srgbClr val="F5F5F5">
+            <a:srgbClr val="FFFFFF">
               <a:alpha val="10000"/>
             </a:srgbClr>
           </a:solidFill>
           <a:ln w="12700">
             <a:solidFill>
-              <a:srgbClr val="97BC62"/>
+              <a:srgbClr val="CADCFC"/>
             </a:solidFill>
             <a:prstDash val="solid"/>
           </a:ln>
@@ -6359,7 +6359,7 @@
             <a:r>
               <a:rPr lang="en-US" sz="4400" b="1" dirty="0">
                 <a:solidFill>
-                  <a:srgbClr val="D4A017"/>
+                  <a:srgbClr val="F59E0B"/>
                 </a:solidFill>
                 <a:latin typeface="Georgia" pitchFamily="34" charset="0"/>
                 <a:ea typeface="Georgia" pitchFamily="34" charset="-122"/>
@@ -6398,7 +6398,7 @@
             <a:r>
               <a:rPr lang="en-US" sz="1300" dirty="0">
                 <a:solidFill>
-                  <a:srgbClr val="F5F5F5"/>
+                  <a:srgbClr val="FFFFFF"/>
                 </a:solidFill>
               </a:rPr>
               <a:t>Predictive model accuracy delivered to stakeholders</a:t>
@@ -6422,13 +6422,13 @@
             <a:avLst/>
           </a:prstGeom>
           <a:solidFill>
-            <a:srgbClr val="F5F5F5">
+            <a:srgbClr val="FFFFFF">
               <a:alpha val="10000"/>
             </a:srgbClr>
           </a:solidFill>
           <a:ln w="12700">
             <a:solidFill>
-              <a:srgbClr val="97BC62"/>
+              <a:srgbClr val="CADCFC"/>
             </a:solidFill>
             <a:prstDash val="solid"/>
           </a:ln>
@@ -6461,7 +6461,7 @@
             <a:r>
               <a:rPr lang="en-US" sz="4400" b="1" dirty="0">
                 <a:solidFill>
-                  <a:srgbClr val="D4A017"/>
+                  <a:srgbClr val="F59E0B"/>
                 </a:solidFill>
                 <a:latin typeface="Georgia" pitchFamily="34" charset="0"/>
                 <a:ea typeface="Georgia" pitchFamily="34" charset="-122"/>
@@ -6500,7 +6500,7 @@
             <a:r>
               <a:rPr lang="en-US" sz="1300" dirty="0">
                 <a:solidFill>
-                  <a:srgbClr val="F5F5F5"/>
+                  <a:srgbClr val="FFFFFF"/>
                 </a:solidFill>
               </a:rPr>
               <a:t>Reporting accuracy gain through data validation</a:t>
@@ -6524,13 +6524,13 @@
             <a:avLst/>
           </a:prstGeom>
           <a:solidFill>
-            <a:srgbClr val="F5F5F5">
+            <a:srgbClr val="FFFFFF">
               <a:alpha val="10000"/>
             </a:srgbClr>
           </a:solidFill>
           <a:ln w="12700">
             <a:solidFill>
-              <a:srgbClr val="97BC62"/>
+              <a:srgbClr val="CADCFC"/>
             </a:solidFill>
             <a:prstDash val="solid"/>
           </a:ln>
@@ -6563,7 +6563,7 @@
             <a:r>
               <a:rPr lang="en-US" sz="4400" b="1" dirty="0">
                 <a:solidFill>
-                  <a:srgbClr val="D4A017"/>
+                  <a:srgbClr val="F59E0B"/>
                 </a:solidFill>
                 <a:latin typeface="Georgia" pitchFamily="34" charset="0"/>
                 <a:ea typeface="Georgia" pitchFamily="34" charset="-122"/>
@@ -6602,7 +6602,7 @@
             <a:r>
               <a:rPr lang="en-US" sz="1300" dirty="0">
                 <a:solidFill>
-                  <a:srgbClr val="F5F5F5"/>
+                  <a:srgbClr val="FFFFFF"/>
                 </a:solidFill>
               </a:rPr>
               <a:t>RBAC / least-privilege coverage across hybrid env</a:t>
@@ -6626,13 +6626,13 @@
             <a:avLst/>
           </a:prstGeom>
           <a:solidFill>
-            <a:srgbClr val="F5F5F5">
+            <a:srgbClr val="FFFFFF">
               <a:alpha val="10000"/>
             </a:srgbClr>
           </a:solidFill>
           <a:ln w="12700">
             <a:solidFill>
-              <a:srgbClr val="97BC62"/>
+              <a:srgbClr val="CADCFC"/>
             </a:solidFill>
             <a:prstDash val="solid"/>
           </a:ln>
@@ -6665,7 +6665,7 @@
             <a:r>
               <a:rPr lang="en-US" sz="4400" b="1" dirty="0">
                 <a:solidFill>
-                  <a:srgbClr val="D4A017"/>
+                  <a:srgbClr val="F59E0B"/>
                 </a:solidFill>
                 <a:latin typeface="Georgia" pitchFamily="34" charset="0"/>
                 <a:ea typeface="Georgia" pitchFamily="34" charset="-122"/>
@@ -6704,7 +6704,7 @@
             <a:r>
               <a:rPr lang="en-US" sz="1300" dirty="0">
                 <a:solidFill>
-                  <a:srgbClr val="F5F5F5"/>
+                  <a:srgbClr val="FFFFFF"/>
                 </a:solidFill>
               </a:rPr>
               <a:t>Critical incidents since framework rollout</a:t>
@@ -6728,13 +6728,13 @@
             <a:avLst/>
           </a:prstGeom>
           <a:solidFill>
-            <a:srgbClr val="F5F5F5">
+            <a:srgbClr val="FFFFFF">
               <a:alpha val="10000"/>
             </a:srgbClr>
           </a:solidFill>
           <a:ln w="12700">
             <a:solidFill>
-              <a:srgbClr val="97BC62"/>
+              <a:srgbClr val="CADCFC"/>
             </a:solidFill>
             <a:prstDash val="solid"/>
           </a:ln>
@@ -6767,7 +6767,7 @@
             <a:r>
               <a:rPr lang="en-US" sz="4400" b="1" dirty="0">
                 <a:solidFill>
-                  <a:srgbClr val="D4A017"/>
+                  <a:srgbClr val="F59E0B"/>
                 </a:solidFill>
                 <a:latin typeface="Georgia" pitchFamily="34" charset="0"/>
                 <a:ea typeface="Georgia" pitchFamily="34" charset="-122"/>
@@ -6806,7 +6806,7 @@
             <a:r>
               <a:rPr lang="en-US" sz="1300" dirty="0">
                 <a:solidFill>
-                  <a:srgbClr val="F5F5F5"/>
+                  <a:srgbClr val="FFFFFF"/>
                 </a:solidFill>
               </a:rPr>
               <a:t>Public clouds secured and administered (AWS/Azure/GCP)</a:t>
@@ -6830,7 +6830,7 @@
             <a:avLst/>
           </a:prstGeom>
           <a:solidFill>
-            <a:srgbClr val="2C5F2D"/>
+            <a:srgbClr val="1E2761"/>
           </a:solidFill>
           <a:ln/>
         </p:spPr>
@@ -6862,7 +6862,7 @@
             <a:r>
               <a:rPr lang="en-US" sz="1000" dirty="0">
                 <a:solidFill>
-                  <a:srgbClr val="97BC62"/>
+                  <a:srgbClr val="CADCFC"/>
                 </a:solidFill>
               </a:rPr>
               <a:t>Tracey Scott  |  Cybersecurity • Cloud • SOC  |  traceysscott82@gmail.com</a:t>
@@ -6898,7 +6898,7 @@
             <a:r>
               <a:rPr lang="en-US" sz="1000" dirty="0">
                 <a:solidFill>
-                  <a:srgbClr val="97BC62"/>
+                  <a:srgbClr val="CADCFC"/>
                 </a:solidFill>
               </a:rPr>
               <a:t>7</a:t>
@@ -6921,7 +6921,7 @@
     <p:bg>
       <p:bgPr>
         <a:solidFill>
-          <a:srgbClr val="F5F5F5"/>
+          <a:srgbClr val="FFFFFF"/>
         </a:solidFill>
       </p:bgPr>
     </p:bg>
@@ -6966,7 +6966,7 @@
             <a:r>
               <a:rPr lang="en-US" sz="4000" b="1" dirty="0">
                 <a:solidFill>
-                  <a:srgbClr val="2C5F2D"/>
+                  <a:srgbClr val="1E2761"/>
                 </a:solidFill>
                 <a:latin typeface="Georgia" pitchFamily="34" charset="0"/>
                 <a:ea typeface="Georgia" pitchFamily="34" charset="-122"/>
@@ -6993,7 +6993,7 @@
             <a:avLst/>
           </a:prstGeom>
           <a:solidFill>
-            <a:srgbClr val="97BC62"/>
+            <a:srgbClr val="CADCFC"/>
           </a:solidFill>
           <a:ln/>
         </p:spPr>
@@ -7025,7 +7025,7 @@
             <a:r>
               <a:rPr lang="en-US" sz="2000" b="1" dirty="0">
                 <a:solidFill>
-                  <a:srgbClr val="2C5F2D"/>
+                  <a:srgbClr val="1E2761"/>
                 </a:solidFill>
               </a:rPr>
               <a:t>Professional Goals</a:t>
@@ -7065,7 +7065,7 @@
             <a:r>
               <a:rPr lang="en-US" sz="1500" dirty="0">
                 <a:solidFill>
-                  <a:srgbClr val="1A2E1A"/>
+                  <a:srgbClr val="0F172A"/>
                 </a:solidFill>
               </a:rPr>
               <a:t>Earn CISSP certification (in progress)</a:t>
@@ -7083,7 +7083,7 @@
             <a:r>
               <a:rPr lang="en-US" sz="1500" dirty="0">
                 <a:solidFill>
-                  <a:srgbClr val="1A2E1A"/>
+                  <a:srgbClr val="0F172A"/>
                 </a:solidFill>
               </a:rPr>
               <a:t>Lead a cybersecurity operations team or SOC</a:t>
@@ -7101,7 +7101,7 @@
             <a:r>
               <a:rPr lang="en-US" sz="1500" dirty="0">
                 <a:solidFill>
-                  <a:srgbClr val="1A2E1A"/>
+                  <a:srgbClr val="0F172A"/>
                 </a:solidFill>
               </a:rPr>
               <a:t>Deepen cloud security automation &amp; IaC practice</a:t>
@@ -7119,7 +7119,7 @@
             <a:r>
               <a:rPr lang="en-US" sz="1500" dirty="0">
                 <a:solidFill>
-                  <a:srgbClr val="1A2E1A"/>
+                  <a:srgbClr val="0F172A"/>
                 </a:solidFill>
               </a:rPr>
               <a:t>Mentor women entering cybersecurity via RTC &amp; ISSA</a:t>
@@ -7134,7 +7134,7 @@
             <a:r>
               <a:rPr lang="en-US" sz="1500" dirty="0">
                 <a:solidFill>
-                  <a:srgbClr val="1A2E1A"/>
+                  <a:srgbClr val="0F172A"/>
                 </a:solidFill>
               </a:rPr>
               <a:t>Contribute to enterprise zero-trust architecture</a:t>
@@ -7158,7 +7158,7 @@
             <a:avLst/>
           </a:prstGeom>
           <a:solidFill>
-            <a:srgbClr val="2C5F2D"/>
+            <a:srgbClr val="1E2761"/>
           </a:solidFill>
           <a:ln/>
         </p:spPr>
@@ -7178,7 +7178,7 @@
             <a:avLst/>
           </a:prstGeom>
           <a:solidFill>
-            <a:srgbClr val="D4A017"/>
+            <a:srgbClr val="F59E0B"/>
           </a:solidFill>
           <a:ln/>
         </p:spPr>
@@ -7210,7 +7210,7 @@
             <a:r>
               <a:rPr lang="en-US" sz="2400" b="1" dirty="0">
                 <a:solidFill>
-                  <a:srgbClr val="F5F5F5"/>
+                  <a:srgbClr val="FFFFFF"/>
                 </a:solidFill>
                 <a:latin typeface="Georgia" pitchFamily="34" charset="0"/>
                 <a:ea typeface="Georgia" pitchFamily="34" charset="-122"/>
@@ -7252,7 +7252,7 @@
             <a:r>
               <a:rPr lang="en-US" sz="1800" b="1" dirty="0">
                 <a:solidFill>
-                  <a:srgbClr val="D4A017"/>
+                  <a:srgbClr val="F59E0B"/>
                 </a:solidFill>
               </a:rPr>
               <a:t>Tracey Scott</a:t>
@@ -7269,7 +7269,7 @@
             <a:r>
               <a:rPr lang="en-US" sz="1400" i="1" dirty="0">
                 <a:solidFill>
-                  <a:srgbClr val="97BC62"/>
+                  <a:srgbClr val="CADCFC"/>
                 </a:solidFill>
               </a:rPr>
               <a:t>IT Operations Manager &amp; Business Analyst</a:t>
@@ -7286,7 +7286,7 @@
             <a:r>
               <a:rPr lang="en-US" sz="1400" dirty="0">
                 <a:solidFill>
-                  <a:srgbClr val="F5F5F5"/>
+                  <a:srgbClr val="FFFFFF"/>
                 </a:solidFill>
               </a:rPr>
               <a:t>Greenville, SC</a:t>
@@ -7303,7 +7303,7 @@
             <a:r>
               <a:rPr lang="en-US" sz="1400" dirty="0">
                 <a:solidFill>
-                  <a:srgbClr val="F5F5F5"/>
+                  <a:srgbClr val="FFFFFF"/>
                 </a:solidFill>
               </a:rPr>
               <a:t>(864) 775-2929</a:t>
@@ -7320,7 +7320,7 @@
             <a:r>
               <a:rPr lang="en-US" sz="1400" dirty="0">
                 <a:solidFill>
-                  <a:srgbClr val="F5F5F5"/>
+                  <a:srgbClr val="FFFFFF"/>
                 </a:solidFill>
               </a:rPr>
               <a:t>traceysscott82@gmail.com</a:t>
@@ -7337,7 +7337,7 @@
             <a:r>
               <a:rPr lang="en-US" sz="1400" dirty="0">
                 <a:solidFill>
-                  <a:srgbClr val="F5F5F5"/>
+                  <a:srgbClr val="FFFFFF"/>
                 </a:solidFill>
               </a:rPr>
               <a:t>linkedin.com/in/traceysscott</a:t>
@@ -7351,7 +7351,7 @@
             <a:r>
               <a:rPr lang="en-US" sz="1400" b="1" dirty="0">
                 <a:solidFill>
-                  <a:srgbClr val="D4A017"/>
+                  <a:srgbClr val="F59E0B"/>
                 </a:solidFill>
               </a:rPr>
               <a:t>traceytheanalyst.github.io</a:t>
@@ -7375,7 +7375,7 @@
             <a:avLst/>
           </a:prstGeom>
           <a:solidFill>
-            <a:srgbClr val="2C5F2D"/>
+            <a:srgbClr val="1E2761"/>
           </a:solidFill>
           <a:ln/>
         </p:spPr>
@@ -7407,7 +7407,7 @@
             <a:r>
               <a:rPr lang="en-US" sz="1000" dirty="0">
                 <a:solidFill>
-                  <a:srgbClr val="97BC62"/>
+                  <a:srgbClr val="CADCFC"/>
                 </a:solidFill>
               </a:rPr>
               <a:t>Tracey Scott  |  Cybersecurity • Cloud • SOC  |  traceysscott82@gmail.com</a:t>
@@ -7443,7 +7443,7 @@
             <a:r>
               <a:rPr lang="en-US" sz="1000" dirty="0">
                 <a:solidFill>
-                  <a:srgbClr val="97BC62"/>
+                  <a:srgbClr val="CADCFC"/>
                 </a:solidFill>
               </a:rPr>
               <a:t>8</a:t>

--- a/Tracey-Scott-Portfolio.pptx
+++ b/Tracey-Scott-Portfolio.pptx
@@ -714,7 +714,7 @@
                     <c:v>IDS/IPS</c:v>
                   </c:pt>
                   <c:pt idx="3">
-                    <c:v>SIEM/Log Analysis</c:v>
+                    <c:v>LLM / Machine Learning</c:v>
                   </c:pt>
                   <c:pt idx="4">
                     <c:v>Python/SQL</c:v>
@@ -723,7 +723,7 @@
                     <c:v>Power BI</c:v>
                   </c:pt>
                   <c:pt idx="6">
-                    <c:v>PowerShell</c:v>
+                    <c:v>Excel</c:v>
                   </c:pt>
                   <c:pt idx="7">
                     <c:v>Virtualization</c:v>
@@ -748,7 +748,7 @@
                   <c:v>88</c:v>
                 </c:pt>
                 <c:pt idx="3">
-                  <c:v>85</c:v>
+                  <c:v>84</c:v>
                 </c:pt>
                 <c:pt idx="4">
                   <c:v>90</c:v>
@@ -757,7 +757,7 @@
                   <c:v>93</c:v>
                 </c:pt>
                 <c:pt idx="6">
-                  <c:v>87</c:v>
+                  <c:v>95</c:v>
                 </c:pt>
                 <c:pt idx="7">
                   <c:v>86</c:v>
@@ -2616,7 +2616,7 @@
                 <a:ea typeface="Calibri" pitchFamily="34" charset="-122"/>
                 <a:cs typeface="Calibri" pitchFamily="34" charset="-120"/>
               </a:rPr>
-              <a:t>Cybersecurity-focused IT leader with 3+ years building and securing enterprise cloud and hybrid infrastructure in fast-paced startup environments.</a:t>
+              <a:t>Cybersecurity-focused IT leader with 4+ years building and securing enterprise cloud and hybrid infrastructure in fast-paced startup environments.</a:t>
             </a:r>
             <a:endParaRPr lang="en-US" sz="1500" dirty="0"/>
           </a:p>
@@ -2653,7 +2653,7 @@
                 <a:ea typeface="Calibri" pitchFamily="34" charset="-122"/>
                 <a:cs typeface="Calibri" pitchFamily="34" charset="-120"/>
               </a:rPr>
-              <a:t>Currently leading IT Operations at RightPath Insurance and CISSP-certified.</a:t>
+              <a:t>Currently leading IT Operations at RightPath Insurance, Cybersecurity and CISSP - certified.</a:t>
             </a:r>
             <a:endParaRPr lang="en-US" sz="1500" dirty="0"/>
           </a:p>
@@ -2732,7 +2732,7 @@
                 <a:ea typeface="Georgia" pitchFamily="34" charset="-122"/>
                 <a:cs typeface="Georgia" pitchFamily="34" charset="-120"/>
               </a:rPr>
-              <a:t>3+</a:t>
+              <a:t>4+</a:t>
             </a:r>
             <a:endParaRPr lang="en-US" sz="4800" dirty="0"/>
           </a:p>
@@ -3449,7 +3449,7 @@
                   <a:srgbClr val="0F172A"/>
                 </a:solidFill>
               </a:rPr>
-              <a:t>Log Analysis &amp; SIEM</a:t>
+              <a:t>Org Training via KnowBe4</a:t>
             </a:r>
             <a:endParaRPr lang="en-US" sz="1300" dirty="0"/>
           </a:p>
@@ -3938,7 +3938,7 @@
                   <a:srgbClr val="0F172A"/>
                 </a:solidFill>
               </a:rPr>
-              <a:t>Power BI &amp; Tableau</a:t>
+              <a:t>Excel (Pivot Tables, VLOOKUP)</a:t>
             </a:r>
             <a:endParaRPr lang="en-US" sz="1300" dirty="0"/>
           </a:p>
@@ -3953,7 +3953,7 @@
                   <a:srgbClr val="0F172A"/>
                 </a:solidFill>
               </a:rPr>
-              <a:t>Predictive Modeling</a:t>
+              <a:t>Power BI, Tableau &amp; LLMs</a:t>
             </a:r>
             <a:endParaRPr lang="en-US" sz="1300" dirty="0"/>
           </a:p>
@@ -3968,7 +3968,7 @@
                   <a:srgbClr val="0F172A"/>
                 </a:solidFill>
               </a:rPr>
-              <a:t>Workflow Automation</a:t>
+              <a:t>Predictive Modeling &amp; Automation</a:t>
             </a:r>
             <a:endParaRPr lang="en-US" sz="1300" dirty="0"/>
           </a:p>
@@ -5195,7 +5195,7 @@
                   <a:srgbClr val="0F172A"/>
                 </a:solidFill>
               </a:rPr>
-              <a:t>Led CRM configuration with secure auth, encryption, and role-based permissions.</a:t>
+              <a:t>Complete CRM build — coding, development, maintenance, secure auth, encryption, RBAC.</a:t>
             </a:r>
             <a:endParaRPr lang="en-US" sz="1100" dirty="0"/>
           </a:p>
@@ -5346,7 +5346,7 @@
                   <a:srgbClr val="0F172A"/>
                 </a:solidFill>
               </a:rPr>
-              <a:t>Built Power BI dashboards for incidents, access activity, and compliance metrics.</a:t>
+              <a:t>Power BI dashboards for incidents, compliance, and sales metrics — auditing, trends &amp; revenue forecasting.</a:t>
             </a:r>
             <a:endParaRPr lang="en-US" sz="1100" dirty="0"/>
           </a:p>
@@ -5461,7 +5461,7 @@
                   <a:srgbClr val="1E2761"/>
                 </a:solidFill>
               </a:rPr>
-              <a:t>Incident Response Program</a:t>
+              <a:t>Incident Response &amp; KnowBe4</a:t>
             </a:r>
             <a:endParaRPr lang="en-US" sz="1400" dirty="0"/>
           </a:p>
@@ -5497,7 +5497,7 @@
                   <a:srgbClr val="0F172A"/>
                 </a:solidFill>
               </a:rPr>
-              <a:t>Developed IR documentation, escalation playbooks, and remediation workflows.</a:t>
+              <a:t>IR playbooks, remediation workflows, and org-wide KnowBe4 security awareness training.</a:t>
             </a:r>
             <a:endParaRPr lang="en-US" sz="1100" dirty="0"/>
           </a:p>
@@ -5612,7 +5612,7 @@
                   <a:srgbClr val="1E2761"/>
                 </a:solidFill>
               </a:rPr>
-              <a:t>DR &amp; Business Continuity</a:t>
+              <a:t>IT Ticketing System</a:t>
             </a:r>
             <a:endParaRPr lang="en-US" sz="1400" dirty="0"/>
           </a:p>
@@ -5648,7 +5648,7 @@
                   <a:srgbClr val="0F172A"/>
                 </a:solidFill>
               </a:rPr>
-              <a:t>Backup, disaster recovery, and BCP procedures for hybrid infrastructure.</a:t>
+              <a:t>Built ticketing system for org-wide issue reporting, triage, and resolution tracking.</a:t>
             </a:r>
             <a:endParaRPr lang="en-US" sz="1100" dirty="0"/>
           </a:p>
@@ -5763,7 +5763,7 @@
                   <a:srgbClr val="1E2761"/>
                 </a:solidFill>
               </a:rPr>
-              <a:t>Internal AI Chatbots</a:t>
+              <a:t>Internal AI Chatbots (LLM)</a:t>
             </a:r>
             <a:endParaRPr lang="en-US" sz="1400" dirty="0"/>
           </a:p>
@@ -5799,7 +5799,7 @@
                   <a:srgbClr val="0F172A"/>
                 </a:solidFill>
               </a:rPr>
-              <a:t>Built AI chatbots for multiple departments with CRM, Microsoft 365, and SharePoint connectivity.</a:t>
+              <a:t>LLM-powered chatbots for multiple departments with CRM, Microsoft 365, and SharePoint connectivity.</a:t>
             </a:r>
             <a:endParaRPr lang="en-US" sz="1100" dirty="0"/>
           </a:p>
@@ -7068,7 +7068,7 @@
                   <a:srgbClr val="0F172A"/>
                 </a:solidFill>
               </a:rPr>
-              <a:t>Earn CISSP certification (in progress)</a:t>
+              <a:t>Earned CISSP certification</a:t>
             </a:r>
             <a:endParaRPr lang="en-US" sz="1500" dirty="0"/>
           </a:p>

--- a/Tracey-Scott-Portfolio.pptx
+++ b/Tracey-Scott-Portfolio.pptx
@@ -7068,7 +7068,7 @@
                   <a:srgbClr val="050816"/>
                 </a:solidFill>
               </a:rPr>
-              <a:t>Earned CISSP certification</a:t>
+              <a:t>Earned CISSP Certification</a:t>
             </a:r>
             <a:endParaRPr lang="en-US" sz="1500" dirty="0"/>
           </a:p>
@@ -7122,7 +7122,7 @@
                   <a:srgbClr val="050816"/>
                 </a:solidFill>
               </a:rPr>
-              <a:t>Mentor women entering cybersecurity via RTC &amp; ISSA</a:t>
+              <a:t>Mentor Women entering cybersecurity via RTC &amp; ISSA</a:t>
             </a:r>
             <a:endParaRPr lang="en-US" sz="1500" dirty="0"/>
           </a:p>

--- a/Tracey-Scott-Portfolio.pptx
+++ b/Tracey-Scott-Portfolio.pptx
@@ -700,9 +700,9 @@
           </c:dLbls>
           <c:cat>
             <c:multiLvlStrRef>
-              <c:f>Sheet1!$A$2:$A$9</c:f>
+              <c:f>Sheet1!$A$2:$A$10</c:f>
               <c:multiLvlStrCache>
-                <c:ptCount val="8"/>
+                <c:ptCount val="9"/>
                 <c:lvl>
                   <c:pt idx="0">
                     <c:v>Cloud Security</c:v>
@@ -723,9 +723,12 @@
                     <c:v>Power BI</c:v>
                   </c:pt>
                   <c:pt idx="6">
+                    <c:v>Power Automate</c:v>
+                  </c:pt>
+                  <c:pt idx="7">
                     <c:v>Excel</c:v>
                   </c:pt>
-                  <c:pt idx="7">
+                  <c:pt idx="8">
                     <c:v>Virtualization</c:v>
                   </c:pt>
                 </c:lvl>
@@ -734,10 +737,10 @@
           </c:cat>
           <c:val>
             <c:numRef>
-              <c:f>Sheet1!$B$2:$B$9</c:f>
+              <c:f>Sheet1!$B$2:$B$10</c:f>
               <c:numCache>
                 <c:formatCode>General</c:formatCode>
-                <c:ptCount val="8"/>
+                <c:ptCount val="9"/>
                 <c:pt idx="0">
                   <c:v>92</c:v>
                 </c:pt>
@@ -757,9 +760,12 @@
                   <c:v>93</c:v>
                 </c:pt>
                 <c:pt idx="6">
+                  <c:v>90</c:v>
+                </c:pt>
+                <c:pt idx="7">
                   <c:v>95</c:v>
                 </c:pt>
-                <c:pt idx="7">
+                <c:pt idx="8">
                   <c:v>86</c:v>
                 </c:pt>
               </c:numCache>
@@ -3968,6 +3974,21 @@
                   <a:srgbClr val="050816"/>
                 </a:solidFill>
               </a:rPr>
+              <a:t>Power Automate &amp; AI Agents</a:t>
+            </a:r>
+            <a:endParaRPr lang="en-US" sz="1300" dirty="0"/>
+          </a:p>
+          <a:p>
+            <a:pPr marL="342900" indent="-342900">
+              <a:buSzPct val="100000"/>
+              <a:buChar char="•"/>
+            </a:pPr>
+            <a:r>
+              <a:rPr lang="en-US" sz="1300" dirty="0">
+                <a:solidFill>
+                  <a:srgbClr val="050816"/>
+                </a:solidFill>
+              </a:rPr>
               <a:t>Predictive Modeling &amp; Automation</a:t>
             </a:r>
             <a:endParaRPr lang="en-US" sz="1300" dirty="0"/>
@@ -5763,7 +5784,7 @@
                   <a:srgbClr val="0A0E27"/>
                 </a:solidFill>
               </a:rPr>
-              <a:t>Internal AI Chatbots (LLM)</a:t>
+              <a:t>Internal AI Agents (Power Automate)</a:t>
             </a:r>
             <a:endParaRPr lang="en-US" sz="1400" dirty="0"/>
           </a:p>
@@ -5799,7 +5820,7 @@
                   <a:srgbClr val="050816"/>
                 </a:solidFill>
               </a:rPr>
-              <a:t>LLM-powered chatbots for multiple departments with CRM, Microsoft 365, and SharePoint connectivity.</a:t>
+              <a:t>Power Automate AI Agents for HR, IT, and Sales with CRM, Microsoft 365, and SharePoint connectivity.</a:t>
             </a:r>
             <a:endParaRPr lang="en-US" sz="1100" dirty="0"/>
           </a:p>

--- a/Tracey-Scott-Portfolio.pptx
+++ b/Tracey-Scott-Portfolio.pptx
@@ -7077,24 +7077,6 @@
           <a:lstStyle/>
           <a:p>
             <a:pPr marL="342900" indent="-342900">
-              <a:spcAft>
-                <a:spcPts val="1400"/>
-              </a:spcAft>
-              <a:buSzPct val="100000"/>
-              <a:buChar char="•"/>
-            </a:pPr>
-            <a:r>
-              <a:rPr lang="en-US" sz="1500" dirty="0">
-                <a:solidFill>
-                  <a:srgbClr val="050816"/>
-                </a:solidFill>
-              </a:rPr>
-              <a:t>Earned CISSP Certification</a:t>
-            </a:r>
-            <a:endParaRPr lang="en-US" sz="1500" dirty="0"/>
-          </a:p>
-          <a:p>
-            <a:pPr marL="342900" indent="-342900">
               <a:buSzPct val="100000"/>
               <a:buChar char="•"/>
             </a:pPr>

--- a/Tracey-Scott-Portfolio.pptx
+++ b/Tracey-Scott-Portfolio.pptx
@@ -11287,6 +11287,249 @@
   <p:clrMapOvr>
     <a:masterClrMapping/>
   </p:clrMapOvr>
+  <p:transition spd="med" advClick="1">
+    <p:fade/>
+  </p:transition>
+  <p:timing>
+    <p:tnLst>
+      <p:par>
+        <p:cTn id="1" dur="indefinite" restart="never" nodeType="tmRoot">
+          <p:childTnLst>
+            <p:seq concurrent="1" nextAc="seek">
+              <p:cTn id="2" dur="indefinite" nodeType="mainSeq">
+                <p:childTnLst>
+                  <p:par>
+                    <p:cTn id="3" presetID="10" presetClass="entr" presetSubtype="0" fill="hold" nodeType="afterPrev">
+                      <p:stCondLst>
+                        <p:cond delay="0"/>
+                      </p:stCondLst>
+                      <p:childTnLst>
+                        <p:set>
+                          <p:cBhvr>
+                            <p:cTn id="4" dur="1" fill="hold">
+                              <p:stCondLst>
+                                <p:cond delay="0"/>
+                              </p:stCondLst>
+                            </p:cTn>
+                            <p:tgtEl>
+                              <p:spTgt spid="72"/>
+                            </p:tgtEl>
+                            <p:attrNameLst>
+                              <p:attrName>style.visibility</p:attrName>
+                            </p:attrNameLst>
+                          </p:cBhvr>
+                          <p:to>
+                            <p:strVal val="visible"/>
+                          </p:to>
+                        </p:set>
+                        <p:animEffect transition="in" filter="fade">
+                          <p:cBhvr>
+                            <p:cTn id="100" dur="500"/>
+                            <p:tgtEl>
+                              <p:spTgt spid="72"/>
+                            </p:tgtEl>
+                          </p:cBhvr>
+                        </p:animEffect>
+                      </p:childTnLst>
+                    </p:cTn>
+                  </p:par>
+                  <p:par>
+                    <p:cTn id="5" presetID="10" presetClass="entr" presetSubtype="0" fill="hold" nodeType="afterPrev">
+                      <p:stCondLst>
+                        <p:cond delay="300"/>
+                      </p:stCondLst>
+                      <p:childTnLst>
+                        <p:set>
+                          <p:cBhvr>
+                            <p:cTn id="6" dur="1" fill="hold">
+                              <p:stCondLst>
+                                <p:cond delay="0"/>
+                              </p:stCondLst>
+                            </p:cTn>
+                            <p:tgtEl>
+                              <p:spTgt spid="61"/>
+                            </p:tgtEl>
+                            <p:attrNameLst>
+                              <p:attrName>style.visibility</p:attrName>
+                            </p:attrNameLst>
+                          </p:cBhvr>
+                          <p:to>
+                            <p:strVal val="visible"/>
+                          </p:to>
+                        </p:set>
+                        <p:animEffect transition="in" filter="fade">
+                          <p:cBhvr>
+                            <p:cTn id="101" dur="500"/>
+                            <p:tgtEl>
+                              <p:spTgt spid="61"/>
+                            </p:tgtEl>
+                          </p:cBhvr>
+                        </p:animEffect>
+                      </p:childTnLst>
+                    </p:cTn>
+                  </p:par>
+                  <p:par>
+                    <p:cTn id="7" presetID="10" presetClass="entr" presetSubtype="0" fill="hold" nodeType="afterPrev">
+                      <p:stCondLst>
+                        <p:cond delay="600"/>
+                      </p:stCondLst>
+                      <p:childTnLst>
+                        <p:set>
+                          <p:cBhvr>
+                            <p:cTn id="8" dur="1" fill="hold">
+                              <p:stCondLst>
+                                <p:cond delay="0"/>
+                              </p:stCondLst>
+                            </p:cTn>
+                            <p:tgtEl>
+                              <p:spTgt spid="62"/>
+                            </p:tgtEl>
+                            <p:attrNameLst>
+                              <p:attrName>style.visibility</p:attrName>
+                            </p:attrNameLst>
+                          </p:cBhvr>
+                          <p:to>
+                            <p:strVal val="visible"/>
+                          </p:to>
+                        </p:set>
+                        <p:animEffect transition="in" filter="fade">
+                          <p:cBhvr>
+                            <p:cTn id="102" dur="500"/>
+                            <p:tgtEl>
+                              <p:spTgt spid="62"/>
+                            </p:tgtEl>
+                          </p:cBhvr>
+                        </p:animEffect>
+                      </p:childTnLst>
+                    </p:cTn>
+                  </p:par>
+                  <p:par>
+                    <p:cTn id="9" presetID="10" presetClass="entr" presetSubtype="0" fill="hold" nodeType="afterPrev">
+                      <p:stCondLst>
+                        <p:cond delay="900"/>
+                      </p:stCondLst>
+                      <p:childTnLst>
+                        <p:set>
+                          <p:cBhvr>
+                            <p:cTn id="10" dur="1" fill="hold">
+                              <p:stCondLst>
+                                <p:cond delay="0"/>
+                              </p:stCondLst>
+                            </p:cTn>
+                            <p:tgtEl>
+                              <p:spTgt spid="63"/>
+                            </p:tgtEl>
+                            <p:attrNameLst>
+                              <p:attrName>style.visibility</p:attrName>
+                            </p:attrNameLst>
+                          </p:cBhvr>
+                          <p:to>
+                            <p:strVal val="visible"/>
+                          </p:to>
+                        </p:set>
+                        <p:animEffect transition="in" filter="fade">
+                          <p:cBhvr>
+                            <p:cTn id="103" dur="500"/>
+                            <p:tgtEl>
+                              <p:spTgt spid="63"/>
+                            </p:tgtEl>
+                          </p:cBhvr>
+                        </p:animEffect>
+                      </p:childTnLst>
+                    </p:cTn>
+                  </p:par>
+                  <p:par>
+                    <p:cTn id="11" presetID="10" presetClass="entr" presetSubtype="0" fill="hold" nodeType="afterPrev">
+                      <p:stCondLst>
+                        <p:cond delay="1200"/>
+                      </p:stCondLst>
+                      <p:childTnLst>
+                        <p:set>
+                          <p:cBhvr>
+                            <p:cTn id="12" dur="1" fill="hold">
+                              <p:stCondLst>
+                                <p:cond delay="0"/>
+                              </p:stCondLst>
+                            </p:cTn>
+                            <p:tgtEl>
+                              <p:spTgt spid="64"/>
+                            </p:tgtEl>
+                            <p:attrNameLst>
+                              <p:attrName>style.visibility</p:attrName>
+                            </p:attrNameLst>
+                          </p:cBhvr>
+                          <p:to>
+                            <p:strVal val="visible"/>
+                          </p:to>
+                        </p:set>
+                        <p:animEffect transition="in" filter="fade">
+                          <p:cBhvr>
+                            <p:cTn id="104" dur="500"/>
+                            <p:tgtEl>
+                              <p:spTgt spid="64"/>
+                            </p:tgtEl>
+                          </p:cBhvr>
+                        </p:animEffect>
+                      </p:childTnLst>
+                    </p:cTn>
+                  </p:par>
+                  <p:par>
+                    <p:cTn id="13" presetID="10" presetClass="entr" presetSubtype="0" fill="hold" nodeType="afterPrev">
+                      <p:stCondLst>
+                        <p:cond delay="1500"/>
+                      </p:stCondLst>
+                      <p:childTnLst>
+                        <p:set>
+                          <p:cBhvr>
+                            <p:cTn id="14" dur="1" fill="hold">
+                              <p:stCondLst>
+                                <p:cond delay="0"/>
+                              </p:stCondLst>
+                            </p:cTn>
+                            <p:tgtEl>
+                              <p:spTgt spid="65"/>
+                            </p:tgtEl>
+                            <p:attrNameLst>
+                              <p:attrName>style.visibility</p:attrName>
+                            </p:attrNameLst>
+                          </p:cBhvr>
+                          <p:to>
+                            <p:strVal val="visible"/>
+                          </p:to>
+                        </p:set>
+                        <p:animEffect transition="in" filter="fade">
+                          <p:cBhvr>
+                            <p:cTn id="105" dur="500"/>
+                            <p:tgtEl>
+                              <p:spTgt spid="65"/>
+                            </p:tgtEl>
+                          </p:cBhvr>
+                        </p:animEffect>
+                      </p:childTnLst>
+                    </p:cTn>
+                  </p:par>
+                </p:childTnLst>
+              </p:cTn>
+              <p:prevCondLst>
+                <p:cond evt="onPrev" delay="0">
+                  <p:tgtEl>
+                    <p:sldTgt/>
+                  </p:tgtEl>
+                </p:cond>
+              </p:prevCondLst>
+              <p:nextCondLst>
+                <p:cond evt="onNext" delay="0">
+                  <p:tgtEl>
+                    <p:sldTgt/>
+                  </p:tgtEl>
+                </p:cond>
+              </p:nextCondLst>
+            </p:seq>
+          </p:childTnLst>
+        </p:cTn>
+      </p:par>
+    </p:tnLst>
+  </p:timing>
 </p:sld>
 </file>
 
@@ -11465,6 +11708,179 @@
   <p:clrMapOvr>
     <a:masterClrMapping/>
   </p:clrMapOvr>
+  <p:transition spd="med" advClick="1">
+    <p:fade/>
+  </p:transition>
+  <p:timing>
+    <p:tnLst>
+      <p:par>
+        <p:cTn id="1" dur="indefinite" restart="never" nodeType="tmRoot">
+          <p:childTnLst>
+            <p:seq concurrent="1" nextAc="seek">
+              <p:cTn id="2" dur="indefinite" nodeType="mainSeq">
+                <p:childTnLst>
+                  <p:par>
+                    <p:cTn id="3" presetID="10" presetClass="entr" presetSubtype="0" fill="hold" nodeType="afterPrev">
+                      <p:stCondLst>
+                        <p:cond delay="0"/>
+                      </p:stCondLst>
+                      <p:childTnLst>
+                        <p:set>
+                          <p:cBhvr>
+                            <p:cTn id="4" dur="1" fill="hold">
+                              <p:stCondLst>
+                                <p:cond delay="0"/>
+                              </p:stCondLst>
+                            </p:cTn>
+                            <p:tgtEl>
+                              <p:spTgt spid="273"/>
+                            </p:tgtEl>
+                            <p:attrNameLst>
+                              <p:attrName>style.visibility</p:attrName>
+                            </p:attrNameLst>
+                          </p:cBhvr>
+                          <p:to>
+                            <p:strVal val="visible"/>
+                          </p:to>
+                        </p:set>
+                        <p:animEffect transition="in" filter="fade">
+                          <p:cBhvr>
+                            <p:cTn id="100" dur="500"/>
+                            <p:tgtEl>
+                              <p:spTgt spid="273"/>
+                            </p:tgtEl>
+                          </p:cBhvr>
+                        </p:animEffect>
+                      </p:childTnLst>
+                    </p:cTn>
+                  </p:par>
+                  <p:par>
+                    <p:cTn id="5" presetID="10" presetClass="entr" presetSubtype="0" fill="hold" nodeType="afterPrev">
+                      <p:stCondLst>
+                        <p:cond delay="300"/>
+                      </p:stCondLst>
+                      <p:childTnLst>
+                        <p:set>
+                          <p:cBhvr>
+                            <p:cTn id="6" dur="1" fill="hold">
+                              <p:stCondLst>
+                                <p:cond delay="0"/>
+                              </p:stCondLst>
+                            </p:cTn>
+                            <p:tgtEl>
+                              <p:spTgt spid="274"/>
+                            </p:tgtEl>
+                            <p:attrNameLst>
+                              <p:attrName>style.visibility</p:attrName>
+                            </p:attrNameLst>
+                          </p:cBhvr>
+                          <p:to>
+                            <p:strVal val="visible"/>
+                          </p:to>
+                        </p:set>
+                        <p:animEffect transition="in" filter="fade">
+                          <p:cBhvr>
+                            <p:cTn id="101" dur="500"/>
+                            <p:tgtEl>
+                              <p:spTgt spid="274"/>
+                            </p:tgtEl>
+                          </p:cBhvr>
+                        </p:animEffect>
+                      </p:childTnLst>
+                    </p:cTn>
+                  </p:par>
+                  <p:par>
+                    <p:cTn id="7" presetID="10" presetClass="entr" presetSubtype="0" fill="hold" nodeType="afterPrev">
+                      <p:stCondLst>
+                        <p:cond delay="600"/>
+                      </p:stCondLst>
+                      <p:childTnLst>
+                        <p:set>
+                          <p:cBhvr>
+                            <p:cTn id="8" dur="1" fill="hold">
+                              <p:stCondLst>
+                                <p:cond delay="0"/>
+                              </p:stCondLst>
+                            </p:cTn>
+                            <p:tgtEl>
+                              <p:spTgt spid="275"/>
+                            </p:tgtEl>
+                            <p:attrNameLst>
+                              <p:attrName>style.visibility</p:attrName>
+                            </p:attrNameLst>
+                          </p:cBhvr>
+                          <p:to>
+                            <p:strVal val="visible"/>
+                          </p:to>
+                        </p:set>
+                        <p:animEffect transition="in" filter="fade">
+                          <p:cBhvr>
+                            <p:cTn id="102" dur="500"/>
+                            <p:tgtEl>
+                              <p:spTgt spid="275"/>
+                            </p:tgtEl>
+                          </p:cBhvr>
+                        </p:animEffect>
+                      </p:childTnLst>
+                    </p:cTn>
+                  </p:par>
+                  <p:par>
+                    <p:cTn id="9" presetID="10" presetClass="entr" presetSubtype="0" fill="hold" nodeType="afterPrev">
+                      <p:stCondLst>
+                        <p:cond delay="900"/>
+                      </p:stCondLst>
+                      <p:childTnLst>
+                        <p:set>
+                          <p:cBhvr>
+                            <p:cTn id="10" dur="1" fill="hold">
+                              <p:stCondLst>
+                                <p:cond delay="0"/>
+                              </p:stCondLst>
+                            </p:cTn>
+                            <p:tgtEl>
+                              <p:spTgt spid="276"/>
+                            </p:tgtEl>
+                            <p:attrNameLst>
+                              <p:attrName>style.visibility</p:attrName>
+                            </p:attrNameLst>
+                          </p:cBhvr>
+                          <p:to>
+                            <p:strVal val="visible"/>
+                          </p:to>
+                        </p:set>
+                        <p:animEffect transition="in" filter="fade">
+                          <p:cBhvr>
+                            <p:cTn id="103" dur="500"/>
+                            <p:tgtEl>
+                              <p:spTgt spid="276"/>
+                            </p:tgtEl>
+                          </p:cBhvr>
+                        </p:animEffect>
+                      </p:childTnLst>
+                    </p:cTn>
+                  </p:par>
+                </p:childTnLst>
+              </p:cTn>
+              <p:prevCondLst>
+                <p:cond evt="onPrev" delay="0">
+                  <p:tgtEl>
+                    <p:sldTgt/>
+                  </p:tgtEl>
+                </p:cond>
+              </p:prevCondLst>
+              <p:nextCondLst>
+                <p:cond evt="onNext" delay="0">
+                  <p:tgtEl>
+                    <p:sldTgt/>
+                  </p:tgtEl>
+                </p:cond>
+              </p:nextCondLst>
+            </p:seq>
+          </p:childTnLst>
+        </p:cTn>
+      </p:par>
+    </p:tnLst>
+  </p:timing>
 </p:sld>
 </file>
 
@@ -11611,6 +12027,109 @@
   <p:clrMapOvr>
     <a:masterClrMapping/>
   </p:clrMapOvr>
+  <p:transition spd="med" advClick="1">
+    <p:fade/>
+  </p:transition>
+  <p:timing>
+    <p:tnLst>
+      <p:par>
+        <p:cTn id="1" dur="indefinite" restart="never" nodeType="tmRoot">
+          <p:childTnLst>
+            <p:seq concurrent="1" nextAc="seek">
+              <p:cTn id="2" dur="indefinite" nodeType="mainSeq">
+                <p:childTnLst>
+                  <p:par>
+                    <p:cTn id="3" presetID="10" presetClass="entr" presetSubtype="0" fill="hold" nodeType="afterPrev">
+                      <p:stCondLst>
+                        <p:cond delay="0"/>
+                      </p:stCondLst>
+                      <p:childTnLst>
+                        <p:set>
+                          <p:cBhvr>
+                            <p:cTn id="4" dur="1" fill="hold">
+                              <p:stCondLst>
+                                <p:cond delay="0"/>
+                              </p:stCondLst>
+                            </p:cTn>
+                            <p:tgtEl>
+                              <p:spTgt spid="281"/>
+                            </p:tgtEl>
+                            <p:attrNameLst>
+                              <p:attrName>style.visibility</p:attrName>
+                            </p:attrNameLst>
+                          </p:cBhvr>
+                          <p:to>
+                            <p:strVal val="visible"/>
+                          </p:to>
+                        </p:set>
+                        <p:animEffect transition="in" filter="fade">
+                          <p:cBhvr>
+                            <p:cTn id="100" dur="500"/>
+                            <p:tgtEl>
+                              <p:spTgt spid="281"/>
+                            </p:tgtEl>
+                          </p:cBhvr>
+                        </p:animEffect>
+                      </p:childTnLst>
+                    </p:cTn>
+                  </p:par>
+                  <p:par>
+                    <p:cTn id="5" presetID="10" presetClass="entr" presetSubtype="0" fill="hold" nodeType="afterPrev">
+                      <p:stCondLst>
+                        <p:cond delay="300"/>
+                      </p:stCondLst>
+                      <p:childTnLst>
+                        <p:set>
+                          <p:cBhvr>
+                            <p:cTn id="6" dur="1" fill="hold">
+                              <p:stCondLst>
+                                <p:cond delay="0"/>
+                              </p:stCondLst>
+                            </p:cTn>
+                            <p:tgtEl>
+                              <p:spTgt spid="282"/>
+                            </p:tgtEl>
+                            <p:attrNameLst>
+                              <p:attrName>style.visibility</p:attrName>
+                            </p:attrNameLst>
+                          </p:cBhvr>
+                          <p:to>
+                            <p:strVal val="visible"/>
+                          </p:to>
+                        </p:set>
+                        <p:animEffect transition="in" filter="fade">
+                          <p:cBhvr>
+                            <p:cTn id="101" dur="500"/>
+                            <p:tgtEl>
+                              <p:spTgt spid="282"/>
+                            </p:tgtEl>
+                          </p:cBhvr>
+                        </p:animEffect>
+                      </p:childTnLst>
+                    </p:cTn>
+                  </p:par>
+                </p:childTnLst>
+              </p:cTn>
+              <p:prevCondLst>
+                <p:cond evt="onPrev" delay="0">
+                  <p:tgtEl>
+                    <p:sldTgt/>
+                  </p:tgtEl>
+                </p:cond>
+              </p:prevCondLst>
+              <p:nextCondLst>
+                <p:cond evt="onNext" delay="0">
+                  <p:tgtEl>
+                    <p:sldTgt/>
+                  </p:tgtEl>
+                </p:cond>
+              </p:nextCondLst>
+            </p:seq>
+          </p:childTnLst>
+        </p:cTn>
+      </p:par>
+    </p:tnLst>
+  </p:timing>
 </p:sld>
 </file>
 
@@ -12520,6 +13039,249 @@
   <p:clrMapOvr>
     <a:masterClrMapping/>
   </p:clrMapOvr>
+  <p:transition spd="med" advClick="1">
+    <p:fade/>
+  </p:transition>
+  <p:timing>
+    <p:tnLst>
+      <p:par>
+        <p:cTn id="1" dur="indefinite" restart="never" nodeType="tmRoot">
+          <p:childTnLst>
+            <p:seq concurrent="1" nextAc="seek">
+              <p:cTn id="2" dur="indefinite" nodeType="mainSeq">
+                <p:childTnLst>
+                  <p:par>
+                    <p:cTn id="3" presetID="10" presetClass="entr" presetSubtype="0" fill="hold" nodeType="afterPrev">
+                      <p:stCondLst>
+                        <p:cond delay="0"/>
+                      </p:stCondLst>
+                      <p:childTnLst>
+                        <p:set>
+                          <p:cBhvr>
+                            <p:cTn id="4" dur="1" fill="hold">
+                              <p:stCondLst>
+                                <p:cond delay="0"/>
+                              </p:stCondLst>
+                            </p:cTn>
+                            <p:tgtEl>
+                              <p:spTgt spid="287"/>
+                            </p:tgtEl>
+                            <p:attrNameLst>
+                              <p:attrName>style.visibility</p:attrName>
+                            </p:attrNameLst>
+                          </p:cBhvr>
+                          <p:to>
+                            <p:strVal val="visible"/>
+                          </p:to>
+                        </p:set>
+                        <p:animEffect transition="in" filter="fade">
+                          <p:cBhvr>
+                            <p:cTn id="100" dur="500"/>
+                            <p:tgtEl>
+                              <p:spTgt spid="287"/>
+                            </p:tgtEl>
+                          </p:cBhvr>
+                        </p:animEffect>
+                      </p:childTnLst>
+                    </p:cTn>
+                  </p:par>
+                  <p:par>
+                    <p:cTn id="5" presetID="10" presetClass="entr" presetSubtype="0" fill="hold" nodeType="afterPrev">
+                      <p:stCondLst>
+                        <p:cond delay="300"/>
+                      </p:stCondLst>
+                      <p:childTnLst>
+                        <p:set>
+                          <p:cBhvr>
+                            <p:cTn id="6" dur="1" fill="hold">
+                              <p:stCondLst>
+                                <p:cond delay="0"/>
+                              </p:stCondLst>
+                            </p:cTn>
+                            <p:tgtEl>
+                              <p:spTgt spid="288"/>
+                            </p:tgtEl>
+                            <p:attrNameLst>
+                              <p:attrName>style.visibility</p:attrName>
+                            </p:attrNameLst>
+                          </p:cBhvr>
+                          <p:to>
+                            <p:strVal val="visible"/>
+                          </p:to>
+                        </p:set>
+                        <p:animEffect transition="in" filter="fade">
+                          <p:cBhvr>
+                            <p:cTn id="101" dur="500"/>
+                            <p:tgtEl>
+                              <p:spTgt spid="288"/>
+                            </p:tgtEl>
+                          </p:cBhvr>
+                        </p:animEffect>
+                      </p:childTnLst>
+                    </p:cTn>
+                  </p:par>
+                  <p:par>
+                    <p:cTn id="7" presetID="10" presetClass="entr" presetSubtype="0" fill="hold" nodeType="afterPrev">
+                      <p:stCondLst>
+                        <p:cond delay="600"/>
+                      </p:stCondLst>
+                      <p:childTnLst>
+                        <p:set>
+                          <p:cBhvr>
+                            <p:cTn id="8" dur="1" fill="hold">
+                              <p:stCondLst>
+                                <p:cond delay="0"/>
+                              </p:stCondLst>
+                            </p:cTn>
+                            <p:tgtEl>
+                              <p:spTgt spid="289"/>
+                            </p:tgtEl>
+                            <p:attrNameLst>
+                              <p:attrName>style.visibility</p:attrName>
+                            </p:attrNameLst>
+                          </p:cBhvr>
+                          <p:to>
+                            <p:strVal val="visible"/>
+                          </p:to>
+                        </p:set>
+                        <p:animEffect transition="in" filter="fade">
+                          <p:cBhvr>
+                            <p:cTn id="102" dur="500"/>
+                            <p:tgtEl>
+                              <p:spTgt spid="289"/>
+                            </p:tgtEl>
+                          </p:cBhvr>
+                        </p:animEffect>
+                      </p:childTnLst>
+                    </p:cTn>
+                  </p:par>
+                  <p:par>
+                    <p:cTn id="9" presetID="10" presetClass="entr" presetSubtype="0" fill="hold" nodeType="afterPrev">
+                      <p:stCondLst>
+                        <p:cond delay="900"/>
+                      </p:stCondLst>
+                      <p:childTnLst>
+                        <p:set>
+                          <p:cBhvr>
+                            <p:cTn id="10" dur="1" fill="hold">
+                              <p:stCondLst>
+                                <p:cond delay="0"/>
+                              </p:stCondLst>
+                            </p:cTn>
+                            <p:tgtEl>
+                              <p:spTgt spid="290"/>
+                            </p:tgtEl>
+                            <p:attrNameLst>
+                              <p:attrName>style.visibility</p:attrName>
+                            </p:attrNameLst>
+                          </p:cBhvr>
+                          <p:to>
+                            <p:strVal val="visible"/>
+                          </p:to>
+                        </p:set>
+                        <p:animEffect transition="in" filter="fade">
+                          <p:cBhvr>
+                            <p:cTn id="103" dur="500"/>
+                            <p:tgtEl>
+                              <p:spTgt spid="290"/>
+                            </p:tgtEl>
+                          </p:cBhvr>
+                        </p:animEffect>
+                      </p:childTnLst>
+                    </p:cTn>
+                  </p:par>
+                  <p:par>
+                    <p:cTn id="11" presetID="10" presetClass="entr" presetSubtype="0" fill="hold" nodeType="afterPrev">
+                      <p:stCondLst>
+                        <p:cond delay="1200"/>
+                      </p:stCondLst>
+                      <p:childTnLst>
+                        <p:set>
+                          <p:cBhvr>
+                            <p:cTn id="12" dur="1" fill="hold">
+                              <p:stCondLst>
+                                <p:cond delay="0"/>
+                              </p:stCondLst>
+                            </p:cTn>
+                            <p:tgtEl>
+                              <p:spTgt spid="291"/>
+                            </p:tgtEl>
+                            <p:attrNameLst>
+                              <p:attrName>style.visibility</p:attrName>
+                            </p:attrNameLst>
+                          </p:cBhvr>
+                          <p:to>
+                            <p:strVal val="visible"/>
+                          </p:to>
+                        </p:set>
+                        <p:animEffect transition="in" filter="fade">
+                          <p:cBhvr>
+                            <p:cTn id="104" dur="500"/>
+                            <p:tgtEl>
+                              <p:spTgt spid="291"/>
+                            </p:tgtEl>
+                          </p:cBhvr>
+                        </p:animEffect>
+                      </p:childTnLst>
+                    </p:cTn>
+                  </p:par>
+                  <p:par>
+                    <p:cTn id="13" presetID="10" presetClass="entr" presetSubtype="0" fill="hold" nodeType="afterPrev">
+                      <p:stCondLst>
+                        <p:cond delay="1500"/>
+                      </p:stCondLst>
+                      <p:childTnLst>
+                        <p:set>
+                          <p:cBhvr>
+                            <p:cTn id="14" dur="1" fill="hold">
+                              <p:stCondLst>
+                                <p:cond delay="0"/>
+                              </p:stCondLst>
+                            </p:cTn>
+                            <p:tgtEl>
+                              <p:spTgt spid="292"/>
+                            </p:tgtEl>
+                            <p:attrNameLst>
+                              <p:attrName>style.visibility</p:attrName>
+                            </p:attrNameLst>
+                          </p:cBhvr>
+                          <p:to>
+                            <p:strVal val="visible"/>
+                          </p:to>
+                        </p:set>
+                        <p:animEffect transition="in" filter="fade">
+                          <p:cBhvr>
+                            <p:cTn id="105" dur="500"/>
+                            <p:tgtEl>
+                              <p:spTgt spid="292"/>
+                            </p:tgtEl>
+                          </p:cBhvr>
+                        </p:animEffect>
+                      </p:childTnLst>
+                    </p:cTn>
+                  </p:par>
+                </p:childTnLst>
+              </p:cTn>
+              <p:prevCondLst>
+                <p:cond evt="onPrev" delay="0">
+                  <p:tgtEl>
+                    <p:sldTgt/>
+                  </p:tgtEl>
+                </p:cond>
+              </p:prevCondLst>
+              <p:nextCondLst>
+                <p:cond evt="onNext" delay="0">
+                  <p:tgtEl>
+                    <p:sldTgt/>
+                  </p:tgtEl>
+                </p:cond>
+              </p:nextCondLst>
+            </p:seq>
+          </p:childTnLst>
+        </p:cTn>
+      </p:par>
+    </p:tnLst>
+  </p:timing>
 </p:sld>
 </file>
 
@@ -13952,6 +14714,144 @@
   <p:clrMapOvr>
     <a:masterClrMapping/>
   </p:clrMapOvr>
+  <p:transition spd="med" advClick="1">
+    <p:fade/>
+  </p:transition>
+  <p:timing>
+    <p:tnLst>
+      <p:par>
+        <p:cTn id="1" dur="indefinite" restart="never" nodeType="tmRoot">
+          <p:childTnLst>
+            <p:seq concurrent="1" nextAc="seek">
+              <p:cTn id="2" dur="indefinite" nodeType="mainSeq">
+                <p:childTnLst>
+                  <p:par>
+                    <p:cTn id="3" presetID="10" presetClass="entr" presetSubtype="0" fill="hold" nodeType="afterPrev">
+                      <p:stCondLst>
+                        <p:cond delay="0"/>
+                      </p:stCondLst>
+                      <p:childTnLst>
+                        <p:set>
+                          <p:cBhvr>
+                            <p:cTn id="4" dur="1" fill="hold">
+                              <p:stCondLst>
+                                <p:cond delay="0"/>
+                              </p:stCondLst>
+                            </p:cTn>
+                            <p:tgtEl>
+                              <p:spTgt spid="308"/>
+                            </p:tgtEl>
+                            <p:attrNameLst>
+                              <p:attrName>style.visibility</p:attrName>
+                            </p:attrNameLst>
+                          </p:cBhvr>
+                          <p:to>
+                            <p:strVal val="visible"/>
+                          </p:to>
+                        </p:set>
+                        <p:animEffect transition="in" filter="fade">
+                          <p:cBhvr>
+                            <p:cTn id="100" dur="500"/>
+                            <p:tgtEl>
+                              <p:spTgt spid="308"/>
+                            </p:tgtEl>
+                          </p:cBhvr>
+                        </p:animEffect>
+                      </p:childTnLst>
+                    </p:cTn>
+                  </p:par>
+                  <p:par>
+                    <p:cTn id="5" presetID="10" presetClass="entr" presetSubtype="0" fill="hold" nodeType="afterPrev">
+                      <p:stCondLst>
+                        <p:cond delay="300"/>
+                      </p:stCondLst>
+                      <p:childTnLst>
+                        <p:set>
+                          <p:cBhvr>
+                            <p:cTn id="6" dur="1" fill="hold">
+                              <p:stCondLst>
+                                <p:cond delay="0"/>
+                              </p:stCondLst>
+                            </p:cTn>
+                            <p:tgtEl>
+                              <p:spTgt spid="309"/>
+                            </p:tgtEl>
+                            <p:attrNameLst>
+                              <p:attrName>style.visibility</p:attrName>
+                            </p:attrNameLst>
+                          </p:cBhvr>
+                          <p:to>
+                            <p:strVal val="visible"/>
+                          </p:to>
+                        </p:set>
+                        <p:animEffect transition="in" filter="fade">
+                          <p:cBhvr>
+                            <p:cTn id="101" dur="500"/>
+                            <p:tgtEl>
+                              <p:spTgt spid="309"/>
+                            </p:tgtEl>
+                          </p:cBhvr>
+                        </p:animEffect>
+                      </p:childTnLst>
+                    </p:cTn>
+                  </p:par>
+                  <p:par>
+                    <p:cTn id="7" presetID="10" presetClass="entr" presetSubtype="0" fill="hold" nodeType="afterPrev">
+                      <p:stCondLst>
+                        <p:cond delay="600"/>
+                      </p:stCondLst>
+                      <p:childTnLst>
+                        <p:set>
+                          <p:cBhvr>
+                            <p:cTn id="8" dur="1" fill="hold">
+                              <p:stCondLst>
+                                <p:cond delay="0"/>
+                              </p:stCondLst>
+                            </p:cTn>
+                            <p:tgtEl>
+                              <p:spTgt spid="310"/>
+                            </p:tgtEl>
+                            <p:attrNameLst>
+                              <p:attrName>style.visibility</p:attrName>
+                            </p:attrNameLst>
+                          </p:cBhvr>
+                          <p:to>
+                            <p:strVal val="visible"/>
+                          </p:to>
+                        </p:set>
+                        <p:animEffect transition="in" filter="fade">
+                          <p:cBhvr>
+                            <p:cTn id="102" dur="500"/>
+                            <p:tgtEl>
+                              <p:spTgt spid="310"/>
+                            </p:tgtEl>
+                          </p:cBhvr>
+                        </p:animEffect>
+                      </p:childTnLst>
+                    </p:cTn>
+                  </p:par>
+                </p:childTnLst>
+              </p:cTn>
+              <p:prevCondLst>
+                <p:cond evt="onPrev" delay="0">
+                  <p:tgtEl>
+                    <p:sldTgt/>
+                  </p:tgtEl>
+                </p:cond>
+              </p:prevCondLst>
+              <p:nextCondLst>
+                <p:cond evt="onNext" delay="0">
+                  <p:tgtEl>
+                    <p:sldTgt/>
+                  </p:tgtEl>
+                </p:cond>
+              </p:nextCondLst>
+            </p:seq>
+          </p:childTnLst>
+        </p:cTn>
+      </p:par>
+    </p:tnLst>
+  </p:timing>
 </p:sld>
 </file>
 
@@ -29990,6 +30890,249 @@
   <p:clrMapOvr>
     <a:masterClrMapping/>
   </p:clrMapOvr>
+  <p:transition spd="med" advClick="1">
+    <p:fade/>
+  </p:transition>
+  <p:timing>
+    <p:tnLst>
+      <p:par>
+        <p:cTn id="1" dur="indefinite" restart="never" nodeType="tmRoot">
+          <p:childTnLst>
+            <p:seq concurrent="1" nextAc="seek">
+              <p:cTn id="2" dur="indefinite" nodeType="mainSeq">
+                <p:childTnLst>
+                  <p:par>
+                    <p:cTn id="3" presetID="10" presetClass="entr" presetSubtype="0" fill="hold" nodeType="afterPrev">
+                      <p:stCondLst>
+                        <p:cond delay="0"/>
+                      </p:stCondLst>
+                      <p:childTnLst>
+                        <p:set>
+                          <p:cBhvr>
+                            <p:cTn id="4" dur="1" fill="hold">
+                              <p:stCondLst>
+                                <p:cond delay="0"/>
+                              </p:stCondLst>
+                            </p:cTn>
+                            <p:tgtEl>
+                              <p:spTgt spid="315"/>
+                            </p:tgtEl>
+                            <p:attrNameLst>
+                              <p:attrName>style.visibility</p:attrName>
+                            </p:attrNameLst>
+                          </p:cBhvr>
+                          <p:to>
+                            <p:strVal val="visible"/>
+                          </p:to>
+                        </p:set>
+                        <p:animEffect transition="in" filter="fade">
+                          <p:cBhvr>
+                            <p:cTn id="100" dur="500"/>
+                            <p:tgtEl>
+                              <p:spTgt spid="315"/>
+                            </p:tgtEl>
+                          </p:cBhvr>
+                        </p:animEffect>
+                      </p:childTnLst>
+                    </p:cTn>
+                  </p:par>
+                  <p:par>
+                    <p:cTn id="5" presetID="10" presetClass="entr" presetSubtype="0" fill="hold" nodeType="afterPrev">
+                      <p:stCondLst>
+                        <p:cond delay="300"/>
+                      </p:stCondLst>
+                      <p:childTnLst>
+                        <p:set>
+                          <p:cBhvr>
+                            <p:cTn id="6" dur="1" fill="hold">
+                              <p:stCondLst>
+                                <p:cond delay="0"/>
+                              </p:stCondLst>
+                            </p:cTn>
+                            <p:tgtEl>
+                              <p:spTgt spid="316"/>
+                            </p:tgtEl>
+                            <p:attrNameLst>
+                              <p:attrName>style.visibility</p:attrName>
+                            </p:attrNameLst>
+                          </p:cBhvr>
+                          <p:to>
+                            <p:strVal val="visible"/>
+                          </p:to>
+                        </p:set>
+                        <p:animEffect transition="in" filter="fade">
+                          <p:cBhvr>
+                            <p:cTn id="101" dur="500"/>
+                            <p:tgtEl>
+                              <p:spTgt spid="316"/>
+                            </p:tgtEl>
+                          </p:cBhvr>
+                        </p:animEffect>
+                      </p:childTnLst>
+                    </p:cTn>
+                  </p:par>
+                  <p:par>
+                    <p:cTn id="7" presetID="10" presetClass="entr" presetSubtype="0" fill="hold" nodeType="afterPrev">
+                      <p:stCondLst>
+                        <p:cond delay="600"/>
+                      </p:stCondLst>
+                      <p:childTnLst>
+                        <p:set>
+                          <p:cBhvr>
+                            <p:cTn id="8" dur="1" fill="hold">
+                              <p:stCondLst>
+                                <p:cond delay="0"/>
+                              </p:stCondLst>
+                            </p:cTn>
+                            <p:tgtEl>
+                              <p:spTgt spid="317"/>
+                            </p:tgtEl>
+                            <p:attrNameLst>
+                              <p:attrName>style.visibility</p:attrName>
+                            </p:attrNameLst>
+                          </p:cBhvr>
+                          <p:to>
+                            <p:strVal val="visible"/>
+                          </p:to>
+                        </p:set>
+                        <p:animEffect transition="in" filter="fade">
+                          <p:cBhvr>
+                            <p:cTn id="102" dur="500"/>
+                            <p:tgtEl>
+                              <p:spTgt spid="317"/>
+                            </p:tgtEl>
+                          </p:cBhvr>
+                        </p:animEffect>
+                      </p:childTnLst>
+                    </p:cTn>
+                  </p:par>
+                  <p:par>
+                    <p:cTn id="9" presetID="10" presetClass="entr" presetSubtype="0" fill="hold" nodeType="afterPrev">
+                      <p:stCondLst>
+                        <p:cond delay="900"/>
+                      </p:stCondLst>
+                      <p:childTnLst>
+                        <p:set>
+                          <p:cBhvr>
+                            <p:cTn id="10" dur="1" fill="hold">
+                              <p:stCondLst>
+                                <p:cond delay="0"/>
+                              </p:stCondLst>
+                            </p:cTn>
+                            <p:tgtEl>
+                              <p:spTgt spid="318"/>
+                            </p:tgtEl>
+                            <p:attrNameLst>
+                              <p:attrName>style.visibility</p:attrName>
+                            </p:attrNameLst>
+                          </p:cBhvr>
+                          <p:to>
+                            <p:strVal val="visible"/>
+                          </p:to>
+                        </p:set>
+                        <p:animEffect transition="in" filter="fade">
+                          <p:cBhvr>
+                            <p:cTn id="103" dur="500"/>
+                            <p:tgtEl>
+                              <p:spTgt spid="318"/>
+                            </p:tgtEl>
+                          </p:cBhvr>
+                        </p:animEffect>
+                      </p:childTnLst>
+                    </p:cTn>
+                  </p:par>
+                  <p:par>
+                    <p:cTn id="11" presetID="10" presetClass="entr" presetSubtype="0" fill="hold" nodeType="afterPrev">
+                      <p:stCondLst>
+                        <p:cond delay="1200"/>
+                      </p:stCondLst>
+                      <p:childTnLst>
+                        <p:set>
+                          <p:cBhvr>
+                            <p:cTn id="12" dur="1" fill="hold">
+                              <p:stCondLst>
+                                <p:cond delay="0"/>
+                              </p:stCondLst>
+                            </p:cTn>
+                            <p:tgtEl>
+                              <p:spTgt spid="319"/>
+                            </p:tgtEl>
+                            <p:attrNameLst>
+                              <p:attrName>style.visibility</p:attrName>
+                            </p:attrNameLst>
+                          </p:cBhvr>
+                          <p:to>
+                            <p:strVal val="visible"/>
+                          </p:to>
+                        </p:set>
+                        <p:animEffect transition="in" filter="fade">
+                          <p:cBhvr>
+                            <p:cTn id="104" dur="500"/>
+                            <p:tgtEl>
+                              <p:spTgt spid="319"/>
+                            </p:tgtEl>
+                          </p:cBhvr>
+                        </p:animEffect>
+                      </p:childTnLst>
+                    </p:cTn>
+                  </p:par>
+                  <p:par>
+                    <p:cTn id="13" presetID="10" presetClass="entr" presetSubtype="0" fill="hold" nodeType="afterPrev">
+                      <p:stCondLst>
+                        <p:cond delay="1500"/>
+                      </p:stCondLst>
+                      <p:childTnLst>
+                        <p:set>
+                          <p:cBhvr>
+                            <p:cTn id="14" dur="1" fill="hold">
+                              <p:stCondLst>
+                                <p:cond delay="0"/>
+                              </p:stCondLst>
+                            </p:cTn>
+                            <p:tgtEl>
+                              <p:spTgt spid="320"/>
+                            </p:tgtEl>
+                            <p:attrNameLst>
+                              <p:attrName>style.visibility</p:attrName>
+                            </p:attrNameLst>
+                          </p:cBhvr>
+                          <p:to>
+                            <p:strVal val="visible"/>
+                          </p:to>
+                        </p:set>
+                        <p:animEffect transition="in" filter="fade">
+                          <p:cBhvr>
+                            <p:cTn id="105" dur="500"/>
+                            <p:tgtEl>
+                              <p:spTgt spid="320"/>
+                            </p:tgtEl>
+                          </p:cBhvr>
+                        </p:animEffect>
+                      </p:childTnLst>
+                    </p:cTn>
+                  </p:par>
+                </p:childTnLst>
+              </p:cTn>
+              <p:prevCondLst>
+                <p:cond evt="onPrev" delay="0">
+                  <p:tgtEl>
+                    <p:sldTgt/>
+                  </p:tgtEl>
+                </p:cond>
+              </p:prevCondLst>
+              <p:nextCondLst>
+                <p:cond evt="onNext" delay="0">
+                  <p:tgtEl>
+                    <p:sldTgt/>
+                  </p:tgtEl>
+                </p:cond>
+              </p:nextCondLst>
+            </p:seq>
+          </p:childTnLst>
+        </p:cTn>
+      </p:par>
+    </p:tnLst>
+  </p:timing>
 </p:sld>
 </file>
 
@@ -30168,6 +31311,144 @@
   <p:clrMapOvr>
     <a:masterClrMapping/>
   </p:clrMapOvr>
+  <p:transition spd="med" advClick="1">
+    <p:fade/>
+  </p:transition>
+  <p:timing>
+    <p:tnLst>
+      <p:par>
+        <p:cTn id="1" dur="indefinite" restart="never" nodeType="tmRoot">
+          <p:childTnLst>
+            <p:seq concurrent="1" nextAc="seek">
+              <p:cTn id="2" dur="indefinite" nodeType="mainSeq">
+                <p:childTnLst>
+                  <p:par>
+                    <p:cTn id="3" presetID="10" presetClass="entr" presetSubtype="0" fill="hold" nodeType="afterPrev">
+                      <p:stCondLst>
+                        <p:cond delay="0"/>
+                      </p:stCondLst>
+                      <p:childTnLst>
+                        <p:set>
+                          <p:cBhvr>
+                            <p:cTn id="4" dur="1" fill="hold">
+                              <p:stCondLst>
+                                <p:cond delay="0"/>
+                              </p:stCondLst>
+                            </p:cTn>
+                            <p:tgtEl>
+                              <p:spTgt spid="342"/>
+                            </p:tgtEl>
+                            <p:attrNameLst>
+                              <p:attrName>style.visibility</p:attrName>
+                            </p:attrNameLst>
+                          </p:cBhvr>
+                          <p:to>
+                            <p:strVal val="visible"/>
+                          </p:to>
+                        </p:set>
+                        <p:animEffect transition="in" filter="fade">
+                          <p:cBhvr>
+                            <p:cTn id="100" dur="500"/>
+                            <p:tgtEl>
+                              <p:spTgt spid="342"/>
+                            </p:tgtEl>
+                          </p:cBhvr>
+                        </p:animEffect>
+                      </p:childTnLst>
+                    </p:cTn>
+                  </p:par>
+                  <p:par>
+                    <p:cTn id="5" presetID="10" presetClass="entr" presetSubtype="0" fill="hold" nodeType="afterPrev">
+                      <p:stCondLst>
+                        <p:cond delay="300"/>
+                      </p:stCondLst>
+                      <p:childTnLst>
+                        <p:set>
+                          <p:cBhvr>
+                            <p:cTn id="6" dur="1" fill="hold">
+                              <p:stCondLst>
+                                <p:cond delay="0"/>
+                              </p:stCondLst>
+                            </p:cTn>
+                            <p:tgtEl>
+                              <p:spTgt spid="343"/>
+                            </p:tgtEl>
+                            <p:attrNameLst>
+                              <p:attrName>style.visibility</p:attrName>
+                            </p:attrNameLst>
+                          </p:cBhvr>
+                          <p:to>
+                            <p:strVal val="visible"/>
+                          </p:to>
+                        </p:set>
+                        <p:animEffect transition="in" filter="fade">
+                          <p:cBhvr>
+                            <p:cTn id="101" dur="500"/>
+                            <p:tgtEl>
+                              <p:spTgt spid="343"/>
+                            </p:tgtEl>
+                          </p:cBhvr>
+                        </p:animEffect>
+                      </p:childTnLst>
+                    </p:cTn>
+                  </p:par>
+                  <p:par>
+                    <p:cTn id="7" presetID="10" presetClass="entr" presetSubtype="0" fill="hold" nodeType="afterPrev">
+                      <p:stCondLst>
+                        <p:cond delay="600"/>
+                      </p:stCondLst>
+                      <p:childTnLst>
+                        <p:set>
+                          <p:cBhvr>
+                            <p:cTn id="8" dur="1" fill="hold">
+                              <p:stCondLst>
+                                <p:cond delay="0"/>
+                              </p:stCondLst>
+                            </p:cTn>
+                            <p:tgtEl>
+                              <p:spTgt spid="344"/>
+                            </p:tgtEl>
+                            <p:attrNameLst>
+                              <p:attrName>style.visibility</p:attrName>
+                            </p:attrNameLst>
+                          </p:cBhvr>
+                          <p:to>
+                            <p:strVal val="visible"/>
+                          </p:to>
+                        </p:set>
+                        <p:animEffect transition="in" filter="fade">
+                          <p:cBhvr>
+                            <p:cTn id="102" dur="500"/>
+                            <p:tgtEl>
+                              <p:spTgt spid="344"/>
+                            </p:tgtEl>
+                          </p:cBhvr>
+                        </p:animEffect>
+                      </p:childTnLst>
+                    </p:cTn>
+                  </p:par>
+                </p:childTnLst>
+              </p:cTn>
+              <p:prevCondLst>
+                <p:cond evt="onPrev" delay="0">
+                  <p:tgtEl>
+                    <p:sldTgt/>
+                  </p:tgtEl>
+                </p:cond>
+              </p:prevCondLst>
+              <p:nextCondLst>
+                <p:cond evt="onNext" delay="0">
+                  <p:tgtEl>
+                    <p:sldTgt/>
+                  </p:tgtEl>
+                </p:cond>
+              </p:nextCondLst>
+            </p:seq>
+          </p:childTnLst>
+        </p:cTn>
+      </p:par>
+    </p:tnLst>
+  </p:timing>
 </p:sld>
 </file>
 
@@ -32304,6 +33585,249 @@
   <p:clrMapOvr>
     <a:masterClrMapping/>
   </p:clrMapOvr>
+  <p:transition spd="med" advClick="1">
+    <p:fade/>
+  </p:transition>
+  <p:timing>
+    <p:tnLst>
+      <p:par>
+        <p:cTn id="1" dur="indefinite" restart="never" nodeType="tmRoot">
+          <p:childTnLst>
+            <p:seq concurrent="1" nextAc="seek">
+              <p:cTn id="2" dur="indefinite" nodeType="mainSeq">
+                <p:childTnLst>
+                  <p:par>
+                    <p:cTn id="3" presetID="10" presetClass="entr" presetSubtype="0" fill="hold" nodeType="afterPrev">
+                      <p:stCondLst>
+                        <p:cond delay="0"/>
+                      </p:stCondLst>
+                      <p:childTnLst>
+                        <p:set>
+                          <p:cBhvr>
+                            <p:cTn id="4" dur="1" fill="hold">
+                              <p:stCondLst>
+                                <p:cond delay="0"/>
+                              </p:stCondLst>
+                            </p:cTn>
+                            <p:tgtEl>
+                              <p:spTgt spid="349"/>
+                            </p:tgtEl>
+                            <p:attrNameLst>
+                              <p:attrName>style.visibility</p:attrName>
+                            </p:attrNameLst>
+                          </p:cBhvr>
+                          <p:to>
+                            <p:strVal val="visible"/>
+                          </p:to>
+                        </p:set>
+                        <p:animEffect transition="in" filter="fade">
+                          <p:cBhvr>
+                            <p:cTn id="100" dur="500"/>
+                            <p:tgtEl>
+                              <p:spTgt spid="349"/>
+                            </p:tgtEl>
+                          </p:cBhvr>
+                        </p:animEffect>
+                      </p:childTnLst>
+                    </p:cTn>
+                  </p:par>
+                  <p:par>
+                    <p:cTn id="5" presetID="10" presetClass="entr" presetSubtype="0" fill="hold" nodeType="afterPrev">
+                      <p:stCondLst>
+                        <p:cond delay="300"/>
+                      </p:stCondLst>
+                      <p:childTnLst>
+                        <p:set>
+                          <p:cBhvr>
+                            <p:cTn id="6" dur="1" fill="hold">
+                              <p:stCondLst>
+                                <p:cond delay="0"/>
+                              </p:stCondLst>
+                            </p:cTn>
+                            <p:tgtEl>
+                              <p:spTgt spid="350"/>
+                            </p:tgtEl>
+                            <p:attrNameLst>
+                              <p:attrName>style.visibility</p:attrName>
+                            </p:attrNameLst>
+                          </p:cBhvr>
+                          <p:to>
+                            <p:strVal val="visible"/>
+                          </p:to>
+                        </p:set>
+                        <p:animEffect transition="in" filter="fade">
+                          <p:cBhvr>
+                            <p:cTn id="101" dur="500"/>
+                            <p:tgtEl>
+                              <p:spTgt spid="350"/>
+                            </p:tgtEl>
+                          </p:cBhvr>
+                        </p:animEffect>
+                      </p:childTnLst>
+                    </p:cTn>
+                  </p:par>
+                  <p:par>
+                    <p:cTn id="7" presetID="10" presetClass="entr" presetSubtype="0" fill="hold" nodeType="afterPrev">
+                      <p:stCondLst>
+                        <p:cond delay="600"/>
+                      </p:stCondLst>
+                      <p:childTnLst>
+                        <p:set>
+                          <p:cBhvr>
+                            <p:cTn id="8" dur="1" fill="hold">
+                              <p:stCondLst>
+                                <p:cond delay="0"/>
+                              </p:stCondLst>
+                            </p:cTn>
+                            <p:tgtEl>
+                              <p:spTgt spid="351"/>
+                            </p:tgtEl>
+                            <p:attrNameLst>
+                              <p:attrName>style.visibility</p:attrName>
+                            </p:attrNameLst>
+                          </p:cBhvr>
+                          <p:to>
+                            <p:strVal val="visible"/>
+                          </p:to>
+                        </p:set>
+                        <p:animEffect transition="in" filter="fade">
+                          <p:cBhvr>
+                            <p:cTn id="102" dur="500"/>
+                            <p:tgtEl>
+                              <p:spTgt spid="351"/>
+                            </p:tgtEl>
+                          </p:cBhvr>
+                        </p:animEffect>
+                      </p:childTnLst>
+                    </p:cTn>
+                  </p:par>
+                  <p:par>
+                    <p:cTn id="9" presetID="10" presetClass="entr" presetSubtype="0" fill="hold" nodeType="afterPrev">
+                      <p:stCondLst>
+                        <p:cond delay="900"/>
+                      </p:stCondLst>
+                      <p:childTnLst>
+                        <p:set>
+                          <p:cBhvr>
+                            <p:cTn id="10" dur="1" fill="hold">
+                              <p:stCondLst>
+                                <p:cond delay="0"/>
+                              </p:stCondLst>
+                            </p:cTn>
+                            <p:tgtEl>
+                              <p:spTgt spid="352"/>
+                            </p:tgtEl>
+                            <p:attrNameLst>
+                              <p:attrName>style.visibility</p:attrName>
+                            </p:attrNameLst>
+                          </p:cBhvr>
+                          <p:to>
+                            <p:strVal val="visible"/>
+                          </p:to>
+                        </p:set>
+                        <p:animEffect transition="in" filter="fade">
+                          <p:cBhvr>
+                            <p:cTn id="103" dur="500"/>
+                            <p:tgtEl>
+                              <p:spTgt spid="352"/>
+                            </p:tgtEl>
+                          </p:cBhvr>
+                        </p:animEffect>
+                      </p:childTnLst>
+                    </p:cTn>
+                  </p:par>
+                  <p:par>
+                    <p:cTn id="11" presetID="10" presetClass="entr" presetSubtype="0" fill="hold" nodeType="afterPrev">
+                      <p:stCondLst>
+                        <p:cond delay="1200"/>
+                      </p:stCondLst>
+                      <p:childTnLst>
+                        <p:set>
+                          <p:cBhvr>
+                            <p:cTn id="12" dur="1" fill="hold">
+                              <p:stCondLst>
+                                <p:cond delay="0"/>
+                              </p:stCondLst>
+                            </p:cTn>
+                            <p:tgtEl>
+                              <p:spTgt spid="353"/>
+                            </p:tgtEl>
+                            <p:attrNameLst>
+                              <p:attrName>style.visibility</p:attrName>
+                            </p:attrNameLst>
+                          </p:cBhvr>
+                          <p:to>
+                            <p:strVal val="visible"/>
+                          </p:to>
+                        </p:set>
+                        <p:animEffect transition="in" filter="fade">
+                          <p:cBhvr>
+                            <p:cTn id="104" dur="500"/>
+                            <p:tgtEl>
+                              <p:spTgt spid="353"/>
+                            </p:tgtEl>
+                          </p:cBhvr>
+                        </p:animEffect>
+                      </p:childTnLst>
+                    </p:cTn>
+                  </p:par>
+                  <p:par>
+                    <p:cTn id="13" presetID="10" presetClass="entr" presetSubtype="0" fill="hold" nodeType="afterPrev">
+                      <p:stCondLst>
+                        <p:cond delay="1500"/>
+                      </p:stCondLst>
+                      <p:childTnLst>
+                        <p:set>
+                          <p:cBhvr>
+                            <p:cTn id="14" dur="1" fill="hold">
+                              <p:stCondLst>
+                                <p:cond delay="0"/>
+                              </p:stCondLst>
+                            </p:cTn>
+                            <p:tgtEl>
+                              <p:spTgt spid="354"/>
+                            </p:tgtEl>
+                            <p:attrNameLst>
+                              <p:attrName>style.visibility</p:attrName>
+                            </p:attrNameLst>
+                          </p:cBhvr>
+                          <p:to>
+                            <p:strVal val="visible"/>
+                          </p:to>
+                        </p:set>
+                        <p:animEffect transition="in" filter="fade">
+                          <p:cBhvr>
+                            <p:cTn id="105" dur="500"/>
+                            <p:tgtEl>
+                              <p:spTgt spid="354"/>
+                            </p:tgtEl>
+                          </p:cBhvr>
+                        </p:animEffect>
+                      </p:childTnLst>
+                    </p:cTn>
+                  </p:par>
+                </p:childTnLst>
+              </p:cTn>
+              <p:prevCondLst>
+                <p:cond evt="onPrev" delay="0">
+                  <p:tgtEl>
+                    <p:sldTgt/>
+                  </p:tgtEl>
+                </p:cond>
+              </p:prevCondLst>
+              <p:nextCondLst>
+                <p:cond evt="onNext" delay="0">
+                  <p:tgtEl>
+                    <p:sldTgt/>
+                  </p:tgtEl>
+                </p:cond>
+              </p:nextCondLst>
+            </p:seq>
+          </p:childTnLst>
+        </p:cTn>
+      </p:par>
+    </p:tnLst>
+  </p:timing>
 </p:sld>
 </file>
 
@@ -32818,6 +34342,249 @@
   <p:clrMapOvr>
     <a:masterClrMapping/>
   </p:clrMapOvr>
+  <p:transition spd="med" advClick="1">
+    <p:wipe dir="l"/>
+  </p:transition>
+  <p:timing>
+    <p:tnLst>
+      <p:par>
+        <p:cTn id="1" dur="indefinite" restart="never" nodeType="tmRoot">
+          <p:childTnLst>
+            <p:seq concurrent="1" nextAc="seek">
+              <p:cTn id="2" dur="indefinite" nodeType="mainSeq">
+                <p:childTnLst>
+                  <p:par>
+                    <p:cTn id="3" presetID="10" presetClass="entr" presetSubtype="0" fill="hold" nodeType="afterPrev">
+                      <p:stCondLst>
+                        <p:cond delay="0"/>
+                      </p:stCondLst>
+                      <p:childTnLst>
+                        <p:set>
+                          <p:cBhvr>
+                            <p:cTn id="4" dur="1" fill="hold">
+                              <p:stCondLst>
+                                <p:cond delay="0"/>
+                              </p:stCondLst>
+                            </p:cTn>
+                            <p:tgtEl>
+                              <p:spTgt spid="381"/>
+                            </p:tgtEl>
+                            <p:attrNameLst>
+                              <p:attrName>style.visibility</p:attrName>
+                            </p:attrNameLst>
+                          </p:cBhvr>
+                          <p:to>
+                            <p:strVal val="visible"/>
+                          </p:to>
+                        </p:set>
+                        <p:animEffect transition="in" filter="fade">
+                          <p:cBhvr>
+                            <p:cTn id="100" dur="500"/>
+                            <p:tgtEl>
+                              <p:spTgt spid="381"/>
+                            </p:tgtEl>
+                          </p:cBhvr>
+                        </p:animEffect>
+                      </p:childTnLst>
+                    </p:cTn>
+                  </p:par>
+                  <p:par>
+                    <p:cTn id="5" presetID="10" presetClass="entr" presetSubtype="0" fill="hold" nodeType="afterPrev">
+                      <p:stCondLst>
+                        <p:cond delay="300"/>
+                      </p:stCondLst>
+                      <p:childTnLst>
+                        <p:set>
+                          <p:cBhvr>
+                            <p:cTn id="6" dur="1" fill="hold">
+                              <p:stCondLst>
+                                <p:cond delay="0"/>
+                              </p:stCondLst>
+                            </p:cTn>
+                            <p:tgtEl>
+                              <p:spTgt spid="382"/>
+                            </p:tgtEl>
+                            <p:attrNameLst>
+                              <p:attrName>style.visibility</p:attrName>
+                            </p:attrNameLst>
+                          </p:cBhvr>
+                          <p:to>
+                            <p:strVal val="visible"/>
+                          </p:to>
+                        </p:set>
+                        <p:animEffect transition="in" filter="fade">
+                          <p:cBhvr>
+                            <p:cTn id="101" dur="500"/>
+                            <p:tgtEl>
+                              <p:spTgt spid="382"/>
+                            </p:tgtEl>
+                          </p:cBhvr>
+                        </p:animEffect>
+                      </p:childTnLst>
+                    </p:cTn>
+                  </p:par>
+                  <p:par>
+                    <p:cTn id="7" presetID="10" presetClass="entr" presetSubtype="0" fill="hold" nodeType="afterPrev">
+                      <p:stCondLst>
+                        <p:cond delay="600"/>
+                      </p:stCondLst>
+                      <p:childTnLst>
+                        <p:set>
+                          <p:cBhvr>
+                            <p:cTn id="8" dur="1" fill="hold">
+                              <p:stCondLst>
+                                <p:cond delay="0"/>
+                              </p:stCondLst>
+                            </p:cTn>
+                            <p:tgtEl>
+                              <p:spTgt spid="383"/>
+                            </p:tgtEl>
+                            <p:attrNameLst>
+                              <p:attrName>style.visibility</p:attrName>
+                            </p:attrNameLst>
+                          </p:cBhvr>
+                          <p:to>
+                            <p:strVal val="visible"/>
+                          </p:to>
+                        </p:set>
+                        <p:animEffect transition="in" filter="fade">
+                          <p:cBhvr>
+                            <p:cTn id="102" dur="500"/>
+                            <p:tgtEl>
+                              <p:spTgt spid="383"/>
+                            </p:tgtEl>
+                          </p:cBhvr>
+                        </p:animEffect>
+                      </p:childTnLst>
+                    </p:cTn>
+                  </p:par>
+                  <p:par>
+                    <p:cTn id="9" presetID="10" presetClass="entr" presetSubtype="0" fill="hold" nodeType="afterPrev">
+                      <p:stCondLst>
+                        <p:cond delay="900"/>
+                      </p:stCondLst>
+                      <p:childTnLst>
+                        <p:set>
+                          <p:cBhvr>
+                            <p:cTn id="10" dur="1" fill="hold">
+                              <p:stCondLst>
+                                <p:cond delay="0"/>
+                              </p:stCondLst>
+                            </p:cTn>
+                            <p:tgtEl>
+                              <p:spTgt spid="384"/>
+                            </p:tgtEl>
+                            <p:attrNameLst>
+                              <p:attrName>style.visibility</p:attrName>
+                            </p:attrNameLst>
+                          </p:cBhvr>
+                          <p:to>
+                            <p:strVal val="visible"/>
+                          </p:to>
+                        </p:set>
+                        <p:animEffect transition="in" filter="fade">
+                          <p:cBhvr>
+                            <p:cTn id="103" dur="500"/>
+                            <p:tgtEl>
+                              <p:spTgt spid="384"/>
+                            </p:tgtEl>
+                          </p:cBhvr>
+                        </p:animEffect>
+                      </p:childTnLst>
+                    </p:cTn>
+                  </p:par>
+                  <p:par>
+                    <p:cTn id="11" presetID="10" presetClass="entr" presetSubtype="0" fill="hold" nodeType="afterPrev">
+                      <p:stCondLst>
+                        <p:cond delay="1200"/>
+                      </p:stCondLst>
+                      <p:childTnLst>
+                        <p:set>
+                          <p:cBhvr>
+                            <p:cTn id="12" dur="1" fill="hold">
+                              <p:stCondLst>
+                                <p:cond delay="0"/>
+                              </p:stCondLst>
+                            </p:cTn>
+                            <p:tgtEl>
+                              <p:spTgt spid="385"/>
+                            </p:tgtEl>
+                            <p:attrNameLst>
+                              <p:attrName>style.visibility</p:attrName>
+                            </p:attrNameLst>
+                          </p:cBhvr>
+                          <p:to>
+                            <p:strVal val="visible"/>
+                          </p:to>
+                        </p:set>
+                        <p:animEffect transition="in" filter="fade">
+                          <p:cBhvr>
+                            <p:cTn id="104" dur="500"/>
+                            <p:tgtEl>
+                              <p:spTgt spid="385"/>
+                            </p:tgtEl>
+                          </p:cBhvr>
+                        </p:animEffect>
+                      </p:childTnLst>
+                    </p:cTn>
+                  </p:par>
+                  <p:par>
+                    <p:cTn id="13" presetID="10" presetClass="entr" presetSubtype="0" fill="hold" nodeType="afterPrev">
+                      <p:stCondLst>
+                        <p:cond delay="1500"/>
+                      </p:stCondLst>
+                      <p:childTnLst>
+                        <p:set>
+                          <p:cBhvr>
+                            <p:cTn id="14" dur="1" fill="hold">
+                              <p:stCondLst>
+                                <p:cond delay="0"/>
+                              </p:stCondLst>
+                            </p:cTn>
+                            <p:tgtEl>
+                              <p:spTgt spid="386"/>
+                            </p:tgtEl>
+                            <p:attrNameLst>
+                              <p:attrName>style.visibility</p:attrName>
+                            </p:attrNameLst>
+                          </p:cBhvr>
+                          <p:to>
+                            <p:strVal val="visible"/>
+                          </p:to>
+                        </p:set>
+                        <p:animEffect transition="in" filter="fade">
+                          <p:cBhvr>
+                            <p:cTn id="105" dur="500"/>
+                            <p:tgtEl>
+                              <p:spTgt spid="386"/>
+                            </p:tgtEl>
+                          </p:cBhvr>
+                        </p:animEffect>
+                      </p:childTnLst>
+                    </p:cTn>
+                  </p:par>
+                </p:childTnLst>
+              </p:cTn>
+              <p:prevCondLst>
+                <p:cond evt="onPrev" delay="0">
+                  <p:tgtEl>
+                    <p:sldTgt/>
+                  </p:tgtEl>
+                </p:cond>
+              </p:prevCondLst>
+              <p:nextCondLst>
+                <p:cond evt="onNext" delay="0">
+                  <p:tgtEl>
+                    <p:sldTgt/>
+                  </p:tgtEl>
+                </p:cond>
+              </p:nextCondLst>
+            </p:seq>
+          </p:childTnLst>
+        </p:cTn>
+      </p:par>
+    </p:tnLst>
+  </p:timing>
 </p:sld>
 </file>
 
@@ -33299,6 +35066,249 @@
   <p:clrMapOvr>
     <a:masterClrMapping/>
   </p:clrMapOvr>
+  <p:transition spd="med" advClick="1">
+    <p:wipe dir="l"/>
+  </p:transition>
+  <p:timing>
+    <p:tnLst>
+      <p:par>
+        <p:cTn id="1" dur="indefinite" restart="never" nodeType="tmRoot">
+          <p:childTnLst>
+            <p:seq concurrent="1" nextAc="seek">
+              <p:cTn id="2" dur="indefinite" nodeType="mainSeq">
+                <p:childTnLst>
+                  <p:par>
+                    <p:cTn id="3" presetID="10" presetClass="entr" presetSubtype="0" fill="hold" nodeType="afterPrev">
+                      <p:stCondLst>
+                        <p:cond delay="0"/>
+                      </p:stCondLst>
+                      <p:childTnLst>
+                        <p:set>
+                          <p:cBhvr>
+                            <p:cTn id="4" dur="1" fill="hold">
+                              <p:stCondLst>
+                                <p:cond delay="0"/>
+                              </p:stCondLst>
+                            </p:cTn>
+                            <p:tgtEl>
+                              <p:spTgt spid="393"/>
+                            </p:tgtEl>
+                            <p:attrNameLst>
+                              <p:attrName>style.visibility</p:attrName>
+                            </p:attrNameLst>
+                          </p:cBhvr>
+                          <p:to>
+                            <p:strVal val="visible"/>
+                          </p:to>
+                        </p:set>
+                        <p:animEffect transition="in" filter="fade">
+                          <p:cBhvr>
+                            <p:cTn id="100" dur="500"/>
+                            <p:tgtEl>
+                              <p:spTgt spid="393"/>
+                            </p:tgtEl>
+                          </p:cBhvr>
+                        </p:animEffect>
+                      </p:childTnLst>
+                    </p:cTn>
+                  </p:par>
+                  <p:par>
+                    <p:cTn id="5" presetID="10" presetClass="entr" presetSubtype="0" fill="hold" nodeType="afterPrev">
+                      <p:stCondLst>
+                        <p:cond delay="300"/>
+                      </p:stCondLst>
+                      <p:childTnLst>
+                        <p:set>
+                          <p:cBhvr>
+                            <p:cTn id="6" dur="1" fill="hold">
+                              <p:stCondLst>
+                                <p:cond delay="0"/>
+                              </p:stCondLst>
+                            </p:cTn>
+                            <p:tgtEl>
+                              <p:spTgt spid="394"/>
+                            </p:tgtEl>
+                            <p:attrNameLst>
+                              <p:attrName>style.visibility</p:attrName>
+                            </p:attrNameLst>
+                          </p:cBhvr>
+                          <p:to>
+                            <p:strVal val="visible"/>
+                          </p:to>
+                        </p:set>
+                        <p:animEffect transition="in" filter="fade">
+                          <p:cBhvr>
+                            <p:cTn id="101" dur="500"/>
+                            <p:tgtEl>
+                              <p:spTgt spid="394"/>
+                            </p:tgtEl>
+                          </p:cBhvr>
+                        </p:animEffect>
+                      </p:childTnLst>
+                    </p:cTn>
+                  </p:par>
+                  <p:par>
+                    <p:cTn id="7" presetID="10" presetClass="entr" presetSubtype="0" fill="hold" nodeType="afterPrev">
+                      <p:stCondLst>
+                        <p:cond delay="600"/>
+                      </p:stCondLst>
+                      <p:childTnLst>
+                        <p:set>
+                          <p:cBhvr>
+                            <p:cTn id="8" dur="1" fill="hold">
+                              <p:stCondLst>
+                                <p:cond delay="0"/>
+                              </p:stCondLst>
+                            </p:cTn>
+                            <p:tgtEl>
+                              <p:spTgt spid="395"/>
+                            </p:tgtEl>
+                            <p:attrNameLst>
+                              <p:attrName>style.visibility</p:attrName>
+                            </p:attrNameLst>
+                          </p:cBhvr>
+                          <p:to>
+                            <p:strVal val="visible"/>
+                          </p:to>
+                        </p:set>
+                        <p:animEffect transition="in" filter="fade">
+                          <p:cBhvr>
+                            <p:cTn id="102" dur="500"/>
+                            <p:tgtEl>
+                              <p:spTgt spid="395"/>
+                            </p:tgtEl>
+                          </p:cBhvr>
+                        </p:animEffect>
+                      </p:childTnLst>
+                    </p:cTn>
+                  </p:par>
+                  <p:par>
+                    <p:cTn id="9" presetID="10" presetClass="entr" presetSubtype="0" fill="hold" nodeType="afterPrev">
+                      <p:stCondLst>
+                        <p:cond delay="900"/>
+                      </p:stCondLst>
+                      <p:childTnLst>
+                        <p:set>
+                          <p:cBhvr>
+                            <p:cTn id="10" dur="1" fill="hold">
+                              <p:stCondLst>
+                                <p:cond delay="0"/>
+                              </p:stCondLst>
+                            </p:cTn>
+                            <p:tgtEl>
+                              <p:spTgt spid="396"/>
+                            </p:tgtEl>
+                            <p:attrNameLst>
+                              <p:attrName>style.visibility</p:attrName>
+                            </p:attrNameLst>
+                          </p:cBhvr>
+                          <p:to>
+                            <p:strVal val="visible"/>
+                          </p:to>
+                        </p:set>
+                        <p:animEffect transition="in" filter="fade">
+                          <p:cBhvr>
+                            <p:cTn id="103" dur="500"/>
+                            <p:tgtEl>
+                              <p:spTgt spid="396"/>
+                            </p:tgtEl>
+                          </p:cBhvr>
+                        </p:animEffect>
+                      </p:childTnLst>
+                    </p:cTn>
+                  </p:par>
+                  <p:par>
+                    <p:cTn id="11" presetID="10" presetClass="entr" presetSubtype="0" fill="hold" nodeType="afterPrev">
+                      <p:stCondLst>
+                        <p:cond delay="1200"/>
+                      </p:stCondLst>
+                      <p:childTnLst>
+                        <p:set>
+                          <p:cBhvr>
+                            <p:cTn id="12" dur="1" fill="hold">
+                              <p:stCondLst>
+                                <p:cond delay="0"/>
+                              </p:stCondLst>
+                            </p:cTn>
+                            <p:tgtEl>
+                              <p:spTgt spid="397"/>
+                            </p:tgtEl>
+                            <p:attrNameLst>
+                              <p:attrName>style.visibility</p:attrName>
+                            </p:attrNameLst>
+                          </p:cBhvr>
+                          <p:to>
+                            <p:strVal val="visible"/>
+                          </p:to>
+                        </p:set>
+                        <p:animEffect transition="in" filter="fade">
+                          <p:cBhvr>
+                            <p:cTn id="104" dur="500"/>
+                            <p:tgtEl>
+                              <p:spTgt spid="397"/>
+                            </p:tgtEl>
+                          </p:cBhvr>
+                        </p:animEffect>
+                      </p:childTnLst>
+                    </p:cTn>
+                  </p:par>
+                  <p:par>
+                    <p:cTn id="13" presetID="10" presetClass="entr" presetSubtype="0" fill="hold" nodeType="afterPrev">
+                      <p:stCondLst>
+                        <p:cond delay="1500"/>
+                      </p:stCondLst>
+                      <p:childTnLst>
+                        <p:set>
+                          <p:cBhvr>
+                            <p:cTn id="14" dur="1" fill="hold">
+                              <p:stCondLst>
+                                <p:cond delay="0"/>
+                              </p:stCondLst>
+                            </p:cTn>
+                            <p:tgtEl>
+                              <p:spTgt spid="398"/>
+                            </p:tgtEl>
+                            <p:attrNameLst>
+                              <p:attrName>style.visibility</p:attrName>
+                            </p:attrNameLst>
+                          </p:cBhvr>
+                          <p:to>
+                            <p:strVal val="visible"/>
+                          </p:to>
+                        </p:set>
+                        <p:animEffect transition="in" filter="fade">
+                          <p:cBhvr>
+                            <p:cTn id="105" dur="500"/>
+                            <p:tgtEl>
+                              <p:spTgt spid="398"/>
+                            </p:tgtEl>
+                          </p:cBhvr>
+                        </p:animEffect>
+                      </p:childTnLst>
+                    </p:cTn>
+                  </p:par>
+                </p:childTnLst>
+              </p:cTn>
+              <p:prevCondLst>
+                <p:cond evt="onPrev" delay="0">
+                  <p:tgtEl>
+                    <p:sldTgt/>
+                  </p:tgtEl>
+                </p:cond>
+              </p:prevCondLst>
+              <p:nextCondLst>
+                <p:cond evt="onNext" delay="0">
+                  <p:tgtEl>
+                    <p:sldTgt/>
+                  </p:tgtEl>
+                </p:cond>
+              </p:nextCondLst>
+            </p:seq>
+          </p:childTnLst>
+        </p:cTn>
+      </p:par>
+    </p:tnLst>
+  </p:timing>
 </p:sld>
 </file>
 
@@ -34219,6 +36229,249 @@
   <p:clrMapOvr>
     <a:masterClrMapping/>
   </p:clrMapOvr>
+  <p:transition spd="med" advClick="1">
+    <p:fade/>
+  </p:transition>
+  <p:timing>
+    <p:tnLst>
+      <p:par>
+        <p:cTn id="1" dur="indefinite" restart="never" nodeType="tmRoot">
+          <p:childTnLst>
+            <p:seq concurrent="1" nextAc="seek">
+              <p:cTn id="2" dur="indefinite" nodeType="mainSeq">
+                <p:childTnLst>
+                  <p:par>
+                    <p:cTn id="3" presetID="10" presetClass="entr" presetSubtype="0" fill="hold" nodeType="afterPrev">
+                      <p:stCondLst>
+                        <p:cond delay="0"/>
+                      </p:stCondLst>
+                      <p:childTnLst>
+                        <p:set>
+                          <p:cBhvr>
+                            <p:cTn id="4" dur="1" fill="hold">
+                              <p:stCondLst>
+                                <p:cond delay="0"/>
+                              </p:stCondLst>
+                            </p:cTn>
+                            <p:tgtEl>
+                              <p:spTgt spid="405"/>
+                            </p:tgtEl>
+                            <p:attrNameLst>
+                              <p:attrName>style.visibility</p:attrName>
+                            </p:attrNameLst>
+                          </p:cBhvr>
+                          <p:to>
+                            <p:strVal val="visible"/>
+                          </p:to>
+                        </p:set>
+                        <p:animEffect transition="in" filter="fade">
+                          <p:cBhvr>
+                            <p:cTn id="100" dur="500"/>
+                            <p:tgtEl>
+                              <p:spTgt spid="405"/>
+                            </p:tgtEl>
+                          </p:cBhvr>
+                        </p:animEffect>
+                      </p:childTnLst>
+                    </p:cTn>
+                  </p:par>
+                  <p:par>
+                    <p:cTn id="5" presetID="10" presetClass="entr" presetSubtype="0" fill="hold" nodeType="afterPrev">
+                      <p:stCondLst>
+                        <p:cond delay="300"/>
+                      </p:stCondLst>
+                      <p:childTnLst>
+                        <p:set>
+                          <p:cBhvr>
+                            <p:cTn id="6" dur="1" fill="hold">
+                              <p:stCondLst>
+                                <p:cond delay="0"/>
+                              </p:stCondLst>
+                            </p:cTn>
+                            <p:tgtEl>
+                              <p:spTgt spid="406"/>
+                            </p:tgtEl>
+                            <p:attrNameLst>
+                              <p:attrName>style.visibility</p:attrName>
+                            </p:attrNameLst>
+                          </p:cBhvr>
+                          <p:to>
+                            <p:strVal val="visible"/>
+                          </p:to>
+                        </p:set>
+                        <p:animEffect transition="in" filter="fade">
+                          <p:cBhvr>
+                            <p:cTn id="101" dur="500"/>
+                            <p:tgtEl>
+                              <p:spTgt spid="406"/>
+                            </p:tgtEl>
+                          </p:cBhvr>
+                        </p:animEffect>
+                      </p:childTnLst>
+                    </p:cTn>
+                  </p:par>
+                  <p:par>
+                    <p:cTn id="7" presetID="10" presetClass="entr" presetSubtype="0" fill="hold" nodeType="afterPrev">
+                      <p:stCondLst>
+                        <p:cond delay="600"/>
+                      </p:stCondLst>
+                      <p:childTnLst>
+                        <p:set>
+                          <p:cBhvr>
+                            <p:cTn id="8" dur="1" fill="hold">
+                              <p:stCondLst>
+                                <p:cond delay="0"/>
+                              </p:stCondLst>
+                            </p:cTn>
+                            <p:tgtEl>
+                              <p:spTgt spid="407"/>
+                            </p:tgtEl>
+                            <p:attrNameLst>
+                              <p:attrName>style.visibility</p:attrName>
+                            </p:attrNameLst>
+                          </p:cBhvr>
+                          <p:to>
+                            <p:strVal val="visible"/>
+                          </p:to>
+                        </p:set>
+                        <p:animEffect transition="in" filter="fade">
+                          <p:cBhvr>
+                            <p:cTn id="102" dur="500"/>
+                            <p:tgtEl>
+                              <p:spTgt spid="407"/>
+                            </p:tgtEl>
+                          </p:cBhvr>
+                        </p:animEffect>
+                      </p:childTnLst>
+                    </p:cTn>
+                  </p:par>
+                  <p:par>
+                    <p:cTn id="9" presetID="10" presetClass="entr" presetSubtype="0" fill="hold" nodeType="afterPrev">
+                      <p:stCondLst>
+                        <p:cond delay="900"/>
+                      </p:stCondLst>
+                      <p:childTnLst>
+                        <p:set>
+                          <p:cBhvr>
+                            <p:cTn id="10" dur="1" fill="hold">
+                              <p:stCondLst>
+                                <p:cond delay="0"/>
+                              </p:stCondLst>
+                            </p:cTn>
+                            <p:tgtEl>
+                              <p:spTgt spid="408"/>
+                            </p:tgtEl>
+                            <p:attrNameLst>
+                              <p:attrName>style.visibility</p:attrName>
+                            </p:attrNameLst>
+                          </p:cBhvr>
+                          <p:to>
+                            <p:strVal val="visible"/>
+                          </p:to>
+                        </p:set>
+                        <p:animEffect transition="in" filter="fade">
+                          <p:cBhvr>
+                            <p:cTn id="103" dur="500"/>
+                            <p:tgtEl>
+                              <p:spTgt spid="408"/>
+                            </p:tgtEl>
+                          </p:cBhvr>
+                        </p:animEffect>
+                      </p:childTnLst>
+                    </p:cTn>
+                  </p:par>
+                  <p:par>
+                    <p:cTn id="11" presetID="10" presetClass="entr" presetSubtype="0" fill="hold" nodeType="afterPrev">
+                      <p:stCondLst>
+                        <p:cond delay="1200"/>
+                      </p:stCondLst>
+                      <p:childTnLst>
+                        <p:set>
+                          <p:cBhvr>
+                            <p:cTn id="12" dur="1" fill="hold">
+                              <p:stCondLst>
+                                <p:cond delay="0"/>
+                              </p:stCondLst>
+                            </p:cTn>
+                            <p:tgtEl>
+                              <p:spTgt spid="409"/>
+                            </p:tgtEl>
+                            <p:attrNameLst>
+                              <p:attrName>style.visibility</p:attrName>
+                            </p:attrNameLst>
+                          </p:cBhvr>
+                          <p:to>
+                            <p:strVal val="visible"/>
+                          </p:to>
+                        </p:set>
+                        <p:animEffect transition="in" filter="fade">
+                          <p:cBhvr>
+                            <p:cTn id="104" dur="500"/>
+                            <p:tgtEl>
+                              <p:spTgt spid="409"/>
+                            </p:tgtEl>
+                          </p:cBhvr>
+                        </p:animEffect>
+                      </p:childTnLst>
+                    </p:cTn>
+                  </p:par>
+                  <p:par>
+                    <p:cTn id="13" presetID="10" presetClass="entr" presetSubtype="0" fill="hold" nodeType="afterPrev">
+                      <p:stCondLst>
+                        <p:cond delay="1500"/>
+                      </p:stCondLst>
+                      <p:childTnLst>
+                        <p:set>
+                          <p:cBhvr>
+                            <p:cTn id="14" dur="1" fill="hold">
+                              <p:stCondLst>
+                                <p:cond delay="0"/>
+                              </p:stCondLst>
+                            </p:cTn>
+                            <p:tgtEl>
+                              <p:spTgt spid="410"/>
+                            </p:tgtEl>
+                            <p:attrNameLst>
+                              <p:attrName>style.visibility</p:attrName>
+                            </p:attrNameLst>
+                          </p:cBhvr>
+                          <p:to>
+                            <p:strVal val="visible"/>
+                          </p:to>
+                        </p:set>
+                        <p:animEffect transition="in" filter="fade">
+                          <p:cBhvr>
+                            <p:cTn id="105" dur="500"/>
+                            <p:tgtEl>
+                              <p:spTgt spid="410"/>
+                            </p:tgtEl>
+                          </p:cBhvr>
+                        </p:animEffect>
+                      </p:childTnLst>
+                    </p:cTn>
+                  </p:par>
+                </p:childTnLst>
+              </p:cTn>
+              <p:prevCondLst>
+                <p:cond evt="onPrev" delay="0">
+                  <p:tgtEl>
+                    <p:sldTgt/>
+                  </p:tgtEl>
+                </p:cond>
+              </p:prevCondLst>
+              <p:nextCondLst>
+                <p:cond evt="onNext" delay="0">
+                  <p:tgtEl>
+                    <p:sldTgt/>
+                  </p:tgtEl>
+                </p:cond>
+              </p:nextCondLst>
+            </p:seq>
+          </p:childTnLst>
+        </p:cTn>
+      </p:par>
+    </p:tnLst>
+  </p:timing>
 </p:sld>
 </file>
 
@@ -34674,6 +36927,214 @@
   <p:clrMapOvr>
     <a:masterClrMapping/>
   </p:clrMapOvr>
+  <p:transition spd="med" advClick="1">
+    <p:fade/>
+  </p:transition>
+  <p:timing>
+    <p:tnLst>
+      <p:par>
+        <p:cTn id="1" dur="indefinite" restart="never" nodeType="tmRoot">
+          <p:childTnLst>
+            <p:seq concurrent="1" nextAc="seek">
+              <p:cTn id="2" dur="indefinite" nodeType="mainSeq">
+                <p:childTnLst>
+                  <p:par>
+                    <p:cTn id="3" presetID="10" presetClass="entr" presetSubtype="0" fill="hold" nodeType="afterPrev">
+                      <p:stCondLst>
+                        <p:cond delay="0"/>
+                      </p:stCondLst>
+                      <p:childTnLst>
+                        <p:set>
+                          <p:cBhvr>
+                            <p:cTn id="4" dur="1" fill="hold">
+                              <p:stCondLst>
+                                <p:cond delay="0"/>
+                              </p:stCondLst>
+                            </p:cTn>
+                            <p:tgtEl>
+                              <p:spTgt spid="106"/>
+                            </p:tgtEl>
+                            <p:attrNameLst>
+                              <p:attrName>style.visibility</p:attrName>
+                            </p:attrNameLst>
+                          </p:cBhvr>
+                          <p:to>
+                            <p:strVal val="visible"/>
+                          </p:to>
+                        </p:set>
+                        <p:animEffect transition="in" filter="fade">
+                          <p:cBhvr>
+                            <p:cTn id="100" dur="500"/>
+                            <p:tgtEl>
+                              <p:spTgt spid="106"/>
+                            </p:tgtEl>
+                          </p:cBhvr>
+                        </p:animEffect>
+                      </p:childTnLst>
+                    </p:cTn>
+                  </p:par>
+                  <p:par>
+                    <p:cTn id="5" presetID="10" presetClass="entr" presetSubtype="0" fill="hold" nodeType="afterPrev">
+                      <p:stCondLst>
+                        <p:cond delay="300"/>
+                      </p:stCondLst>
+                      <p:childTnLst>
+                        <p:set>
+                          <p:cBhvr>
+                            <p:cTn id="6" dur="1" fill="hold">
+                              <p:stCondLst>
+                                <p:cond delay="0"/>
+                              </p:stCondLst>
+                            </p:cTn>
+                            <p:tgtEl>
+                              <p:spTgt spid="107"/>
+                            </p:tgtEl>
+                            <p:attrNameLst>
+                              <p:attrName>style.visibility</p:attrName>
+                            </p:attrNameLst>
+                          </p:cBhvr>
+                          <p:to>
+                            <p:strVal val="visible"/>
+                          </p:to>
+                        </p:set>
+                        <p:animEffect transition="in" filter="fade">
+                          <p:cBhvr>
+                            <p:cTn id="101" dur="500"/>
+                            <p:tgtEl>
+                              <p:spTgt spid="107"/>
+                            </p:tgtEl>
+                          </p:cBhvr>
+                        </p:animEffect>
+                      </p:childTnLst>
+                    </p:cTn>
+                  </p:par>
+                  <p:par>
+                    <p:cTn id="7" presetID="10" presetClass="entr" presetSubtype="0" fill="hold" nodeType="afterPrev">
+                      <p:stCondLst>
+                        <p:cond delay="600"/>
+                      </p:stCondLst>
+                      <p:childTnLst>
+                        <p:set>
+                          <p:cBhvr>
+                            <p:cTn id="8" dur="1" fill="hold">
+                              <p:stCondLst>
+                                <p:cond delay="0"/>
+                              </p:stCondLst>
+                            </p:cTn>
+                            <p:tgtEl>
+                              <p:spTgt spid="108"/>
+                            </p:tgtEl>
+                            <p:attrNameLst>
+                              <p:attrName>style.visibility</p:attrName>
+                            </p:attrNameLst>
+                          </p:cBhvr>
+                          <p:to>
+                            <p:strVal val="visible"/>
+                          </p:to>
+                        </p:set>
+                        <p:animEffect transition="in" filter="fade">
+                          <p:cBhvr>
+                            <p:cTn id="102" dur="500"/>
+                            <p:tgtEl>
+                              <p:spTgt spid="108"/>
+                            </p:tgtEl>
+                          </p:cBhvr>
+                        </p:animEffect>
+                      </p:childTnLst>
+                    </p:cTn>
+                  </p:par>
+                  <p:par>
+                    <p:cTn id="9" presetID="10" presetClass="entr" presetSubtype="0" fill="hold" nodeType="afterPrev">
+                      <p:stCondLst>
+                        <p:cond delay="900"/>
+                      </p:stCondLst>
+                      <p:childTnLst>
+                        <p:set>
+                          <p:cBhvr>
+                            <p:cTn id="10" dur="1" fill="hold">
+                              <p:stCondLst>
+                                <p:cond delay="0"/>
+                              </p:stCondLst>
+                            </p:cTn>
+                            <p:tgtEl>
+                              <p:spTgt spid="109"/>
+                            </p:tgtEl>
+                            <p:attrNameLst>
+                              <p:attrName>style.visibility</p:attrName>
+                            </p:attrNameLst>
+                          </p:cBhvr>
+                          <p:to>
+                            <p:strVal val="visible"/>
+                          </p:to>
+                        </p:set>
+                        <p:animEffect transition="in" filter="fade">
+                          <p:cBhvr>
+                            <p:cTn id="103" dur="500"/>
+                            <p:tgtEl>
+                              <p:spTgt spid="109"/>
+                            </p:tgtEl>
+                          </p:cBhvr>
+                        </p:animEffect>
+                      </p:childTnLst>
+                    </p:cTn>
+                  </p:par>
+                  <p:par>
+                    <p:cTn id="11" presetID="10" presetClass="entr" presetSubtype="0" fill="hold" nodeType="afterPrev">
+                      <p:stCondLst>
+                        <p:cond delay="1200"/>
+                      </p:stCondLst>
+                      <p:childTnLst>
+                        <p:set>
+                          <p:cBhvr>
+                            <p:cTn id="12" dur="1" fill="hold">
+                              <p:stCondLst>
+                                <p:cond delay="0"/>
+                              </p:stCondLst>
+                            </p:cTn>
+                            <p:tgtEl>
+                              <p:spTgt spid="110"/>
+                            </p:tgtEl>
+                            <p:attrNameLst>
+                              <p:attrName>style.visibility</p:attrName>
+                            </p:attrNameLst>
+                          </p:cBhvr>
+                          <p:to>
+                            <p:strVal val="visible"/>
+                          </p:to>
+                        </p:set>
+                        <p:animEffect transition="in" filter="fade">
+                          <p:cBhvr>
+                            <p:cTn id="104" dur="500"/>
+                            <p:tgtEl>
+                              <p:spTgt spid="110"/>
+                            </p:tgtEl>
+                          </p:cBhvr>
+                        </p:animEffect>
+                      </p:childTnLst>
+                    </p:cTn>
+                  </p:par>
+                </p:childTnLst>
+              </p:cTn>
+              <p:prevCondLst>
+                <p:cond evt="onPrev" delay="0">
+                  <p:tgtEl>
+                    <p:sldTgt/>
+                  </p:tgtEl>
+                </p:cond>
+              </p:prevCondLst>
+              <p:nextCondLst>
+                <p:cond evt="onNext" delay="0">
+                  <p:tgtEl>
+                    <p:sldTgt/>
+                  </p:tgtEl>
+                </p:cond>
+              </p:nextCondLst>
+            </p:seq>
+          </p:childTnLst>
+        </p:cTn>
+      </p:par>
+    </p:tnLst>
+  </p:timing>
 </p:sld>
 </file>
 
@@ -35639,6 +38100,249 @@
   <p:clrMapOvr>
     <a:masterClrMapping/>
   </p:clrMapOvr>
+  <p:transition spd="med" advClick="1">
+    <p:wipe dir="l"/>
+  </p:transition>
+  <p:timing>
+    <p:tnLst>
+      <p:par>
+        <p:cTn id="1" dur="indefinite" restart="never" nodeType="tmRoot">
+          <p:childTnLst>
+            <p:seq concurrent="1" nextAc="seek">
+              <p:cTn id="2" dur="indefinite" nodeType="mainSeq">
+                <p:childTnLst>
+                  <p:par>
+                    <p:cTn id="3" presetID="10" presetClass="entr" presetSubtype="0" fill="hold" nodeType="afterPrev">
+                      <p:stCondLst>
+                        <p:cond delay="0"/>
+                      </p:stCondLst>
+                      <p:childTnLst>
+                        <p:set>
+                          <p:cBhvr>
+                            <p:cTn id="4" dur="1" fill="hold">
+                              <p:stCondLst>
+                                <p:cond delay="0"/>
+                              </p:stCondLst>
+                            </p:cTn>
+                            <p:tgtEl>
+                              <p:spTgt spid="429"/>
+                            </p:tgtEl>
+                            <p:attrNameLst>
+                              <p:attrName>style.visibility</p:attrName>
+                            </p:attrNameLst>
+                          </p:cBhvr>
+                          <p:to>
+                            <p:strVal val="visible"/>
+                          </p:to>
+                        </p:set>
+                        <p:animEffect transition="in" filter="fade">
+                          <p:cBhvr>
+                            <p:cTn id="100" dur="500"/>
+                            <p:tgtEl>
+                              <p:spTgt spid="429"/>
+                            </p:tgtEl>
+                          </p:cBhvr>
+                        </p:animEffect>
+                      </p:childTnLst>
+                    </p:cTn>
+                  </p:par>
+                  <p:par>
+                    <p:cTn id="5" presetID="10" presetClass="entr" presetSubtype="0" fill="hold" nodeType="afterPrev">
+                      <p:stCondLst>
+                        <p:cond delay="300"/>
+                      </p:stCondLst>
+                      <p:childTnLst>
+                        <p:set>
+                          <p:cBhvr>
+                            <p:cTn id="6" dur="1" fill="hold">
+                              <p:stCondLst>
+                                <p:cond delay="0"/>
+                              </p:stCondLst>
+                            </p:cTn>
+                            <p:tgtEl>
+                              <p:spTgt spid="430"/>
+                            </p:tgtEl>
+                            <p:attrNameLst>
+                              <p:attrName>style.visibility</p:attrName>
+                            </p:attrNameLst>
+                          </p:cBhvr>
+                          <p:to>
+                            <p:strVal val="visible"/>
+                          </p:to>
+                        </p:set>
+                        <p:animEffect transition="in" filter="fade">
+                          <p:cBhvr>
+                            <p:cTn id="101" dur="500"/>
+                            <p:tgtEl>
+                              <p:spTgt spid="430"/>
+                            </p:tgtEl>
+                          </p:cBhvr>
+                        </p:animEffect>
+                      </p:childTnLst>
+                    </p:cTn>
+                  </p:par>
+                  <p:par>
+                    <p:cTn id="7" presetID="10" presetClass="entr" presetSubtype="0" fill="hold" nodeType="afterPrev">
+                      <p:stCondLst>
+                        <p:cond delay="600"/>
+                      </p:stCondLst>
+                      <p:childTnLst>
+                        <p:set>
+                          <p:cBhvr>
+                            <p:cTn id="8" dur="1" fill="hold">
+                              <p:stCondLst>
+                                <p:cond delay="0"/>
+                              </p:stCondLst>
+                            </p:cTn>
+                            <p:tgtEl>
+                              <p:spTgt spid="431"/>
+                            </p:tgtEl>
+                            <p:attrNameLst>
+                              <p:attrName>style.visibility</p:attrName>
+                            </p:attrNameLst>
+                          </p:cBhvr>
+                          <p:to>
+                            <p:strVal val="visible"/>
+                          </p:to>
+                        </p:set>
+                        <p:animEffect transition="in" filter="fade">
+                          <p:cBhvr>
+                            <p:cTn id="102" dur="500"/>
+                            <p:tgtEl>
+                              <p:spTgt spid="431"/>
+                            </p:tgtEl>
+                          </p:cBhvr>
+                        </p:animEffect>
+                      </p:childTnLst>
+                    </p:cTn>
+                  </p:par>
+                  <p:par>
+                    <p:cTn id="9" presetID="10" presetClass="entr" presetSubtype="0" fill="hold" nodeType="afterPrev">
+                      <p:stCondLst>
+                        <p:cond delay="900"/>
+                      </p:stCondLst>
+                      <p:childTnLst>
+                        <p:set>
+                          <p:cBhvr>
+                            <p:cTn id="10" dur="1" fill="hold">
+                              <p:stCondLst>
+                                <p:cond delay="0"/>
+                              </p:stCondLst>
+                            </p:cTn>
+                            <p:tgtEl>
+                              <p:spTgt spid="432"/>
+                            </p:tgtEl>
+                            <p:attrNameLst>
+                              <p:attrName>style.visibility</p:attrName>
+                            </p:attrNameLst>
+                          </p:cBhvr>
+                          <p:to>
+                            <p:strVal val="visible"/>
+                          </p:to>
+                        </p:set>
+                        <p:animEffect transition="in" filter="fade">
+                          <p:cBhvr>
+                            <p:cTn id="103" dur="500"/>
+                            <p:tgtEl>
+                              <p:spTgt spid="432"/>
+                            </p:tgtEl>
+                          </p:cBhvr>
+                        </p:animEffect>
+                      </p:childTnLst>
+                    </p:cTn>
+                  </p:par>
+                  <p:par>
+                    <p:cTn id="11" presetID="10" presetClass="entr" presetSubtype="0" fill="hold" nodeType="afterPrev">
+                      <p:stCondLst>
+                        <p:cond delay="1200"/>
+                      </p:stCondLst>
+                      <p:childTnLst>
+                        <p:set>
+                          <p:cBhvr>
+                            <p:cTn id="12" dur="1" fill="hold">
+                              <p:stCondLst>
+                                <p:cond delay="0"/>
+                              </p:stCondLst>
+                            </p:cTn>
+                            <p:tgtEl>
+                              <p:spTgt spid="433"/>
+                            </p:tgtEl>
+                            <p:attrNameLst>
+                              <p:attrName>style.visibility</p:attrName>
+                            </p:attrNameLst>
+                          </p:cBhvr>
+                          <p:to>
+                            <p:strVal val="visible"/>
+                          </p:to>
+                        </p:set>
+                        <p:animEffect transition="in" filter="fade">
+                          <p:cBhvr>
+                            <p:cTn id="104" dur="500"/>
+                            <p:tgtEl>
+                              <p:spTgt spid="433"/>
+                            </p:tgtEl>
+                          </p:cBhvr>
+                        </p:animEffect>
+                      </p:childTnLst>
+                    </p:cTn>
+                  </p:par>
+                  <p:par>
+                    <p:cTn id="13" presetID="10" presetClass="entr" presetSubtype="0" fill="hold" nodeType="afterPrev">
+                      <p:stCondLst>
+                        <p:cond delay="1500"/>
+                      </p:stCondLst>
+                      <p:childTnLst>
+                        <p:set>
+                          <p:cBhvr>
+                            <p:cTn id="14" dur="1" fill="hold">
+                              <p:stCondLst>
+                                <p:cond delay="0"/>
+                              </p:stCondLst>
+                            </p:cTn>
+                            <p:tgtEl>
+                              <p:spTgt spid="434"/>
+                            </p:tgtEl>
+                            <p:attrNameLst>
+                              <p:attrName>style.visibility</p:attrName>
+                            </p:attrNameLst>
+                          </p:cBhvr>
+                          <p:to>
+                            <p:strVal val="visible"/>
+                          </p:to>
+                        </p:set>
+                        <p:animEffect transition="in" filter="fade">
+                          <p:cBhvr>
+                            <p:cTn id="105" dur="500"/>
+                            <p:tgtEl>
+                              <p:spTgt spid="434"/>
+                            </p:tgtEl>
+                          </p:cBhvr>
+                        </p:animEffect>
+                      </p:childTnLst>
+                    </p:cTn>
+                  </p:par>
+                </p:childTnLst>
+              </p:cTn>
+              <p:prevCondLst>
+                <p:cond evt="onPrev" delay="0">
+                  <p:tgtEl>
+                    <p:sldTgt/>
+                  </p:tgtEl>
+                </p:cond>
+              </p:prevCondLst>
+              <p:nextCondLst>
+                <p:cond evt="onNext" delay="0">
+                  <p:tgtEl>
+                    <p:sldTgt/>
+                  </p:tgtEl>
+                </p:cond>
+              </p:nextCondLst>
+            </p:seq>
+          </p:childTnLst>
+        </p:cTn>
+      </p:par>
+    </p:tnLst>
+  </p:timing>
 </p:sld>
 </file>
 
@@ -36599,6 +39303,249 @@
   <p:clrMapOvr>
     <a:masterClrMapping/>
   </p:clrMapOvr>
+  <p:transition spd="med" advClick="1">
+    <p:wipe dir="l"/>
+  </p:transition>
+  <p:timing>
+    <p:tnLst>
+      <p:par>
+        <p:cTn id="1" dur="indefinite" restart="never" nodeType="tmRoot">
+          <p:childTnLst>
+            <p:seq concurrent="1" nextAc="seek">
+              <p:cTn id="2" dur="indefinite" nodeType="mainSeq">
+                <p:childTnLst>
+                  <p:par>
+                    <p:cTn id="3" presetID="10" presetClass="entr" presetSubtype="0" fill="hold" nodeType="afterPrev">
+                      <p:stCondLst>
+                        <p:cond delay="0"/>
+                      </p:stCondLst>
+                      <p:childTnLst>
+                        <p:set>
+                          <p:cBhvr>
+                            <p:cTn id="4" dur="1" fill="hold">
+                              <p:stCondLst>
+                                <p:cond delay="0"/>
+                              </p:stCondLst>
+                            </p:cTn>
+                            <p:tgtEl>
+                              <p:spTgt spid="442"/>
+                            </p:tgtEl>
+                            <p:attrNameLst>
+                              <p:attrName>style.visibility</p:attrName>
+                            </p:attrNameLst>
+                          </p:cBhvr>
+                          <p:to>
+                            <p:strVal val="visible"/>
+                          </p:to>
+                        </p:set>
+                        <p:animEffect transition="in" filter="fade">
+                          <p:cBhvr>
+                            <p:cTn id="100" dur="500"/>
+                            <p:tgtEl>
+                              <p:spTgt spid="442"/>
+                            </p:tgtEl>
+                          </p:cBhvr>
+                        </p:animEffect>
+                      </p:childTnLst>
+                    </p:cTn>
+                  </p:par>
+                  <p:par>
+                    <p:cTn id="5" presetID="10" presetClass="entr" presetSubtype="0" fill="hold" nodeType="afterPrev">
+                      <p:stCondLst>
+                        <p:cond delay="300"/>
+                      </p:stCondLst>
+                      <p:childTnLst>
+                        <p:set>
+                          <p:cBhvr>
+                            <p:cTn id="6" dur="1" fill="hold">
+                              <p:stCondLst>
+                                <p:cond delay="0"/>
+                              </p:stCondLst>
+                            </p:cTn>
+                            <p:tgtEl>
+                              <p:spTgt spid="443"/>
+                            </p:tgtEl>
+                            <p:attrNameLst>
+                              <p:attrName>style.visibility</p:attrName>
+                            </p:attrNameLst>
+                          </p:cBhvr>
+                          <p:to>
+                            <p:strVal val="visible"/>
+                          </p:to>
+                        </p:set>
+                        <p:animEffect transition="in" filter="fade">
+                          <p:cBhvr>
+                            <p:cTn id="101" dur="500"/>
+                            <p:tgtEl>
+                              <p:spTgt spid="443"/>
+                            </p:tgtEl>
+                          </p:cBhvr>
+                        </p:animEffect>
+                      </p:childTnLst>
+                    </p:cTn>
+                  </p:par>
+                  <p:par>
+                    <p:cTn id="7" presetID="10" presetClass="entr" presetSubtype="0" fill="hold" nodeType="afterPrev">
+                      <p:stCondLst>
+                        <p:cond delay="600"/>
+                      </p:stCondLst>
+                      <p:childTnLst>
+                        <p:set>
+                          <p:cBhvr>
+                            <p:cTn id="8" dur="1" fill="hold">
+                              <p:stCondLst>
+                                <p:cond delay="0"/>
+                              </p:stCondLst>
+                            </p:cTn>
+                            <p:tgtEl>
+                              <p:spTgt spid="444"/>
+                            </p:tgtEl>
+                            <p:attrNameLst>
+                              <p:attrName>style.visibility</p:attrName>
+                            </p:attrNameLst>
+                          </p:cBhvr>
+                          <p:to>
+                            <p:strVal val="visible"/>
+                          </p:to>
+                        </p:set>
+                        <p:animEffect transition="in" filter="fade">
+                          <p:cBhvr>
+                            <p:cTn id="102" dur="500"/>
+                            <p:tgtEl>
+                              <p:spTgt spid="444"/>
+                            </p:tgtEl>
+                          </p:cBhvr>
+                        </p:animEffect>
+                      </p:childTnLst>
+                    </p:cTn>
+                  </p:par>
+                  <p:par>
+                    <p:cTn id="9" presetID="10" presetClass="entr" presetSubtype="0" fill="hold" nodeType="afterPrev">
+                      <p:stCondLst>
+                        <p:cond delay="900"/>
+                      </p:stCondLst>
+                      <p:childTnLst>
+                        <p:set>
+                          <p:cBhvr>
+                            <p:cTn id="10" dur="1" fill="hold">
+                              <p:stCondLst>
+                                <p:cond delay="0"/>
+                              </p:stCondLst>
+                            </p:cTn>
+                            <p:tgtEl>
+                              <p:spTgt spid="445"/>
+                            </p:tgtEl>
+                            <p:attrNameLst>
+                              <p:attrName>style.visibility</p:attrName>
+                            </p:attrNameLst>
+                          </p:cBhvr>
+                          <p:to>
+                            <p:strVal val="visible"/>
+                          </p:to>
+                        </p:set>
+                        <p:animEffect transition="in" filter="fade">
+                          <p:cBhvr>
+                            <p:cTn id="103" dur="500"/>
+                            <p:tgtEl>
+                              <p:spTgt spid="445"/>
+                            </p:tgtEl>
+                          </p:cBhvr>
+                        </p:animEffect>
+                      </p:childTnLst>
+                    </p:cTn>
+                  </p:par>
+                  <p:par>
+                    <p:cTn id="11" presetID="10" presetClass="entr" presetSubtype="0" fill="hold" nodeType="afterPrev">
+                      <p:stCondLst>
+                        <p:cond delay="1200"/>
+                      </p:stCondLst>
+                      <p:childTnLst>
+                        <p:set>
+                          <p:cBhvr>
+                            <p:cTn id="12" dur="1" fill="hold">
+                              <p:stCondLst>
+                                <p:cond delay="0"/>
+                              </p:stCondLst>
+                            </p:cTn>
+                            <p:tgtEl>
+                              <p:spTgt spid="446"/>
+                            </p:tgtEl>
+                            <p:attrNameLst>
+                              <p:attrName>style.visibility</p:attrName>
+                            </p:attrNameLst>
+                          </p:cBhvr>
+                          <p:to>
+                            <p:strVal val="visible"/>
+                          </p:to>
+                        </p:set>
+                        <p:animEffect transition="in" filter="fade">
+                          <p:cBhvr>
+                            <p:cTn id="104" dur="500"/>
+                            <p:tgtEl>
+                              <p:spTgt spid="446"/>
+                            </p:tgtEl>
+                          </p:cBhvr>
+                        </p:animEffect>
+                      </p:childTnLst>
+                    </p:cTn>
+                  </p:par>
+                  <p:par>
+                    <p:cTn id="13" presetID="10" presetClass="entr" presetSubtype="0" fill="hold" nodeType="afterPrev">
+                      <p:stCondLst>
+                        <p:cond delay="1500"/>
+                      </p:stCondLst>
+                      <p:childTnLst>
+                        <p:set>
+                          <p:cBhvr>
+                            <p:cTn id="14" dur="1" fill="hold">
+                              <p:stCondLst>
+                                <p:cond delay="0"/>
+                              </p:stCondLst>
+                            </p:cTn>
+                            <p:tgtEl>
+                              <p:spTgt spid="447"/>
+                            </p:tgtEl>
+                            <p:attrNameLst>
+                              <p:attrName>style.visibility</p:attrName>
+                            </p:attrNameLst>
+                          </p:cBhvr>
+                          <p:to>
+                            <p:strVal val="visible"/>
+                          </p:to>
+                        </p:set>
+                        <p:animEffect transition="in" filter="fade">
+                          <p:cBhvr>
+                            <p:cTn id="105" dur="500"/>
+                            <p:tgtEl>
+                              <p:spTgt spid="447"/>
+                            </p:tgtEl>
+                          </p:cBhvr>
+                        </p:animEffect>
+                      </p:childTnLst>
+                    </p:cTn>
+                  </p:par>
+                </p:childTnLst>
+              </p:cTn>
+              <p:prevCondLst>
+                <p:cond evt="onPrev" delay="0">
+                  <p:tgtEl>
+                    <p:sldTgt/>
+                  </p:tgtEl>
+                </p:cond>
+              </p:prevCondLst>
+              <p:nextCondLst>
+                <p:cond evt="onNext" delay="0">
+                  <p:tgtEl>
+                    <p:sldTgt/>
+                  </p:tgtEl>
+                </p:cond>
+              </p:nextCondLst>
+            </p:seq>
+          </p:childTnLst>
+        </p:cTn>
+      </p:par>
+    </p:tnLst>
+  </p:timing>
 </p:sld>
 </file>
 
@@ -37150,6 +40097,249 @@
   <p:clrMapOvr>
     <a:masterClrMapping/>
   </p:clrMapOvr>
+  <p:transition spd="med" advClick="1">
+    <p:wipe dir="l"/>
+  </p:transition>
+  <p:timing>
+    <p:tnLst>
+      <p:par>
+        <p:cTn id="1" dur="indefinite" restart="never" nodeType="tmRoot">
+          <p:childTnLst>
+            <p:seq concurrent="1" nextAc="seek">
+              <p:cTn id="2" dur="indefinite" nodeType="mainSeq">
+                <p:childTnLst>
+                  <p:par>
+                    <p:cTn id="3" presetID="10" presetClass="entr" presetSubtype="0" fill="hold" nodeType="afterPrev">
+                      <p:stCondLst>
+                        <p:cond delay="0"/>
+                      </p:stCondLst>
+                      <p:childTnLst>
+                        <p:set>
+                          <p:cBhvr>
+                            <p:cTn id="4" dur="1" fill="hold">
+                              <p:stCondLst>
+                                <p:cond delay="0"/>
+                              </p:stCondLst>
+                            </p:cTn>
+                            <p:tgtEl>
+                              <p:spTgt spid="455"/>
+                            </p:tgtEl>
+                            <p:attrNameLst>
+                              <p:attrName>style.visibility</p:attrName>
+                            </p:attrNameLst>
+                          </p:cBhvr>
+                          <p:to>
+                            <p:strVal val="visible"/>
+                          </p:to>
+                        </p:set>
+                        <p:animEffect transition="in" filter="fade">
+                          <p:cBhvr>
+                            <p:cTn id="100" dur="500"/>
+                            <p:tgtEl>
+                              <p:spTgt spid="455"/>
+                            </p:tgtEl>
+                          </p:cBhvr>
+                        </p:animEffect>
+                      </p:childTnLst>
+                    </p:cTn>
+                  </p:par>
+                  <p:par>
+                    <p:cTn id="5" presetID="10" presetClass="entr" presetSubtype="0" fill="hold" nodeType="afterPrev">
+                      <p:stCondLst>
+                        <p:cond delay="300"/>
+                      </p:stCondLst>
+                      <p:childTnLst>
+                        <p:set>
+                          <p:cBhvr>
+                            <p:cTn id="6" dur="1" fill="hold">
+                              <p:stCondLst>
+                                <p:cond delay="0"/>
+                              </p:stCondLst>
+                            </p:cTn>
+                            <p:tgtEl>
+                              <p:spTgt spid="456"/>
+                            </p:tgtEl>
+                            <p:attrNameLst>
+                              <p:attrName>style.visibility</p:attrName>
+                            </p:attrNameLst>
+                          </p:cBhvr>
+                          <p:to>
+                            <p:strVal val="visible"/>
+                          </p:to>
+                        </p:set>
+                        <p:animEffect transition="in" filter="fade">
+                          <p:cBhvr>
+                            <p:cTn id="101" dur="500"/>
+                            <p:tgtEl>
+                              <p:spTgt spid="456"/>
+                            </p:tgtEl>
+                          </p:cBhvr>
+                        </p:animEffect>
+                      </p:childTnLst>
+                    </p:cTn>
+                  </p:par>
+                  <p:par>
+                    <p:cTn id="7" presetID="10" presetClass="entr" presetSubtype="0" fill="hold" nodeType="afterPrev">
+                      <p:stCondLst>
+                        <p:cond delay="600"/>
+                      </p:stCondLst>
+                      <p:childTnLst>
+                        <p:set>
+                          <p:cBhvr>
+                            <p:cTn id="8" dur="1" fill="hold">
+                              <p:stCondLst>
+                                <p:cond delay="0"/>
+                              </p:stCondLst>
+                            </p:cTn>
+                            <p:tgtEl>
+                              <p:spTgt spid="457"/>
+                            </p:tgtEl>
+                            <p:attrNameLst>
+                              <p:attrName>style.visibility</p:attrName>
+                            </p:attrNameLst>
+                          </p:cBhvr>
+                          <p:to>
+                            <p:strVal val="visible"/>
+                          </p:to>
+                        </p:set>
+                        <p:animEffect transition="in" filter="fade">
+                          <p:cBhvr>
+                            <p:cTn id="102" dur="500"/>
+                            <p:tgtEl>
+                              <p:spTgt spid="457"/>
+                            </p:tgtEl>
+                          </p:cBhvr>
+                        </p:animEffect>
+                      </p:childTnLst>
+                    </p:cTn>
+                  </p:par>
+                  <p:par>
+                    <p:cTn id="9" presetID="10" presetClass="entr" presetSubtype="0" fill="hold" nodeType="afterPrev">
+                      <p:stCondLst>
+                        <p:cond delay="900"/>
+                      </p:stCondLst>
+                      <p:childTnLst>
+                        <p:set>
+                          <p:cBhvr>
+                            <p:cTn id="10" dur="1" fill="hold">
+                              <p:stCondLst>
+                                <p:cond delay="0"/>
+                              </p:stCondLst>
+                            </p:cTn>
+                            <p:tgtEl>
+                              <p:spTgt spid="458"/>
+                            </p:tgtEl>
+                            <p:attrNameLst>
+                              <p:attrName>style.visibility</p:attrName>
+                            </p:attrNameLst>
+                          </p:cBhvr>
+                          <p:to>
+                            <p:strVal val="visible"/>
+                          </p:to>
+                        </p:set>
+                        <p:animEffect transition="in" filter="fade">
+                          <p:cBhvr>
+                            <p:cTn id="103" dur="500"/>
+                            <p:tgtEl>
+                              <p:spTgt spid="458"/>
+                            </p:tgtEl>
+                          </p:cBhvr>
+                        </p:animEffect>
+                      </p:childTnLst>
+                    </p:cTn>
+                  </p:par>
+                  <p:par>
+                    <p:cTn id="11" presetID="10" presetClass="entr" presetSubtype="0" fill="hold" nodeType="afterPrev">
+                      <p:stCondLst>
+                        <p:cond delay="1200"/>
+                      </p:stCondLst>
+                      <p:childTnLst>
+                        <p:set>
+                          <p:cBhvr>
+                            <p:cTn id="12" dur="1" fill="hold">
+                              <p:stCondLst>
+                                <p:cond delay="0"/>
+                              </p:stCondLst>
+                            </p:cTn>
+                            <p:tgtEl>
+                              <p:spTgt spid="459"/>
+                            </p:tgtEl>
+                            <p:attrNameLst>
+                              <p:attrName>style.visibility</p:attrName>
+                            </p:attrNameLst>
+                          </p:cBhvr>
+                          <p:to>
+                            <p:strVal val="visible"/>
+                          </p:to>
+                        </p:set>
+                        <p:animEffect transition="in" filter="fade">
+                          <p:cBhvr>
+                            <p:cTn id="104" dur="500"/>
+                            <p:tgtEl>
+                              <p:spTgt spid="459"/>
+                            </p:tgtEl>
+                          </p:cBhvr>
+                        </p:animEffect>
+                      </p:childTnLst>
+                    </p:cTn>
+                  </p:par>
+                  <p:par>
+                    <p:cTn id="13" presetID="10" presetClass="entr" presetSubtype="0" fill="hold" nodeType="afterPrev">
+                      <p:stCondLst>
+                        <p:cond delay="1500"/>
+                      </p:stCondLst>
+                      <p:childTnLst>
+                        <p:set>
+                          <p:cBhvr>
+                            <p:cTn id="14" dur="1" fill="hold">
+                              <p:stCondLst>
+                                <p:cond delay="0"/>
+                              </p:stCondLst>
+                            </p:cTn>
+                            <p:tgtEl>
+                              <p:spTgt spid="460"/>
+                            </p:tgtEl>
+                            <p:attrNameLst>
+                              <p:attrName>style.visibility</p:attrName>
+                            </p:attrNameLst>
+                          </p:cBhvr>
+                          <p:to>
+                            <p:strVal val="visible"/>
+                          </p:to>
+                        </p:set>
+                        <p:animEffect transition="in" filter="fade">
+                          <p:cBhvr>
+                            <p:cTn id="105" dur="500"/>
+                            <p:tgtEl>
+                              <p:spTgt spid="460"/>
+                            </p:tgtEl>
+                          </p:cBhvr>
+                        </p:animEffect>
+                      </p:childTnLst>
+                    </p:cTn>
+                  </p:par>
+                </p:childTnLst>
+              </p:cTn>
+              <p:prevCondLst>
+                <p:cond evt="onPrev" delay="0">
+                  <p:tgtEl>
+                    <p:sldTgt/>
+                  </p:tgtEl>
+                </p:cond>
+              </p:prevCondLst>
+              <p:nextCondLst>
+                <p:cond evt="onNext" delay="0">
+                  <p:tgtEl>
+                    <p:sldTgt/>
+                  </p:tgtEl>
+                </p:cond>
+              </p:nextCondLst>
+            </p:seq>
+          </p:childTnLst>
+        </p:cTn>
+      </p:par>
+    </p:tnLst>
+  </p:timing>
 </p:sld>
 </file>
 
@@ -37342,6 +40532,179 @@
   <p:clrMapOvr>
     <a:masterClrMapping/>
   </p:clrMapOvr>
+  <p:transition spd="med" advClick="1">
+    <p:fade/>
+  </p:transition>
+  <p:timing>
+    <p:tnLst>
+      <p:par>
+        <p:cTn id="1" dur="indefinite" restart="never" nodeType="tmRoot">
+          <p:childTnLst>
+            <p:seq concurrent="1" nextAc="seek">
+              <p:cTn id="2" dur="indefinite" nodeType="mainSeq">
+                <p:childTnLst>
+                  <p:par>
+                    <p:cTn id="3" presetID="10" presetClass="entr" presetSubtype="0" fill="hold" nodeType="afterPrev">
+                      <p:stCondLst>
+                        <p:cond delay="0"/>
+                      </p:stCondLst>
+                      <p:childTnLst>
+                        <p:set>
+                          <p:cBhvr>
+                            <p:cTn id="4" dur="1" fill="hold">
+                              <p:stCondLst>
+                                <p:cond delay="0"/>
+                              </p:stCondLst>
+                            </p:cTn>
+                            <p:tgtEl>
+                              <p:spTgt spid="468"/>
+                            </p:tgtEl>
+                            <p:attrNameLst>
+                              <p:attrName>style.visibility</p:attrName>
+                            </p:attrNameLst>
+                          </p:cBhvr>
+                          <p:to>
+                            <p:strVal val="visible"/>
+                          </p:to>
+                        </p:set>
+                        <p:animEffect transition="in" filter="fade">
+                          <p:cBhvr>
+                            <p:cTn id="100" dur="500"/>
+                            <p:tgtEl>
+                              <p:spTgt spid="468"/>
+                            </p:tgtEl>
+                          </p:cBhvr>
+                        </p:animEffect>
+                      </p:childTnLst>
+                    </p:cTn>
+                  </p:par>
+                  <p:par>
+                    <p:cTn id="5" presetID="10" presetClass="entr" presetSubtype="0" fill="hold" nodeType="afterPrev">
+                      <p:stCondLst>
+                        <p:cond delay="300"/>
+                      </p:stCondLst>
+                      <p:childTnLst>
+                        <p:set>
+                          <p:cBhvr>
+                            <p:cTn id="6" dur="1" fill="hold">
+                              <p:stCondLst>
+                                <p:cond delay="0"/>
+                              </p:stCondLst>
+                            </p:cTn>
+                            <p:tgtEl>
+                              <p:spTgt spid="469"/>
+                            </p:tgtEl>
+                            <p:attrNameLst>
+                              <p:attrName>style.visibility</p:attrName>
+                            </p:attrNameLst>
+                          </p:cBhvr>
+                          <p:to>
+                            <p:strVal val="visible"/>
+                          </p:to>
+                        </p:set>
+                        <p:animEffect transition="in" filter="fade">
+                          <p:cBhvr>
+                            <p:cTn id="101" dur="500"/>
+                            <p:tgtEl>
+                              <p:spTgt spid="469"/>
+                            </p:tgtEl>
+                          </p:cBhvr>
+                        </p:animEffect>
+                      </p:childTnLst>
+                    </p:cTn>
+                  </p:par>
+                  <p:par>
+                    <p:cTn id="7" presetID="10" presetClass="entr" presetSubtype="0" fill="hold" nodeType="afterPrev">
+                      <p:stCondLst>
+                        <p:cond delay="600"/>
+                      </p:stCondLst>
+                      <p:childTnLst>
+                        <p:set>
+                          <p:cBhvr>
+                            <p:cTn id="8" dur="1" fill="hold">
+                              <p:stCondLst>
+                                <p:cond delay="0"/>
+                              </p:stCondLst>
+                            </p:cTn>
+                            <p:tgtEl>
+                              <p:spTgt spid="470"/>
+                            </p:tgtEl>
+                            <p:attrNameLst>
+                              <p:attrName>style.visibility</p:attrName>
+                            </p:attrNameLst>
+                          </p:cBhvr>
+                          <p:to>
+                            <p:strVal val="visible"/>
+                          </p:to>
+                        </p:set>
+                        <p:animEffect transition="in" filter="fade">
+                          <p:cBhvr>
+                            <p:cTn id="102" dur="500"/>
+                            <p:tgtEl>
+                              <p:spTgt spid="470"/>
+                            </p:tgtEl>
+                          </p:cBhvr>
+                        </p:animEffect>
+                      </p:childTnLst>
+                    </p:cTn>
+                  </p:par>
+                  <p:par>
+                    <p:cTn id="9" presetID="10" presetClass="entr" presetSubtype="0" fill="hold" nodeType="afterPrev">
+                      <p:stCondLst>
+                        <p:cond delay="900"/>
+                      </p:stCondLst>
+                      <p:childTnLst>
+                        <p:set>
+                          <p:cBhvr>
+                            <p:cTn id="10" dur="1" fill="hold">
+                              <p:stCondLst>
+                                <p:cond delay="0"/>
+                              </p:stCondLst>
+                            </p:cTn>
+                            <p:tgtEl>
+                              <p:spTgt spid="471"/>
+                            </p:tgtEl>
+                            <p:attrNameLst>
+                              <p:attrName>style.visibility</p:attrName>
+                            </p:attrNameLst>
+                          </p:cBhvr>
+                          <p:to>
+                            <p:strVal val="visible"/>
+                          </p:to>
+                        </p:set>
+                        <p:animEffect transition="in" filter="fade">
+                          <p:cBhvr>
+                            <p:cTn id="103" dur="500"/>
+                            <p:tgtEl>
+                              <p:spTgt spid="471"/>
+                            </p:tgtEl>
+                          </p:cBhvr>
+                        </p:animEffect>
+                      </p:childTnLst>
+                    </p:cTn>
+                  </p:par>
+                </p:childTnLst>
+              </p:cTn>
+              <p:prevCondLst>
+                <p:cond evt="onPrev" delay="0">
+                  <p:tgtEl>
+                    <p:sldTgt/>
+                  </p:tgtEl>
+                </p:cond>
+              </p:prevCondLst>
+              <p:nextCondLst>
+                <p:cond evt="onNext" delay="0">
+                  <p:tgtEl>
+                    <p:sldTgt/>
+                  </p:tgtEl>
+                </p:cond>
+              </p:nextCondLst>
+            </p:seq>
+          </p:childTnLst>
+        </p:cTn>
+      </p:par>
+    </p:tnLst>
+  </p:timing>
 </p:sld>
 </file>
 
@@ -37619,6 +40982,214 @@
   <p:clrMapOvr>
     <a:masterClrMapping/>
   </p:clrMapOvr>
+  <p:transition spd="med" advClick="1">
+    <p:fade/>
+  </p:transition>
+  <p:timing>
+    <p:tnLst>
+      <p:par>
+        <p:cTn id="1" dur="indefinite" restart="never" nodeType="tmRoot">
+          <p:childTnLst>
+            <p:seq concurrent="1" nextAc="seek">
+              <p:cTn id="2" dur="indefinite" nodeType="mainSeq">
+                <p:childTnLst>
+                  <p:par>
+                    <p:cTn id="3" presetID="10" presetClass="entr" presetSubtype="0" fill="hold" nodeType="afterPrev">
+                      <p:stCondLst>
+                        <p:cond delay="0"/>
+                      </p:stCondLst>
+                      <p:childTnLst>
+                        <p:set>
+                          <p:cBhvr>
+                            <p:cTn id="4" dur="1" fill="hold">
+                              <p:stCondLst>
+                                <p:cond delay="0"/>
+                              </p:stCondLst>
+                            </p:cTn>
+                            <p:tgtEl>
+                              <p:spTgt spid="115"/>
+                            </p:tgtEl>
+                            <p:attrNameLst>
+                              <p:attrName>style.visibility</p:attrName>
+                            </p:attrNameLst>
+                          </p:cBhvr>
+                          <p:to>
+                            <p:strVal val="visible"/>
+                          </p:to>
+                        </p:set>
+                        <p:animEffect transition="in" filter="fade">
+                          <p:cBhvr>
+                            <p:cTn id="100" dur="500"/>
+                            <p:tgtEl>
+                              <p:spTgt spid="115"/>
+                            </p:tgtEl>
+                          </p:cBhvr>
+                        </p:animEffect>
+                      </p:childTnLst>
+                    </p:cTn>
+                  </p:par>
+                  <p:par>
+                    <p:cTn id="5" presetID="10" presetClass="entr" presetSubtype="0" fill="hold" nodeType="afterPrev">
+                      <p:stCondLst>
+                        <p:cond delay="300"/>
+                      </p:stCondLst>
+                      <p:childTnLst>
+                        <p:set>
+                          <p:cBhvr>
+                            <p:cTn id="6" dur="1" fill="hold">
+                              <p:stCondLst>
+                                <p:cond delay="0"/>
+                              </p:stCondLst>
+                            </p:cTn>
+                            <p:tgtEl>
+                              <p:spTgt spid="116"/>
+                            </p:tgtEl>
+                            <p:attrNameLst>
+                              <p:attrName>style.visibility</p:attrName>
+                            </p:attrNameLst>
+                          </p:cBhvr>
+                          <p:to>
+                            <p:strVal val="visible"/>
+                          </p:to>
+                        </p:set>
+                        <p:animEffect transition="in" filter="fade">
+                          <p:cBhvr>
+                            <p:cTn id="101" dur="500"/>
+                            <p:tgtEl>
+                              <p:spTgt spid="116"/>
+                            </p:tgtEl>
+                          </p:cBhvr>
+                        </p:animEffect>
+                      </p:childTnLst>
+                    </p:cTn>
+                  </p:par>
+                  <p:par>
+                    <p:cTn id="7" presetID="10" presetClass="entr" presetSubtype="0" fill="hold" nodeType="afterPrev">
+                      <p:stCondLst>
+                        <p:cond delay="600"/>
+                      </p:stCondLst>
+                      <p:childTnLst>
+                        <p:set>
+                          <p:cBhvr>
+                            <p:cTn id="8" dur="1" fill="hold">
+                              <p:stCondLst>
+                                <p:cond delay="0"/>
+                              </p:stCondLst>
+                            </p:cTn>
+                            <p:tgtEl>
+                              <p:spTgt spid="117"/>
+                            </p:tgtEl>
+                            <p:attrNameLst>
+                              <p:attrName>style.visibility</p:attrName>
+                            </p:attrNameLst>
+                          </p:cBhvr>
+                          <p:to>
+                            <p:strVal val="visible"/>
+                          </p:to>
+                        </p:set>
+                        <p:animEffect transition="in" filter="fade">
+                          <p:cBhvr>
+                            <p:cTn id="102" dur="500"/>
+                            <p:tgtEl>
+                              <p:spTgt spid="117"/>
+                            </p:tgtEl>
+                          </p:cBhvr>
+                        </p:animEffect>
+                      </p:childTnLst>
+                    </p:cTn>
+                  </p:par>
+                  <p:par>
+                    <p:cTn id="9" presetID="10" presetClass="entr" presetSubtype="0" fill="hold" nodeType="afterPrev">
+                      <p:stCondLst>
+                        <p:cond delay="900"/>
+                      </p:stCondLst>
+                      <p:childTnLst>
+                        <p:set>
+                          <p:cBhvr>
+                            <p:cTn id="10" dur="1" fill="hold">
+                              <p:stCondLst>
+                                <p:cond delay="0"/>
+                              </p:stCondLst>
+                            </p:cTn>
+                            <p:tgtEl>
+                              <p:spTgt spid="118"/>
+                            </p:tgtEl>
+                            <p:attrNameLst>
+                              <p:attrName>style.visibility</p:attrName>
+                            </p:attrNameLst>
+                          </p:cBhvr>
+                          <p:to>
+                            <p:strVal val="visible"/>
+                          </p:to>
+                        </p:set>
+                        <p:animEffect transition="in" filter="fade">
+                          <p:cBhvr>
+                            <p:cTn id="103" dur="500"/>
+                            <p:tgtEl>
+                              <p:spTgt spid="118"/>
+                            </p:tgtEl>
+                          </p:cBhvr>
+                        </p:animEffect>
+                      </p:childTnLst>
+                    </p:cTn>
+                  </p:par>
+                  <p:par>
+                    <p:cTn id="11" presetID="10" presetClass="entr" presetSubtype="0" fill="hold" nodeType="afterPrev">
+                      <p:stCondLst>
+                        <p:cond delay="1200"/>
+                      </p:stCondLst>
+                      <p:childTnLst>
+                        <p:set>
+                          <p:cBhvr>
+                            <p:cTn id="12" dur="1" fill="hold">
+                              <p:stCondLst>
+                                <p:cond delay="0"/>
+                              </p:stCondLst>
+                            </p:cTn>
+                            <p:tgtEl>
+                              <p:spTgt spid="3"/>
+                            </p:tgtEl>
+                            <p:attrNameLst>
+                              <p:attrName>style.visibility</p:attrName>
+                            </p:attrNameLst>
+                          </p:cBhvr>
+                          <p:to>
+                            <p:strVal val="visible"/>
+                          </p:to>
+                        </p:set>
+                        <p:animEffect transition="in" filter="fade">
+                          <p:cBhvr>
+                            <p:cTn id="104" dur="500"/>
+                            <p:tgtEl>
+                              <p:spTgt spid="3"/>
+                            </p:tgtEl>
+                          </p:cBhvr>
+                        </p:animEffect>
+                      </p:childTnLst>
+                    </p:cTn>
+                  </p:par>
+                </p:childTnLst>
+              </p:cTn>
+              <p:prevCondLst>
+                <p:cond evt="onPrev" delay="0">
+                  <p:tgtEl>
+                    <p:sldTgt/>
+                  </p:tgtEl>
+                </p:cond>
+              </p:prevCondLst>
+              <p:nextCondLst>
+                <p:cond evt="onNext" delay="0">
+                  <p:tgtEl>
+                    <p:sldTgt/>
+                  </p:tgtEl>
+                </p:cond>
+              </p:nextCondLst>
+            </p:seq>
+          </p:childTnLst>
+        </p:cTn>
+      </p:par>
+    </p:tnLst>
+  </p:timing>
 </p:sld>
 </file>
 
@@ -40007,6 +43578,249 @@
   <p:clrMapOvr>
     <a:masterClrMapping/>
   </p:clrMapOvr>
+  <p:transition spd="med" advClick="1">
+    <p:push dir="l"/>
+  </p:transition>
+  <p:timing>
+    <p:tnLst>
+      <p:par>
+        <p:cTn id="1" dur="indefinite" restart="never" nodeType="tmRoot">
+          <p:childTnLst>
+            <p:seq concurrent="1" nextAc="seek">
+              <p:cTn id="2" dur="indefinite" nodeType="mainSeq">
+                <p:childTnLst>
+                  <p:par>
+                    <p:cTn id="3" presetID="10" presetClass="entr" presetSubtype="0" fill="hold" nodeType="afterPrev">
+                      <p:stCondLst>
+                        <p:cond delay="0"/>
+                      </p:stCondLst>
+                      <p:childTnLst>
+                        <p:set>
+                          <p:cBhvr>
+                            <p:cTn id="4" dur="1" fill="hold">
+                              <p:stCondLst>
+                                <p:cond delay="0"/>
+                              </p:stCondLst>
+                            </p:cTn>
+                            <p:tgtEl>
+                              <p:spTgt spid="123"/>
+                            </p:tgtEl>
+                            <p:attrNameLst>
+                              <p:attrName>style.visibility</p:attrName>
+                            </p:attrNameLst>
+                          </p:cBhvr>
+                          <p:to>
+                            <p:strVal val="visible"/>
+                          </p:to>
+                        </p:set>
+                        <p:animEffect transition="in" filter="fade">
+                          <p:cBhvr>
+                            <p:cTn id="100" dur="500"/>
+                            <p:tgtEl>
+                              <p:spTgt spid="123"/>
+                            </p:tgtEl>
+                          </p:cBhvr>
+                        </p:animEffect>
+                      </p:childTnLst>
+                    </p:cTn>
+                  </p:par>
+                  <p:par>
+                    <p:cTn id="5" presetID="10" presetClass="entr" presetSubtype="0" fill="hold" nodeType="afterPrev">
+                      <p:stCondLst>
+                        <p:cond delay="300"/>
+                      </p:stCondLst>
+                      <p:childTnLst>
+                        <p:set>
+                          <p:cBhvr>
+                            <p:cTn id="6" dur="1" fill="hold">
+                              <p:stCondLst>
+                                <p:cond delay="0"/>
+                              </p:stCondLst>
+                            </p:cTn>
+                            <p:tgtEl>
+                              <p:spTgt spid="124"/>
+                            </p:tgtEl>
+                            <p:attrNameLst>
+                              <p:attrName>style.visibility</p:attrName>
+                            </p:attrNameLst>
+                          </p:cBhvr>
+                          <p:to>
+                            <p:strVal val="visible"/>
+                          </p:to>
+                        </p:set>
+                        <p:animEffect transition="in" filter="fade">
+                          <p:cBhvr>
+                            <p:cTn id="101" dur="500"/>
+                            <p:tgtEl>
+                              <p:spTgt spid="124"/>
+                            </p:tgtEl>
+                          </p:cBhvr>
+                        </p:animEffect>
+                      </p:childTnLst>
+                    </p:cTn>
+                  </p:par>
+                  <p:par>
+                    <p:cTn id="7" presetID="10" presetClass="entr" presetSubtype="0" fill="hold" nodeType="afterPrev">
+                      <p:stCondLst>
+                        <p:cond delay="600"/>
+                      </p:stCondLst>
+                      <p:childTnLst>
+                        <p:set>
+                          <p:cBhvr>
+                            <p:cTn id="8" dur="1" fill="hold">
+                              <p:stCondLst>
+                                <p:cond delay="0"/>
+                              </p:stCondLst>
+                            </p:cTn>
+                            <p:tgtEl>
+                              <p:spTgt spid="58"/>
+                            </p:tgtEl>
+                            <p:attrNameLst>
+                              <p:attrName>style.visibility</p:attrName>
+                            </p:attrNameLst>
+                          </p:cBhvr>
+                          <p:to>
+                            <p:strVal val="visible"/>
+                          </p:to>
+                        </p:set>
+                        <p:animEffect transition="in" filter="fade">
+                          <p:cBhvr>
+                            <p:cTn id="102" dur="500"/>
+                            <p:tgtEl>
+                              <p:spTgt spid="58"/>
+                            </p:tgtEl>
+                          </p:cBhvr>
+                        </p:animEffect>
+                      </p:childTnLst>
+                    </p:cTn>
+                  </p:par>
+                  <p:par>
+                    <p:cTn id="9" presetID="10" presetClass="entr" presetSubtype="0" fill="hold" nodeType="afterPrev">
+                      <p:stCondLst>
+                        <p:cond delay="900"/>
+                      </p:stCondLst>
+                      <p:childTnLst>
+                        <p:set>
+                          <p:cBhvr>
+                            <p:cTn id="10" dur="1" fill="hold">
+                              <p:stCondLst>
+                                <p:cond delay="0"/>
+                              </p:stCondLst>
+                            </p:cTn>
+                            <p:tgtEl>
+                              <p:spTgt spid="59"/>
+                            </p:tgtEl>
+                            <p:attrNameLst>
+                              <p:attrName>style.visibility</p:attrName>
+                            </p:attrNameLst>
+                          </p:cBhvr>
+                          <p:to>
+                            <p:strVal val="visible"/>
+                          </p:to>
+                        </p:set>
+                        <p:animEffect transition="in" filter="fade">
+                          <p:cBhvr>
+                            <p:cTn id="103" dur="500"/>
+                            <p:tgtEl>
+                              <p:spTgt spid="59"/>
+                            </p:tgtEl>
+                          </p:cBhvr>
+                        </p:animEffect>
+                      </p:childTnLst>
+                    </p:cTn>
+                  </p:par>
+                  <p:par>
+                    <p:cTn id="11" presetID="10" presetClass="entr" presetSubtype="0" fill="hold" nodeType="afterPrev">
+                      <p:stCondLst>
+                        <p:cond delay="1200"/>
+                      </p:stCondLst>
+                      <p:childTnLst>
+                        <p:set>
+                          <p:cBhvr>
+                            <p:cTn id="12" dur="1" fill="hold">
+                              <p:stCondLst>
+                                <p:cond delay="0"/>
+                              </p:stCondLst>
+                            </p:cTn>
+                            <p:tgtEl>
+                              <p:spTgt spid="60"/>
+                            </p:tgtEl>
+                            <p:attrNameLst>
+                              <p:attrName>style.visibility</p:attrName>
+                            </p:attrNameLst>
+                          </p:cBhvr>
+                          <p:to>
+                            <p:strVal val="visible"/>
+                          </p:to>
+                        </p:set>
+                        <p:animEffect transition="in" filter="fade">
+                          <p:cBhvr>
+                            <p:cTn id="104" dur="500"/>
+                            <p:tgtEl>
+                              <p:spTgt spid="60"/>
+                            </p:tgtEl>
+                          </p:cBhvr>
+                        </p:animEffect>
+                      </p:childTnLst>
+                    </p:cTn>
+                  </p:par>
+                  <p:par>
+                    <p:cTn id="13" presetID="10" presetClass="entr" presetSubtype="0" fill="hold" nodeType="afterPrev">
+                      <p:stCondLst>
+                        <p:cond delay="1500"/>
+                      </p:stCondLst>
+                      <p:childTnLst>
+                        <p:set>
+                          <p:cBhvr>
+                            <p:cTn id="14" dur="1" fill="hold">
+                              <p:stCondLst>
+                                <p:cond delay="0"/>
+                              </p:stCondLst>
+                            </p:cTn>
+                            <p:tgtEl>
+                              <p:spTgt spid="61"/>
+                            </p:tgtEl>
+                            <p:attrNameLst>
+                              <p:attrName>style.visibility</p:attrName>
+                            </p:attrNameLst>
+                          </p:cBhvr>
+                          <p:to>
+                            <p:strVal val="visible"/>
+                          </p:to>
+                        </p:set>
+                        <p:animEffect transition="in" filter="fade">
+                          <p:cBhvr>
+                            <p:cTn id="105" dur="500"/>
+                            <p:tgtEl>
+                              <p:spTgt spid="61"/>
+                            </p:tgtEl>
+                          </p:cBhvr>
+                        </p:animEffect>
+                      </p:childTnLst>
+                    </p:cTn>
+                  </p:par>
+                </p:childTnLst>
+              </p:cTn>
+              <p:prevCondLst>
+                <p:cond evt="onPrev" delay="0">
+                  <p:tgtEl>
+                    <p:sldTgt/>
+                  </p:tgtEl>
+                </p:cond>
+              </p:prevCondLst>
+              <p:nextCondLst>
+                <p:cond evt="onNext" delay="0">
+                  <p:tgtEl>
+                    <p:sldTgt/>
+                  </p:tgtEl>
+                </p:cond>
+              </p:nextCondLst>
+            </p:seq>
+          </p:childTnLst>
+        </p:cTn>
+      </p:par>
+    </p:tnLst>
+  </p:timing>
 </p:sld>
 </file>
 
@@ -40116,6 +43930,109 @@
   <p:clrMapOvr>
     <a:masterClrMapping/>
   </p:clrMapOvr>
+  <p:transition spd="med" advClick="1">
+    <p:fade/>
+  </p:transition>
+  <p:timing>
+    <p:tnLst>
+      <p:par>
+        <p:cTn id="1" dur="indefinite" restart="never" nodeType="tmRoot">
+          <p:childTnLst>
+            <p:seq concurrent="1" nextAc="seek">
+              <p:cTn id="2" dur="indefinite" nodeType="mainSeq">
+                <p:childTnLst>
+                  <p:par>
+                    <p:cTn id="3" presetID="10" presetClass="entr" presetSubtype="0" fill="hold" nodeType="afterPrev">
+                      <p:stCondLst>
+                        <p:cond delay="0"/>
+                      </p:stCondLst>
+                      <p:childTnLst>
+                        <p:set>
+                          <p:cBhvr>
+                            <p:cTn id="4" dur="1" fill="hold">
+                              <p:stCondLst>
+                                <p:cond delay="0"/>
+                              </p:stCondLst>
+                            </p:cTn>
+                            <p:tgtEl>
+                              <p:spTgt spid="156"/>
+                            </p:tgtEl>
+                            <p:attrNameLst>
+                              <p:attrName>style.visibility</p:attrName>
+                            </p:attrNameLst>
+                          </p:cBhvr>
+                          <p:to>
+                            <p:strVal val="visible"/>
+                          </p:to>
+                        </p:set>
+                        <p:animEffect transition="in" filter="fade">
+                          <p:cBhvr>
+                            <p:cTn id="100" dur="500"/>
+                            <p:tgtEl>
+                              <p:spTgt spid="156"/>
+                            </p:tgtEl>
+                          </p:cBhvr>
+                        </p:animEffect>
+                      </p:childTnLst>
+                    </p:cTn>
+                  </p:par>
+                  <p:par>
+                    <p:cTn id="5" presetID="10" presetClass="entr" presetSubtype="0" fill="hold" nodeType="afterPrev">
+                      <p:stCondLst>
+                        <p:cond delay="300"/>
+                      </p:stCondLst>
+                      <p:childTnLst>
+                        <p:set>
+                          <p:cBhvr>
+                            <p:cTn id="6" dur="1" fill="hold">
+                              <p:stCondLst>
+                                <p:cond delay="0"/>
+                              </p:stCondLst>
+                            </p:cTn>
+                            <p:tgtEl>
+                              <p:spTgt spid="157"/>
+                            </p:tgtEl>
+                            <p:attrNameLst>
+                              <p:attrName>style.visibility</p:attrName>
+                            </p:attrNameLst>
+                          </p:cBhvr>
+                          <p:to>
+                            <p:strVal val="visible"/>
+                          </p:to>
+                        </p:set>
+                        <p:animEffect transition="in" filter="fade">
+                          <p:cBhvr>
+                            <p:cTn id="101" dur="500"/>
+                            <p:tgtEl>
+                              <p:spTgt spid="157"/>
+                            </p:tgtEl>
+                          </p:cBhvr>
+                        </p:animEffect>
+                      </p:childTnLst>
+                    </p:cTn>
+                  </p:par>
+                </p:childTnLst>
+              </p:cTn>
+              <p:prevCondLst>
+                <p:cond evt="onPrev" delay="0">
+                  <p:tgtEl>
+                    <p:sldTgt/>
+                  </p:tgtEl>
+                </p:cond>
+              </p:prevCondLst>
+              <p:nextCondLst>
+                <p:cond evt="onNext" delay="0">
+                  <p:tgtEl>
+                    <p:sldTgt/>
+                  </p:tgtEl>
+                </p:cond>
+              </p:nextCondLst>
+            </p:seq>
+          </p:childTnLst>
+        </p:cTn>
+      </p:par>
+    </p:tnLst>
+  </p:timing>
 </p:sld>
 </file>
 
@@ -42586,6 +46503,249 @@
   <p:clrMapOvr>
     <a:masterClrMapping/>
   </p:clrMapOvr>
+  <p:transition spd="med" advClick="1">
+    <p:fade/>
+  </p:transition>
+  <p:timing>
+    <p:tnLst>
+      <p:par>
+        <p:cTn id="1" dur="indefinite" restart="never" nodeType="tmRoot">
+          <p:childTnLst>
+            <p:seq concurrent="1" nextAc="seek">
+              <p:cTn id="2" dur="indefinite" nodeType="mainSeq">
+                <p:childTnLst>
+                  <p:par>
+                    <p:cTn id="3" presetID="10" presetClass="entr" presetSubtype="0" fill="hold" nodeType="afterPrev">
+                      <p:stCondLst>
+                        <p:cond delay="0"/>
+                      </p:stCondLst>
+                      <p:childTnLst>
+                        <p:set>
+                          <p:cBhvr>
+                            <p:cTn id="4" dur="1" fill="hold">
+                              <p:stCondLst>
+                                <p:cond delay="0"/>
+                              </p:stCondLst>
+                            </p:cTn>
+                            <p:tgtEl>
+                              <p:spTgt spid="162"/>
+                            </p:tgtEl>
+                            <p:attrNameLst>
+                              <p:attrName>style.visibility</p:attrName>
+                            </p:attrNameLst>
+                          </p:cBhvr>
+                          <p:to>
+                            <p:strVal val="visible"/>
+                          </p:to>
+                        </p:set>
+                        <p:animEffect transition="in" filter="fade">
+                          <p:cBhvr>
+                            <p:cTn id="100" dur="500"/>
+                            <p:tgtEl>
+                              <p:spTgt spid="162"/>
+                            </p:tgtEl>
+                          </p:cBhvr>
+                        </p:animEffect>
+                      </p:childTnLst>
+                    </p:cTn>
+                  </p:par>
+                  <p:par>
+                    <p:cTn id="5" presetID="10" presetClass="entr" presetSubtype="0" fill="hold" nodeType="afterPrev">
+                      <p:stCondLst>
+                        <p:cond delay="300"/>
+                      </p:stCondLst>
+                      <p:childTnLst>
+                        <p:set>
+                          <p:cBhvr>
+                            <p:cTn id="6" dur="1" fill="hold">
+                              <p:stCondLst>
+                                <p:cond delay="0"/>
+                              </p:stCondLst>
+                            </p:cTn>
+                            <p:tgtEl>
+                              <p:spTgt spid="163"/>
+                            </p:tgtEl>
+                            <p:attrNameLst>
+                              <p:attrName>style.visibility</p:attrName>
+                            </p:attrNameLst>
+                          </p:cBhvr>
+                          <p:to>
+                            <p:strVal val="visible"/>
+                          </p:to>
+                        </p:set>
+                        <p:animEffect transition="in" filter="fade">
+                          <p:cBhvr>
+                            <p:cTn id="101" dur="500"/>
+                            <p:tgtEl>
+                              <p:spTgt spid="163"/>
+                            </p:tgtEl>
+                          </p:cBhvr>
+                        </p:animEffect>
+                      </p:childTnLst>
+                    </p:cTn>
+                  </p:par>
+                  <p:par>
+                    <p:cTn id="7" presetID="10" presetClass="entr" presetSubtype="0" fill="hold" nodeType="afterPrev">
+                      <p:stCondLst>
+                        <p:cond delay="600"/>
+                      </p:stCondLst>
+                      <p:childTnLst>
+                        <p:set>
+                          <p:cBhvr>
+                            <p:cTn id="8" dur="1" fill="hold">
+                              <p:stCondLst>
+                                <p:cond delay="0"/>
+                              </p:stCondLst>
+                            </p:cTn>
+                            <p:tgtEl>
+                              <p:spTgt spid="164"/>
+                            </p:tgtEl>
+                            <p:attrNameLst>
+                              <p:attrName>style.visibility</p:attrName>
+                            </p:attrNameLst>
+                          </p:cBhvr>
+                          <p:to>
+                            <p:strVal val="visible"/>
+                          </p:to>
+                        </p:set>
+                        <p:animEffect transition="in" filter="fade">
+                          <p:cBhvr>
+                            <p:cTn id="102" dur="500"/>
+                            <p:tgtEl>
+                              <p:spTgt spid="164"/>
+                            </p:tgtEl>
+                          </p:cBhvr>
+                        </p:animEffect>
+                      </p:childTnLst>
+                    </p:cTn>
+                  </p:par>
+                  <p:par>
+                    <p:cTn id="9" presetID="10" presetClass="entr" presetSubtype="0" fill="hold" nodeType="afterPrev">
+                      <p:stCondLst>
+                        <p:cond delay="900"/>
+                      </p:stCondLst>
+                      <p:childTnLst>
+                        <p:set>
+                          <p:cBhvr>
+                            <p:cTn id="10" dur="1" fill="hold">
+                              <p:stCondLst>
+                                <p:cond delay="0"/>
+                              </p:stCondLst>
+                            </p:cTn>
+                            <p:tgtEl>
+                              <p:spTgt spid="57"/>
+                            </p:tgtEl>
+                            <p:attrNameLst>
+                              <p:attrName>style.visibility</p:attrName>
+                            </p:attrNameLst>
+                          </p:cBhvr>
+                          <p:to>
+                            <p:strVal val="visible"/>
+                          </p:to>
+                        </p:set>
+                        <p:animEffect transition="in" filter="fade">
+                          <p:cBhvr>
+                            <p:cTn id="103" dur="500"/>
+                            <p:tgtEl>
+                              <p:spTgt spid="57"/>
+                            </p:tgtEl>
+                          </p:cBhvr>
+                        </p:animEffect>
+                      </p:childTnLst>
+                    </p:cTn>
+                  </p:par>
+                  <p:par>
+                    <p:cTn id="11" presetID="10" presetClass="entr" presetSubtype="0" fill="hold" nodeType="afterPrev">
+                      <p:stCondLst>
+                        <p:cond delay="1200"/>
+                      </p:stCondLst>
+                      <p:childTnLst>
+                        <p:set>
+                          <p:cBhvr>
+                            <p:cTn id="12" dur="1" fill="hold">
+                              <p:stCondLst>
+                                <p:cond delay="0"/>
+                              </p:stCondLst>
+                            </p:cTn>
+                            <p:tgtEl>
+                              <p:spTgt spid="58"/>
+                            </p:tgtEl>
+                            <p:attrNameLst>
+                              <p:attrName>style.visibility</p:attrName>
+                            </p:attrNameLst>
+                          </p:cBhvr>
+                          <p:to>
+                            <p:strVal val="visible"/>
+                          </p:to>
+                        </p:set>
+                        <p:animEffect transition="in" filter="fade">
+                          <p:cBhvr>
+                            <p:cTn id="104" dur="500"/>
+                            <p:tgtEl>
+                              <p:spTgt spid="58"/>
+                            </p:tgtEl>
+                          </p:cBhvr>
+                        </p:animEffect>
+                      </p:childTnLst>
+                    </p:cTn>
+                  </p:par>
+                  <p:par>
+                    <p:cTn id="13" presetID="10" presetClass="entr" presetSubtype="0" fill="hold" nodeType="afterPrev">
+                      <p:stCondLst>
+                        <p:cond delay="1500"/>
+                      </p:stCondLst>
+                      <p:childTnLst>
+                        <p:set>
+                          <p:cBhvr>
+                            <p:cTn id="14" dur="1" fill="hold">
+                              <p:stCondLst>
+                                <p:cond delay="0"/>
+                              </p:stCondLst>
+                            </p:cTn>
+                            <p:tgtEl>
+                              <p:spTgt spid="59"/>
+                            </p:tgtEl>
+                            <p:attrNameLst>
+                              <p:attrName>style.visibility</p:attrName>
+                            </p:attrNameLst>
+                          </p:cBhvr>
+                          <p:to>
+                            <p:strVal val="visible"/>
+                          </p:to>
+                        </p:set>
+                        <p:animEffect transition="in" filter="fade">
+                          <p:cBhvr>
+                            <p:cTn id="105" dur="500"/>
+                            <p:tgtEl>
+                              <p:spTgt spid="59"/>
+                            </p:tgtEl>
+                          </p:cBhvr>
+                        </p:animEffect>
+                      </p:childTnLst>
+                    </p:cTn>
+                  </p:par>
+                </p:childTnLst>
+              </p:cTn>
+              <p:prevCondLst>
+                <p:cond evt="onPrev" delay="0">
+                  <p:tgtEl>
+                    <p:sldTgt/>
+                  </p:tgtEl>
+                </p:cond>
+              </p:prevCondLst>
+              <p:nextCondLst>
+                <p:cond evt="onNext" delay="0">
+                  <p:tgtEl>
+                    <p:sldTgt/>
+                  </p:tgtEl>
+                </p:cond>
+              </p:nextCondLst>
+            </p:seq>
+          </p:childTnLst>
+        </p:cTn>
+      </p:par>
+    </p:tnLst>
+  </p:timing>
 </p:sld>
 </file>
 
@@ -45113,6 +49273,249 @@
   <p:clrMapOvr>
     <a:masterClrMapping/>
   </p:clrMapOvr>
+  <p:transition spd="med" advClick="1">
+    <p:push dir="l"/>
+  </p:transition>
+  <p:timing>
+    <p:tnLst>
+      <p:par>
+        <p:cTn id="1" dur="indefinite" restart="never" nodeType="tmRoot">
+          <p:childTnLst>
+            <p:seq concurrent="1" nextAc="seek">
+              <p:cTn id="2" dur="indefinite" nodeType="mainSeq">
+                <p:childTnLst>
+                  <p:par>
+                    <p:cTn id="3" presetID="10" presetClass="entr" presetSubtype="0" fill="hold" nodeType="afterPrev">
+                      <p:stCondLst>
+                        <p:cond delay="0"/>
+                      </p:stCondLst>
+                      <p:childTnLst>
+                        <p:set>
+                          <p:cBhvr>
+                            <p:cTn id="4" dur="1" fill="hold">
+                              <p:stCondLst>
+                                <p:cond delay="0"/>
+                              </p:stCondLst>
+                            </p:cTn>
+                            <p:tgtEl>
+                              <p:spTgt spid="195"/>
+                            </p:tgtEl>
+                            <p:attrNameLst>
+                              <p:attrName>style.visibility</p:attrName>
+                            </p:attrNameLst>
+                          </p:cBhvr>
+                          <p:to>
+                            <p:strVal val="visible"/>
+                          </p:to>
+                        </p:set>
+                        <p:animEffect transition="in" filter="fade">
+                          <p:cBhvr>
+                            <p:cTn id="100" dur="500"/>
+                            <p:tgtEl>
+                              <p:spTgt spid="195"/>
+                            </p:tgtEl>
+                          </p:cBhvr>
+                        </p:animEffect>
+                      </p:childTnLst>
+                    </p:cTn>
+                  </p:par>
+                  <p:par>
+                    <p:cTn id="5" presetID="10" presetClass="entr" presetSubtype="0" fill="hold" nodeType="afterPrev">
+                      <p:stCondLst>
+                        <p:cond delay="300"/>
+                      </p:stCondLst>
+                      <p:childTnLst>
+                        <p:set>
+                          <p:cBhvr>
+                            <p:cTn id="6" dur="1" fill="hold">
+                              <p:stCondLst>
+                                <p:cond delay="0"/>
+                              </p:stCondLst>
+                            </p:cTn>
+                            <p:tgtEl>
+                              <p:spTgt spid="224"/>
+                            </p:tgtEl>
+                            <p:attrNameLst>
+                              <p:attrName>style.visibility</p:attrName>
+                            </p:attrNameLst>
+                          </p:cBhvr>
+                          <p:to>
+                            <p:strVal val="visible"/>
+                          </p:to>
+                        </p:set>
+                        <p:animEffect transition="in" filter="fade">
+                          <p:cBhvr>
+                            <p:cTn id="101" dur="500"/>
+                            <p:tgtEl>
+                              <p:spTgt spid="224"/>
+                            </p:tgtEl>
+                          </p:cBhvr>
+                        </p:animEffect>
+                      </p:childTnLst>
+                    </p:cTn>
+                  </p:par>
+                  <p:par>
+                    <p:cTn id="7" presetID="10" presetClass="entr" presetSubtype="0" fill="hold" nodeType="afterPrev">
+                      <p:stCondLst>
+                        <p:cond delay="600"/>
+                      </p:stCondLst>
+                      <p:childTnLst>
+                        <p:set>
+                          <p:cBhvr>
+                            <p:cTn id="8" dur="1" fill="hold">
+                              <p:stCondLst>
+                                <p:cond delay="0"/>
+                              </p:stCondLst>
+                            </p:cTn>
+                            <p:tgtEl>
+                              <p:spTgt spid="225"/>
+                            </p:tgtEl>
+                            <p:attrNameLst>
+                              <p:attrName>style.visibility</p:attrName>
+                            </p:attrNameLst>
+                          </p:cBhvr>
+                          <p:to>
+                            <p:strVal val="visible"/>
+                          </p:to>
+                        </p:set>
+                        <p:animEffect transition="in" filter="fade">
+                          <p:cBhvr>
+                            <p:cTn id="102" dur="500"/>
+                            <p:tgtEl>
+                              <p:spTgt spid="225"/>
+                            </p:tgtEl>
+                          </p:cBhvr>
+                        </p:animEffect>
+                      </p:childTnLst>
+                    </p:cTn>
+                  </p:par>
+                  <p:par>
+                    <p:cTn id="9" presetID="10" presetClass="entr" presetSubtype="0" fill="hold" nodeType="afterPrev">
+                      <p:stCondLst>
+                        <p:cond delay="900"/>
+                      </p:stCondLst>
+                      <p:childTnLst>
+                        <p:set>
+                          <p:cBhvr>
+                            <p:cTn id="10" dur="1" fill="hold">
+                              <p:stCondLst>
+                                <p:cond delay="0"/>
+                              </p:stCondLst>
+                            </p:cTn>
+                            <p:tgtEl>
+                              <p:spTgt spid="61"/>
+                            </p:tgtEl>
+                            <p:attrNameLst>
+                              <p:attrName>style.visibility</p:attrName>
+                            </p:attrNameLst>
+                          </p:cBhvr>
+                          <p:to>
+                            <p:strVal val="visible"/>
+                          </p:to>
+                        </p:set>
+                        <p:animEffect transition="in" filter="fade">
+                          <p:cBhvr>
+                            <p:cTn id="103" dur="500"/>
+                            <p:tgtEl>
+                              <p:spTgt spid="61"/>
+                            </p:tgtEl>
+                          </p:cBhvr>
+                        </p:animEffect>
+                      </p:childTnLst>
+                    </p:cTn>
+                  </p:par>
+                  <p:par>
+                    <p:cTn id="11" presetID="10" presetClass="entr" presetSubtype="0" fill="hold" nodeType="afterPrev">
+                      <p:stCondLst>
+                        <p:cond delay="1200"/>
+                      </p:stCondLst>
+                      <p:childTnLst>
+                        <p:set>
+                          <p:cBhvr>
+                            <p:cTn id="12" dur="1" fill="hold">
+                              <p:stCondLst>
+                                <p:cond delay="0"/>
+                              </p:stCondLst>
+                            </p:cTn>
+                            <p:tgtEl>
+                              <p:spTgt spid="62"/>
+                            </p:tgtEl>
+                            <p:attrNameLst>
+                              <p:attrName>style.visibility</p:attrName>
+                            </p:attrNameLst>
+                          </p:cBhvr>
+                          <p:to>
+                            <p:strVal val="visible"/>
+                          </p:to>
+                        </p:set>
+                        <p:animEffect transition="in" filter="fade">
+                          <p:cBhvr>
+                            <p:cTn id="104" dur="500"/>
+                            <p:tgtEl>
+                              <p:spTgt spid="62"/>
+                            </p:tgtEl>
+                          </p:cBhvr>
+                        </p:animEffect>
+                      </p:childTnLst>
+                    </p:cTn>
+                  </p:par>
+                  <p:par>
+                    <p:cTn id="13" presetID="10" presetClass="entr" presetSubtype="0" fill="hold" nodeType="afterPrev">
+                      <p:stCondLst>
+                        <p:cond delay="1500"/>
+                      </p:stCondLst>
+                      <p:childTnLst>
+                        <p:set>
+                          <p:cBhvr>
+                            <p:cTn id="14" dur="1" fill="hold">
+                              <p:stCondLst>
+                                <p:cond delay="0"/>
+                              </p:stCondLst>
+                            </p:cTn>
+                            <p:tgtEl>
+                              <p:spTgt spid="63"/>
+                            </p:tgtEl>
+                            <p:attrNameLst>
+                              <p:attrName>style.visibility</p:attrName>
+                            </p:attrNameLst>
+                          </p:cBhvr>
+                          <p:to>
+                            <p:strVal val="visible"/>
+                          </p:to>
+                        </p:set>
+                        <p:animEffect transition="in" filter="fade">
+                          <p:cBhvr>
+                            <p:cTn id="105" dur="500"/>
+                            <p:tgtEl>
+                              <p:spTgt spid="63"/>
+                            </p:tgtEl>
+                          </p:cBhvr>
+                        </p:animEffect>
+                      </p:childTnLst>
+                    </p:cTn>
+                  </p:par>
+                </p:childTnLst>
+              </p:cTn>
+              <p:prevCondLst>
+                <p:cond evt="onPrev" delay="0">
+                  <p:tgtEl>
+                    <p:sldTgt/>
+                  </p:tgtEl>
+                </p:cond>
+              </p:prevCondLst>
+              <p:nextCondLst>
+                <p:cond evt="onNext" delay="0">
+                  <p:tgtEl>
+                    <p:sldTgt/>
+                  </p:tgtEl>
+                </p:cond>
+              </p:nextCondLst>
+            </p:seq>
+          </p:childTnLst>
+        </p:cTn>
+      </p:par>
+    </p:tnLst>
+  </p:timing>
 </p:sld>
 </file>
 
@@ -47589,6 +51992,249 @@
   <p:clrMapOvr>
     <a:masterClrMapping/>
   </p:clrMapOvr>
+  <p:transition spd="med" advClick="1">
+    <p:fade/>
+  </p:transition>
+  <p:timing>
+    <p:tnLst>
+      <p:par>
+        <p:cTn id="1" dur="indefinite" restart="never" nodeType="tmRoot">
+          <p:childTnLst>
+            <p:seq concurrent="1" nextAc="seek">
+              <p:cTn id="2" dur="indefinite" nodeType="mainSeq">
+                <p:childTnLst>
+                  <p:par>
+                    <p:cTn id="3" presetID="10" presetClass="entr" presetSubtype="0" fill="hold" nodeType="afterPrev">
+                      <p:stCondLst>
+                        <p:cond delay="0"/>
+                      </p:stCondLst>
+                      <p:childTnLst>
+                        <p:set>
+                          <p:cBhvr>
+                            <p:cTn id="4" dur="1" fill="hold">
+                              <p:stCondLst>
+                                <p:cond delay="0"/>
+                              </p:stCondLst>
+                            </p:cTn>
+                            <p:tgtEl>
+                              <p:spTgt spid="230"/>
+                            </p:tgtEl>
+                            <p:attrNameLst>
+                              <p:attrName>style.visibility</p:attrName>
+                            </p:attrNameLst>
+                          </p:cBhvr>
+                          <p:to>
+                            <p:strVal val="visible"/>
+                          </p:to>
+                        </p:set>
+                        <p:animEffect transition="in" filter="fade">
+                          <p:cBhvr>
+                            <p:cTn id="100" dur="500"/>
+                            <p:tgtEl>
+                              <p:spTgt spid="230"/>
+                            </p:tgtEl>
+                          </p:cBhvr>
+                        </p:animEffect>
+                      </p:childTnLst>
+                    </p:cTn>
+                  </p:par>
+                  <p:par>
+                    <p:cTn id="5" presetID="10" presetClass="entr" presetSubtype="0" fill="hold" nodeType="afterPrev">
+                      <p:stCondLst>
+                        <p:cond delay="300"/>
+                      </p:stCondLst>
+                      <p:childTnLst>
+                        <p:set>
+                          <p:cBhvr>
+                            <p:cTn id="6" dur="1" fill="hold">
+                              <p:stCondLst>
+                                <p:cond delay="0"/>
+                              </p:stCondLst>
+                            </p:cTn>
+                            <p:tgtEl>
+                              <p:spTgt spid="231"/>
+                            </p:tgtEl>
+                            <p:attrNameLst>
+                              <p:attrName>style.visibility</p:attrName>
+                            </p:attrNameLst>
+                          </p:cBhvr>
+                          <p:to>
+                            <p:strVal val="visible"/>
+                          </p:to>
+                        </p:set>
+                        <p:animEffect transition="in" filter="fade">
+                          <p:cBhvr>
+                            <p:cTn id="101" dur="500"/>
+                            <p:tgtEl>
+                              <p:spTgt spid="231"/>
+                            </p:tgtEl>
+                          </p:cBhvr>
+                        </p:animEffect>
+                      </p:childTnLst>
+                    </p:cTn>
+                  </p:par>
+                  <p:par>
+                    <p:cTn id="7" presetID="10" presetClass="entr" presetSubtype="0" fill="hold" nodeType="afterPrev">
+                      <p:stCondLst>
+                        <p:cond delay="600"/>
+                      </p:stCondLst>
+                      <p:childTnLst>
+                        <p:set>
+                          <p:cBhvr>
+                            <p:cTn id="8" dur="1" fill="hold">
+                              <p:stCondLst>
+                                <p:cond delay="0"/>
+                              </p:stCondLst>
+                            </p:cTn>
+                            <p:tgtEl>
+                              <p:spTgt spid="232"/>
+                            </p:tgtEl>
+                            <p:attrNameLst>
+                              <p:attrName>style.visibility</p:attrName>
+                            </p:attrNameLst>
+                          </p:cBhvr>
+                          <p:to>
+                            <p:strVal val="visible"/>
+                          </p:to>
+                        </p:set>
+                        <p:animEffect transition="in" filter="fade">
+                          <p:cBhvr>
+                            <p:cTn id="102" dur="500"/>
+                            <p:tgtEl>
+                              <p:spTgt spid="232"/>
+                            </p:tgtEl>
+                          </p:cBhvr>
+                        </p:animEffect>
+                      </p:childTnLst>
+                    </p:cTn>
+                  </p:par>
+                  <p:par>
+                    <p:cTn id="9" presetID="10" presetClass="entr" presetSubtype="0" fill="hold" nodeType="afterPrev">
+                      <p:stCondLst>
+                        <p:cond delay="900"/>
+                      </p:stCondLst>
+                      <p:childTnLst>
+                        <p:set>
+                          <p:cBhvr>
+                            <p:cTn id="10" dur="1" fill="hold">
+                              <p:stCondLst>
+                                <p:cond delay="0"/>
+                              </p:stCondLst>
+                            </p:cTn>
+                            <p:tgtEl>
+                              <p:spTgt spid="233"/>
+                            </p:tgtEl>
+                            <p:attrNameLst>
+                              <p:attrName>style.visibility</p:attrName>
+                            </p:attrNameLst>
+                          </p:cBhvr>
+                          <p:to>
+                            <p:strVal val="visible"/>
+                          </p:to>
+                        </p:set>
+                        <p:animEffect transition="in" filter="fade">
+                          <p:cBhvr>
+                            <p:cTn id="103" dur="500"/>
+                            <p:tgtEl>
+                              <p:spTgt spid="233"/>
+                            </p:tgtEl>
+                          </p:cBhvr>
+                        </p:animEffect>
+                      </p:childTnLst>
+                    </p:cTn>
+                  </p:par>
+                  <p:par>
+                    <p:cTn id="11" presetID="10" presetClass="entr" presetSubtype="0" fill="hold" nodeType="afterPrev">
+                      <p:stCondLst>
+                        <p:cond delay="1200"/>
+                      </p:stCondLst>
+                      <p:childTnLst>
+                        <p:set>
+                          <p:cBhvr>
+                            <p:cTn id="12" dur="1" fill="hold">
+                              <p:stCondLst>
+                                <p:cond delay="0"/>
+                              </p:stCondLst>
+                            </p:cTn>
+                            <p:tgtEl>
+                              <p:spTgt spid="32"/>
+                            </p:tgtEl>
+                            <p:attrNameLst>
+                              <p:attrName>style.visibility</p:attrName>
+                            </p:attrNameLst>
+                          </p:cBhvr>
+                          <p:to>
+                            <p:strVal val="visible"/>
+                          </p:to>
+                        </p:set>
+                        <p:animEffect transition="in" filter="fade">
+                          <p:cBhvr>
+                            <p:cTn id="104" dur="500"/>
+                            <p:tgtEl>
+                              <p:spTgt spid="32"/>
+                            </p:tgtEl>
+                          </p:cBhvr>
+                        </p:animEffect>
+                      </p:childTnLst>
+                    </p:cTn>
+                  </p:par>
+                  <p:par>
+                    <p:cTn id="13" presetID="10" presetClass="entr" presetSubtype="0" fill="hold" nodeType="afterPrev">
+                      <p:stCondLst>
+                        <p:cond delay="1500"/>
+                      </p:stCondLst>
+                      <p:childTnLst>
+                        <p:set>
+                          <p:cBhvr>
+                            <p:cTn id="14" dur="1" fill="hold">
+                              <p:stCondLst>
+                                <p:cond delay="0"/>
+                              </p:stCondLst>
+                            </p:cTn>
+                            <p:tgtEl>
+                              <p:spTgt spid="33"/>
+                            </p:tgtEl>
+                            <p:attrNameLst>
+                              <p:attrName>style.visibility</p:attrName>
+                            </p:attrNameLst>
+                          </p:cBhvr>
+                          <p:to>
+                            <p:strVal val="visible"/>
+                          </p:to>
+                        </p:set>
+                        <p:animEffect transition="in" filter="fade">
+                          <p:cBhvr>
+                            <p:cTn id="105" dur="500"/>
+                            <p:tgtEl>
+                              <p:spTgt spid="33"/>
+                            </p:tgtEl>
+                          </p:cBhvr>
+                        </p:animEffect>
+                      </p:childTnLst>
+                    </p:cTn>
+                  </p:par>
+                </p:childTnLst>
+              </p:cTn>
+              <p:prevCondLst>
+                <p:cond evt="onPrev" delay="0">
+                  <p:tgtEl>
+                    <p:sldTgt/>
+                  </p:tgtEl>
+                </p:cond>
+              </p:prevCondLst>
+              <p:nextCondLst>
+                <p:cond evt="onNext" delay="0">
+                  <p:tgtEl>
+                    <p:sldTgt/>
+                  </p:tgtEl>
+                </p:cond>
+              </p:nextCondLst>
+            </p:seq>
+          </p:childTnLst>
+        </p:cTn>
+      </p:par>
+    </p:tnLst>
+  </p:timing>
 </p:sld>
 </file>
 
@@ -47884,6 +52530,214 @@
   <p:clrMapOvr>
     <a:masterClrMapping/>
   </p:clrMapOvr>
+  <p:transition spd="med" advClick="1">
+    <p:fade/>
+  </p:transition>
+  <p:timing>
+    <p:tnLst>
+      <p:par>
+        <p:cTn id="1" dur="indefinite" restart="never" nodeType="tmRoot">
+          <p:childTnLst>
+            <p:seq concurrent="1" nextAc="seek">
+              <p:cTn id="2" dur="indefinite" nodeType="mainSeq">
+                <p:childTnLst>
+                  <p:par>
+                    <p:cTn id="3" presetID="10" presetClass="entr" presetSubtype="0" fill="hold" nodeType="afterPrev">
+                      <p:stCondLst>
+                        <p:cond delay="0"/>
+                      </p:stCondLst>
+                      <p:childTnLst>
+                        <p:set>
+                          <p:cBhvr>
+                            <p:cTn id="4" dur="1" fill="hold">
+                              <p:stCondLst>
+                                <p:cond delay="0"/>
+                              </p:stCondLst>
+                            </p:cTn>
+                            <p:tgtEl>
+                              <p:spTgt spid="264"/>
+                            </p:tgtEl>
+                            <p:attrNameLst>
+                              <p:attrName>style.visibility</p:attrName>
+                            </p:attrNameLst>
+                          </p:cBhvr>
+                          <p:to>
+                            <p:strVal val="visible"/>
+                          </p:to>
+                        </p:set>
+                        <p:animEffect transition="in" filter="fade">
+                          <p:cBhvr>
+                            <p:cTn id="100" dur="500"/>
+                            <p:tgtEl>
+                              <p:spTgt spid="264"/>
+                            </p:tgtEl>
+                          </p:cBhvr>
+                        </p:animEffect>
+                      </p:childTnLst>
+                    </p:cTn>
+                  </p:par>
+                  <p:par>
+                    <p:cTn id="5" presetID="10" presetClass="entr" presetSubtype="0" fill="hold" nodeType="afterPrev">
+                      <p:stCondLst>
+                        <p:cond delay="300"/>
+                      </p:stCondLst>
+                      <p:childTnLst>
+                        <p:set>
+                          <p:cBhvr>
+                            <p:cTn id="6" dur="1" fill="hold">
+                              <p:stCondLst>
+                                <p:cond delay="0"/>
+                              </p:stCondLst>
+                            </p:cTn>
+                            <p:tgtEl>
+                              <p:spTgt spid="265"/>
+                            </p:tgtEl>
+                            <p:attrNameLst>
+                              <p:attrName>style.visibility</p:attrName>
+                            </p:attrNameLst>
+                          </p:cBhvr>
+                          <p:to>
+                            <p:strVal val="visible"/>
+                          </p:to>
+                        </p:set>
+                        <p:animEffect transition="in" filter="fade">
+                          <p:cBhvr>
+                            <p:cTn id="101" dur="500"/>
+                            <p:tgtEl>
+                              <p:spTgt spid="265"/>
+                            </p:tgtEl>
+                          </p:cBhvr>
+                        </p:animEffect>
+                      </p:childTnLst>
+                    </p:cTn>
+                  </p:par>
+                  <p:par>
+                    <p:cTn id="7" presetID="10" presetClass="entr" presetSubtype="0" fill="hold" nodeType="afterPrev">
+                      <p:stCondLst>
+                        <p:cond delay="600"/>
+                      </p:stCondLst>
+                      <p:childTnLst>
+                        <p:set>
+                          <p:cBhvr>
+                            <p:cTn id="8" dur="1" fill="hold">
+                              <p:stCondLst>
+                                <p:cond delay="0"/>
+                              </p:stCondLst>
+                            </p:cTn>
+                            <p:tgtEl>
+                              <p:spTgt spid="266"/>
+                            </p:tgtEl>
+                            <p:attrNameLst>
+                              <p:attrName>style.visibility</p:attrName>
+                            </p:attrNameLst>
+                          </p:cBhvr>
+                          <p:to>
+                            <p:strVal val="visible"/>
+                          </p:to>
+                        </p:set>
+                        <p:animEffect transition="in" filter="fade">
+                          <p:cBhvr>
+                            <p:cTn id="102" dur="500"/>
+                            <p:tgtEl>
+                              <p:spTgt spid="266"/>
+                            </p:tgtEl>
+                          </p:cBhvr>
+                        </p:animEffect>
+                      </p:childTnLst>
+                    </p:cTn>
+                  </p:par>
+                  <p:par>
+                    <p:cTn id="9" presetID="10" presetClass="entr" presetSubtype="0" fill="hold" nodeType="afterPrev">
+                      <p:stCondLst>
+                        <p:cond delay="900"/>
+                      </p:stCondLst>
+                      <p:childTnLst>
+                        <p:set>
+                          <p:cBhvr>
+                            <p:cTn id="10" dur="1" fill="hold">
+                              <p:stCondLst>
+                                <p:cond delay="0"/>
+                              </p:stCondLst>
+                            </p:cTn>
+                            <p:tgtEl>
+                              <p:spTgt spid="267"/>
+                            </p:tgtEl>
+                            <p:attrNameLst>
+                              <p:attrName>style.visibility</p:attrName>
+                            </p:attrNameLst>
+                          </p:cBhvr>
+                          <p:to>
+                            <p:strVal val="visible"/>
+                          </p:to>
+                        </p:set>
+                        <p:animEffect transition="in" filter="fade">
+                          <p:cBhvr>
+                            <p:cTn id="103" dur="500"/>
+                            <p:tgtEl>
+                              <p:spTgt spid="267"/>
+                            </p:tgtEl>
+                          </p:cBhvr>
+                        </p:animEffect>
+                      </p:childTnLst>
+                    </p:cTn>
+                  </p:par>
+                  <p:par>
+                    <p:cTn id="11" presetID="10" presetClass="entr" presetSubtype="0" fill="hold" nodeType="afterPrev">
+                      <p:stCondLst>
+                        <p:cond delay="1200"/>
+                      </p:stCondLst>
+                      <p:childTnLst>
+                        <p:set>
+                          <p:cBhvr>
+                            <p:cTn id="12" dur="1" fill="hold">
+                              <p:stCondLst>
+                                <p:cond delay="0"/>
+                              </p:stCondLst>
+                            </p:cTn>
+                            <p:tgtEl>
+                              <p:spTgt spid="268"/>
+                            </p:tgtEl>
+                            <p:attrNameLst>
+                              <p:attrName>style.visibility</p:attrName>
+                            </p:attrNameLst>
+                          </p:cBhvr>
+                          <p:to>
+                            <p:strVal val="visible"/>
+                          </p:to>
+                        </p:set>
+                        <p:animEffect transition="in" filter="fade">
+                          <p:cBhvr>
+                            <p:cTn id="104" dur="500"/>
+                            <p:tgtEl>
+                              <p:spTgt spid="268"/>
+                            </p:tgtEl>
+                          </p:cBhvr>
+                        </p:animEffect>
+                      </p:childTnLst>
+                    </p:cTn>
+                  </p:par>
+                </p:childTnLst>
+              </p:cTn>
+              <p:prevCondLst>
+                <p:cond evt="onPrev" delay="0">
+                  <p:tgtEl>
+                    <p:sldTgt/>
+                  </p:tgtEl>
+                </p:cond>
+              </p:prevCondLst>
+              <p:nextCondLst>
+                <p:cond evt="onNext" delay="0">
+                  <p:tgtEl>
+                    <p:sldTgt/>
+                  </p:tgtEl>
+                </p:cond>
+              </p:nextCondLst>
+            </p:seq>
+          </p:childTnLst>
+        </p:cTn>
+      </p:par>
+    </p:tnLst>
+  </p:timing>
 </p:sld>
 </file>
 
